--- a/docs/lectures/02_04_lecture/t_tests_and_hypotheses.pptx
+++ b/docs/lectures/02_04_lecture/t_tests_and_hypotheses.pptx
@@ -3364,7 +3364,7 @@
             </a:pPr>
             <a:r>
               <a:rPr/>
-              <a:t>2026-07-02</a:t>
+              <a:t>2026-07-03</a:t>
             </a:r>
           </a:p>
         </p:txBody>

--- a/docs/lectures/02_04_lecture/t_tests_and_hypotheses.pptx
+++ b/docs/lectures/02_04_lecture/t_tests_and_hypotheses.pptx
@@ -30,6 +30,20 @@
     <p:sldId id="278" r:id="rId24"/>
     <p:sldId id="279" r:id="rId25"/>
     <p:sldId id="280" r:id="rId26"/>
+    <p:sldId id="281" r:id="rId27"/>
+    <p:sldId id="282" r:id="rId28"/>
+    <p:sldId id="283" r:id="rId29"/>
+    <p:sldId id="284" r:id="rId30"/>
+    <p:sldId id="285" r:id="rId31"/>
+    <p:sldId id="286" r:id="rId32"/>
+    <p:sldId id="287" r:id="rId33"/>
+    <p:sldId id="288" r:id="rId34"/>
+    <p:sldId id="289" r:id="rId35"/>
+    <p:sldId id="290" r:id="rId36"/>
+    <p:sldId id="291" r:id="rId37"/>
+    <p:sldId id="292" r:id="rId38"/>
+    <p:sldId id="293" r:id="rId39"/>
+    <p:sldId id="294" r:id="rId40"/>
   </p:sldIdLst>
   <p:sldSz cx="9144000" cy="5143500" type="screen16x9"/>
   <p:notesSz cx="6858000" cy="9144000"/>
@@ -3364,7 +3378,7 @@
             </a:pPr>
             <a:r>
               <a:rPr/>
-              <a:t>2026-07-03</a:t>
+              <a:t>2026-07-04</a:t>
             </a:r>
           </a:p>
         </p:txBody>
@@ -3375,6 +3389,1157 @@
 </file>
 
 <file path=ppt/slides/slide10.xml><?xml version="1.0" encoding="utf-8"?>
+<p:sld xmlns:a="http://schemas.openxmlformats.org/drawingml/2006/main" xmlns:r="http://schemas.openxmlformats.org/officeDocument/2006/relationships" xmlns:p="http://schemas.openxmlformats.org/presentationml/2006/main">
+  <p:cSld>
+    <p:spTree>
+      <p:nvGrpSpPr>
+        <p:cNvPr id="1" name=""/>
+        <p:cNvGrpSpPr/>
+        <p:nvPr/>
+      </p:nvGrpSpPr>
+      <p:grpSpPr>
+        <a:xfrm>
+          <a:off x="0" y="0"/>
+          <a:ext cx="0" cy="0"/>
+          <a:chOff x="0" y="0"/>
+          <a:chExt cx="0" cy="0"/>
+        </a:xfrm>
+      </p:grpSpPr>
+      <p:sp>
+        <p:nvSpPr>
+          <p:cNvPr id="2" name="Title 1"/>
+          <p:cNvSpPr>
+            <a:spLocks noGrp="1"/>
+          </p:cNvSpPr>
+          <p:nvPr>
+            <p:ph type="title"/>
+          </p:nvPr>
+        </p:nvSpPr>
+        <p:spPr>
+          <a:xfrm>
+            <a:off x="139485" y="78119"/>
+            <a:ext cx="8229600" cy="607682"/>
+          </a:xfrm>
+        </p:spPr>
+        <p:txBody>
+          <a:bodyPr/>
+          <a:lstStyle/>
+          <a:p>
+            <a:pPr lvl="0" indent="0" marL="0">
+              <a:buNone/>
+            </a:pPr>
+            <a:r>
+              <a:rPr/>
+              <a:t>Why Comparing Means Is Not Enough</a:t>
+            </a:r>
+          </a:p>
+        </p:txBody>
+      </p:sp>
+      <p:sp>
+        <p:nvSpPr>
+          <p:cNvPr id="3" name="Text Placeholder 2"/>
+          <p:cNvSpPr>
+            <a:spLocks noGrp="1"/>
+          </p:cNvSpPr>
+          <p:nvPr>
+            <p:ph idx="1" type="body"/>
+          </p:nvPr>
+        </p:nvSpPr>
+        <p:spPr/>
+        <p:txBody>
+          <a:bodyPr/>
+          <a:lstStyle/>
+          <a:p>
+            <a:pPr lvl="0" indent="0">
+              <a:buNone/>
+            </a:pPr>
+            <a:r>
+              <a:rPr>
+                <a:solidFill>
+                  <a:srgbClr val="5E5E5E"/>
+                </a:solidFill>
+                <a:latin typeface="Courier"/>
+              </a:rPr>
+              <a:t># Remind ourselves what the data look like ---------------</a:t>
+            </a:r>
+            <a:br/>
+            <a:r>
+              <a:rPr>
+                <a:solidFill>
+                  <a:srgbClr val="003B4F"/>
+                </a:solidFill>
+                <a:latin typeface="Courier"/>
+              </a:rPr>
+              <a:t>recap_plot &lt;- tree_df </a:t>
+            </a:r>
+            <a:r>
+              <a:rPr>
+                <a:solidFill>
+                  <a:srgbClr val="5E5E5E"/>
+                </a:solidFill>
+                <a:latin typeface="Courier"/>
+              </a:rPr>
+              <a:t>%&gt;%</a:t>
+            </a:r>
+            <a:br/>
+            <a:r>
+              <a:rPr>
+                <a:solidFill>
+                  <a:srgbClr val="003B4F"/>
+                </a:solidFill>
+                <a:latin typeface="Courier"/>
+              </a:rPr>
+              <a:t>  </a:t>
+            </a:r>
+            <a:r>
+              <a:rPr>
+                <a:solidFill>
+                  <a:srgbClr val="4758AB"/>
+                </a:solidFill>
+                <a:latin typeface="Courier"/>
+              </a:rPr>
+              <a:t>ggplot</a:t>
+            </a:r>
+            <a:r>
+              <a:rPr>
+                <a:solidFill>
+                  <a:srgbClr val="003B4F"/>
+                </a:solidFill>
+                <a:latin typeface="Courier"/>
+              </a:rPr>
+              <a:t>(</a:t>
+            </a:r>
+            <a:r>
+              <a:rPr>
+                <a:solidFill>
+                  <a:srgbClr val="4758AB"/>
+                </a:solidFill>
+                <a:latin typeface="Courier"/>
+              </a:rPr>
+              <a:t>aes</a:t>
+            </a:r>
+            <a:r>
+              <a:rPr>
+                <a:solidFill>
+                  <a:srgbClr val="003B4F"/>
+                </a:solidFill>
+                <a:latin typeface="Courier"/>
+              </a:rPr>
+              <a:t>(</a:t>
+            </a:r>
+            <a:r>
+              <a:rPr>
+                <a:solidFill>
+                  <a:srgbClr val="657422"/>
+                </a:solidFill>
+                <a:latin typeface="Courier"/>
+              </a:rPr>
+              <a:t>x =</a:t>
+            </a:r>
+            <a:r>
+              <a:rPr>
+                <a:solidFill>
+                  <a:srgbClr val="003B4F"/>
+                </a:solidFill>
+                <a:latin typeface="Courier"/>
+              </a:rPr>
+              <a:t> side, </a:t>
+            </a:r>
+            <a:r>
+              <a:rPr>
+                <a:solidFill>
+                  <a:srgbClr val="657422"/>
+                </a:solidFill>
+                <a:latin typeface="Courier"/>
+              </a:rPr>
+              <a:t>y =</a:t>
+            </a:r>
+            <a:r>
+              <a:rPr>
+                <a:solidFill>
+                  <a:srgbClr val="003B4F"/>
+                </a:solidFill>
+                <a:latin typeface="Courier"/>
+              </a:rPr>
+              <a:t> weight_g, </a:t>
+            </a:r>
+            <a:r>
+              <a:rPr>
+                <a:solidFill>
+                  <a:srgbClr val="657422"/>
+                </a:solidFill>
+                <a:latin typeface="Courier"/>
+              </a:rPr>
+              <a:t>color =</a:t>
+            </a:r>
+            <a:r>
+              <a:rPr>
+                <a:solidFill>
+                  <a:srgbClr val="003B4F"/>
+                </a:solidFill>
+                <a:latin typeface="Courier"/>
+              </a:rPr>
+              <a:t> side)) </a:t>
+            </a:r>
+            <a:r>
+              <a:rPr>
+                <a:solidFill>
+                  <a:srgbClr val="5E5E5E"/>
+                </a:solidFill>
+                <a:latin typeface="Courier"/>
+              </a:rPr>
+              <a:t>+</a:t>
+            </a:r>
+            <a:br/>
+            <a:r>
+              <a:rPr>
+                <a:solidFill>
+                  <a:srgbClr val="003B4F"/>
+                </a:solidFill>
+                <a:latin typeface="Courier"/>
+              </a:rPr>
+              <a:t>  </a:t>
+            </a:r>
+            <a:r>
+              <a:rPr>
+                <a:solidFill>
+                  <a:srgbClr val="4758AB"/>
+                </a:solidFill>
+                <a:latin typeface="Courier"/>
+              </a:rPr>
+              <a:t>geom_point</a:t>
+            </a:r>
+            <a:r>
+              <a:rPr>
+                <a:solidFill>
+                  <a:srgbClr val="003B4F"/>
+                </a:solidFill>
+                <a:latin typeface="Courier"/>
+              </a:rPr>
+              <a:t>(</a:t>
+            </a:r>
+            <a:br/>
+            <a:r>
+              <a:rPr>
+                <a:solidFill>
+                  <a:srgbClr val="003B4F"/>
+                </a:solidFill>
+                <a:latin typeface="Courier"/>
+              </a:rPr>
+              <a:t>    </a:t>
+            </a:r>
+            <a:r>
+              <a:rPr>
+                <a:solidFill>
+                  <a:srgbClr val="657422"/>
+                </a:solidFill>
+                <a:latin typeface="Courier"/>
+              </a:rPr>
+              <a:t>position =</a:t>
+            </a:r>
+            <a:r>
+              <a:rPr>
+                <a:solidFill>
+                  <a:srgbClr val="003B4F"/>
+                </a:solidFill>
+                <a:latin typeface="Courier"/>
+              </a:rPr>
+              <a:t> </a:t>
+            </a:r>
+            <a:r>
+              <a:rPr>
+                <a:solidFill>
+                  <a:srgbClr val="4758AB"/>
+                </a:solidFill>
+                <a:latin typeface="Courier"/>
+              </a:rPr>
+              <a:t>position_jitter</a:t>
+            </a:r>
+            <a:r>
+              <a:rPr>
+                <a:solidFill>
+                  <a:srgbClr val="003B4F"/>
+                </a:solidFill>
+                <a:latin typeface="Courier"/>
+              </a:rPr>
+              <a:t>(</a:t>
+            </a:r>
+            <a:r>
+              <a:rPr>
+                <a:solidFill>
+                  <a:srgbClr val="657422"/>
+                </a:solidFill>
+                <a:latin typeface="Courier"/>
+              </a:rPr>
+              <a:t>width =</a:t>
+            </a:r>
+            <a:r>
+              <a:rPr>
+                <a:solidFill>
+                  <a:srgbClr val="003B4F"/>
+                </a:solidFill>
+                <a:latin typeface="Courier"/>
+              </a:rPr>
+              <a:t> </a:t>
+            </a:r>
+            <a:r>
+              <a:rPr>
+                <a:solidFill>
+                  <a:srgbClr val="AD0000"/>
+                </a:solidFill>
+                <a:latin typeface="Courier"/>
+              </a:rPr>
+              <a:t>0.15</a:t>
+            </a:r>
+            <a:r>
+              <a:rPr>
+                <a:solidFill>
+                  <a:srgbClr val="003B4F"/>
+                </a:solidFill>
+                <a:latin typeface="Courier"/>
+              </a:rPr>
+              <a:t>, </a:t>
+            </a:r>
+            <a:r>
+              <a:rPr>
+                <a:solidFill>
+                  <a:srgbClr val="657422"/>
+                </a:solidFill>
+                <a:latin typeface="Courier"/>
+              </a:rPr>
+              <a:t>seed =</a:t>
+            </a:r>
+            <a:r>
+              <a:rPr>
+                <a:solidFill>
+                  <a:srgbClr val="003B4F"/>
+                </a:solidFill>
+                <a:latin typeface="Courier"/>
+              </a:rPr>
+              <a:t> </a:t>
+            </a:r>
+            <a:r>
+              <a:rPr>
+                <a:solidFill>
+                  <a:srgbClr val="AD0000"/>
+                </a:solidFill>
+                <a:latin typeface="Courier"/>
+              </a:rPr>
+              <a:t>42</a:t>
+            </a:r>
+            <a:r>
+              <a:rPr>
+                <a:solidFill>
+                  <a:srgbClr val="003B4F"/>
+                </a:solidFill>
+                <a:latin typeface="Courier"/>
+              </a:rPr>
+              <a:t>),</a:t>
+            </a:r>
+            <a:br/>
+            <a:r>
+              <a:rPr>
+                <a:solidFill>
+                  <a:srgbClr val="003B4F"/>
+                </a:solidFill>
+                <a:latin typeface="Courier"/>
+              </a:rPr>
+              <a:t>    </a:t>
+            </a:r>
+            <a:r>
+              <a:rPr>
+                <a:solidFill>
+                  <a:srgbClr val="657422"/>
+                </a:solidFill>
+                <a:latin typeface="Courier"/>
+              </a:rPr>
+              <a:t>alpha =</a:t>
+            </a:r>
+            <a:r>
+              <a:rPr>
+                <a:solidFill>
+                  <a:srgbClr val="003B4F"/>
+                </a:solidFill>
+                <a:latin typeface="Courier"/>
+              </a:rPr>
+              <a:t> </a:t>
+            </a:r>
+            <a:r>
+              <a:rPr>
+                <a:solidFill>
+                  <a:srgbClr val="AD0000"/>
+                </a:solidFill>
+                <a:latin typeface="Courier"/>
+              </a:rPr>
+              <a:t>0.5</a:t>
+            </a:r>
+            <a:r>
+              <a:rPr>
+                <a:solidFill>
+                  <a:srgbClr val="003B4F"/>
+                </a:solidFill>
+                <a:latin typeface="Courier"/>
+              </a:rPr>
+              <a:t>,</a:t>
+            </a:r>
+            <a:br/>
+            <a:r>
+              <a:rPr>
+                <a:solidFill>
+                  <a:srgbClr val="003B4F"/>
+                </a:solidFill>
+                <a:latin typeface="Courier"/>
+              </a:rPr>
+              <a:t>    </a:t>
+            </a:r>
+            <a:r>
+              <a:rPr>
+                <a:solidFill>
+                  <a:srgbClr val="657422"/>
+                </a:solidFill>
+                <a:latin typeface="Courier"/>
+              </a:rPr>
+              <a:t>size =</a:t>
+            </a:r>
+            <a:r>
+              <a:rPr>
+                <a:solidFill>
+                  <a:srgbClr val="003B4F"/>
+                </a:solidFill>
+                <a:latin typeface="Courier"/>
+              </a:rPr>
+              <a:t> </a:t>
+            </a:r>
+            <a:r>
+              <a:rPr>
+                <a:solidFill>
+                  <a:srgbClr val="AD0000"/>
+                </a:solidFill>
+                <a:latin typeface="Courier"/>
+              </a:rPr>
+              <a:t>2</a:t>
+            </a:r>
+            <a:br/>
+            <a:r>
+              <a:rPr>
+                <a:solidFill>
+                  <a:srgbClr val="003B4F"/>
+                </a:solidFill>
+                <a:latin typeface="Courier"/>
+              </a:rPr>
+              <a:t>  ) </a:t>
+            </a:r>
+            <a:r>
+              <a:rPr>
+                <a:solidFill>
+                  <a:srgbClr val="5E5E5E"/>
+                </a:solidFill>
+                <a:latin typeface="Courier"/>
+              </a:rPr>
+              <a:t>+</a:t>
+            </a:r>
+            <a:br/>
+            <a:r>
+              <a:rPr>
+                <a:solidFill>
+                  <a:srgbClr val="003B4F"/>
+                </a:solidFill>
+                <a:latin typeface="Courier"/>
+              </a:rPr>
+              <a:t>  </a:t>
+            </a:r>
+            <a:r>
+              <a:rPr>
+                <a:solidFill>
+                  <a:srgbClr val="4758AB"/>
+                </a:solidFill>
+                <a:latin typeface="Courier"/>
+              </a:rPr>
+              <a:t>stat_summary</a:t>
+            </a:r>
+            <a:r>
+              <a:rPr>
+                <a:solidFill>
+                  <a:srgbClr val="003B4F"/>
+                </a:solidFill>
+                <a:latin typeface="Courier"/>
+              </a:rPr>
+              <a:t>(</a:t>
+            </a:r>
+            <a:r>
+              <a:rPr>
+                <a:solidFill>
+                  <a:srgbClr val="657422"/>
+                </a:solidFill>
+                <a:latin typeface="Courier"/>
+              </a:rPr>
+              <a:t>fun =</a:t>
+            </a:r>
+            <a:r>
+              <a:rPr>
+                <a:solidFill>
+                  <a:srgbClr val="003B4F"/>
+                </a:solidFill>
+                <a:latin typeface="Courier"/>
+              </a:rPr>
+              <a:t> mean, </a:t>
+            </a:r>
+            <a:r>
+              <a:rPr>
+                <a:solidFill>
+                  <a:srgbClr val="657422"/>
+                </a:solidFill>
+                <a:latin typeface="Courier"/>
+              </a:rPr>
+              <a:t>geom =</a:t>
+            </a:r>
+            <a:r>
+              <a:rPr>
+                <a:solidFill>
+                  <a:srgbClr val="003B4F"/>
+                </a:solidFill>
+                <a:latin typeface="Courier"/>
+              </a:rPr>
+              <a:t> </a:t>
+            </a:r>
+            <a:r>
+              <a:rPr>
+                <a:solidFill>
+                  <a:srgbClr val="20794D"/>
+                </a:solidFill>
+                <a:latin typeface="Courier"/>
+              </a:rPr>
+              <a:t>"point"</a:t>
+            </a:r>
+            <a:r>
+              <a:rPr>
+                <a:solidFill>
+                  <a:srgbClr val="003B4F"/>
+                </a:solidFill>
+                <a:latin typeface="Courier"/>
+              </a:rPr>
+              <a:t>, </a:t>
+            </a:r>
+            <a:r>
+              <a:rPr>
+                <a:solidFill>
+                  <a:srgbClr val="657422"/>
+                </a:solidFill>
+                <a:latin typeface="Courier"/>
+              </a:rPr>
+              <a:t>size =</a:t>
+            </a:r>
+            <a:r>
+              <a:rPr>
+                <a:solidFill>
+                  <a:srgbClr val="003B4F"/>
+                </a:solidFill>
+                <a:latin typeface="Courier"/>
+              </a:rPr>
+              <a:t> </a:t>
+            </a:r>
+            <a:r>
+              <a:rPr>
+                <a:solidFill>
+                  <a:srgbClr val="AD0000"/>
+                </a:solidFill>
+                <a:latin typeface="Courier"/>
+              </a:rPr>
+              <a:t>4</a:t>
+            </a:r>
+            <a:r>
+              <a:rPr>
+                <a:solidFill>
+                  <a:srgbClr val="003B4F"/>
+                </a:solidFill>
+                <a:latin typeface="Courier"/>
+              </a:rPr>
+              <a:t>) </a:t>
+            </a:r>
+            <a:r>
+              <a:rPr>
+                <a:solidFill>
+                  <a:srgbClr val="5E5E5E"/>
+                </a:solidFill>
+                <a:latin typeface="Courier"/>
+              </a:rPr>
+              <a:t>+</a:t>
+            </a:r>
+            <a:br/>
+            <a:r>
+              <a:rPr>
+                <a:solidFill>
+                  <a:srgbClr val="003B4F"/>
+                </a:solidFill>
+                <a:latin typeface="Courier"/>
+              </a:rPr>
+              <a:t>  </a:t>
+            </a:r>
+            <a:r>
+              <a:rPr>
+                <a:solidFill>
+                  <a:srgbClr val="4758AB"/>
+                </a:solidFill>
+                <a:latin typeface="Courier"/>
+              </a:rPr>
+              <a:t>stat_summary</a:t>
+            </a:r>
+            <a:r>
+              <a:rPr>
+                <a:solidFill>
+                  <a:srgbClr val="003B4F"/>
+                </a:solidFill>
+                <a:latin typeface="Courier"/>
+              </a:rPr>
+              <a:t>(</a:t>
+            </a:r>
+            <a:br/>
+            <a:r>
+              <a:rPr>
+                <a:solidFill>
+                  <a:srgbClr val="003B4F"/>
+                </a:solidFill>
+                <a:latin typeface="Courier"/>
+              </a:rPr>
+              <a:t>    </a:t>
+            </a:r>
+            <a:r>
+              <a:rPr>
+                <a:solidFill>
+                  <a:srgbClr val="657422"/>
+                </a:solidFill>
+                <a:latin typeface="Courier"/>
+              </a:rPr>
+              <a:t>fun.data =</a:t>
+            </a:r>
+            <a:r>
+              <a:rPr>
+                <a:solidFill>
+                  <a:srgbClr val="003B4F"/>
+                </a:solidFill>
+                <a:latin typeface="Courier"/>
+              </a:rPr>
+              <a:t> mean_se,</a:t>
+            </a:r>
+            <a:br/>
+            <a:r>
+              <a:rPr>
+                <a:solidFill>
+                  <a:srgbClr val="003B4F"/>
+                </a:solidFill>
+                <a:latin typeface="Courier"/>
+              </a:rPr>
+              <a:t>    </a:t>
+            </a:r>
+            <a:r>
+              <a:rPr>
+                <a:solidFill>
+                  <a:srgbClr val="657422"/>
+                </a:solidFill>
+                <a:latin typeface="Courier"/>
+              </a:rPr>
+              <a:t>geom =</a:t>
+            </a:r>
+            <a:r>
+              <a:rPr>
+                <a:solidFill>
+                  <a:srgbClr val="003B4F"/>
+                </a:solidFill>
+                <a:latin typeface="Courier"/>
+              </a:rPr>
+              <a:t> </a:t>
+            </a:r>
+            <a:r>
+              <a:rPr>
+                <a:solidFill>
+                  <a:srgbClr val="20794D"/>
+                </a:solidFill>
+                <a:latin typeface="Courier"/>
+              </a:rPr>
+              <a:t>"errorbar"</a:t>
+            </a:r>
+            <a:r>
+              <a:rPr>
+                <a:solidFill>
+                  <a:srgbClr val="003B4F"/>
+                </a:solidFill>
+                <a:latin typeface="Courier"/>
+              </a:rPr>
+              <a:t>,</a:t>
+            </a:r>
+            <a:br/>
+            <a:r>
+              <a:rPr>
+                <a:solidFill>
+                  <a:srgbClr val="003B4F"/>
+                </a:solidFill>
+                <a:latin typeface="Courier"/>
+              </a:rPr>
+              <a:t>    </a:t>
+            </a:r>
+            <a:r>
+              <a:rPr>
+                <a:solidFill>
+                  <a:srgbClr val="657422"/>
+                </a:solidFill>
+                <a:latin typeface="Courier"/>
+              </a:rPr>
+              <a:t>width =</a:t>
+            </a:r>
+            <a:r>
+              <a:rPr>
+                <a:solidFill>
+                  <a:srgbClr val="003B4F"/>
+                </a:solidFill>
+                <a:latin typeface="Courier"/>
+              </a:rPr>
+              <a:t> </a:t>
+            </a:r>
+            <a:r>
+              <a:rPr>
+                <a:solidFill>
+                  <a:srgbClr val="AD0000"/>
+                </a:solidFill>
+                <a:latin typeface="Courier"/>
+              </a:rPr>
+              <a:t>0.15</a:t>
+            </a:r>
+            <a:r>
+              <a:rPr>
+                <a:solidFill>
+                  <a:srgbClr val="003B4F"/>
+                </a:solidFill>
+                <a:latin typeface="Courier"/>
+              </a:rPr>
+              <a:t>,</a:t>
+            </a:r>
+            <a:br/>
+            <a:r>
+              <a:rPr>
+                <a:solidFill>
+                  <a:srgbClr val="003B4F"/>
+                </a:solidFill>
+                <a:latin typeface="Courier"/>
+              </a:rPr>
+              <a:t>    </a:t>
+            </a:r>
+            <a:r>
+              <a:rPr>
+                <a:solidFill>
+                  <a:srgbClr val="657422"/>
+                </a:solidFill>
+                <a:latin typeface="Courier"/>
+              </a:rPr>
+              <a:t>linewidth =</a:t>
+            </a:r>
+            <a:r>
+              <a:rPr>
+                <a:solidFill>
+                  <a:srgbClr val="003B4F"/>
+                </a:solidFill>
+                <a:latin typeface="Courier"/>
+              </a:rPr>
+              <a:t> </a:t>
+            </a:r>
+            <a:r>
+              <a:rPr>
+                <a:solidFill>
+                  <a:srgbClr val="AD0000"/>
+                </a:solidFill>
+                <a:latin typeface="Courier"/>
+              </a:rPr>
+              <a:t>0.9</a:t>
+            </a:r>
+            <a:br/>
+            <a:r>
+              <a:rPr>
+                <a:solidFill>
+                  <a:srgbClr val="003B4F"/>
+                </a:solidFill>
+                <a:latin typeface="Courier"/>
+              </a:rPr>
+              <a:t>  ) </a:t>
+            </a:r>
+            <a:r>
+              <a:rPr>
+                <a:solidFill>
+                  <a:srgbClr val="5E5E5E"/>
+                </a:solidFill>
+                <a:latin typeface="Courier"/>
+              </a:rPr>
+              <a:t>+</a:t>
+            </a:r>
+            <a:br/>
+            <a:r>
+              <a:rPr>
+                <a:solidFill>
+                  <a:srgbClr val="003B4F"/>
+                </a:solidFill>
+                <a:latin typeface="Courier"/>
+              </a:rPr>
+              <a:t>  </a:t>
+            </a:r>
+            <a:r>
+              <a:rPr>
+                <a:solidFill>
+                  <a:srgbClr val="4758AB"/>
+                </a:solidFill>
+                <a:latin typeface="Courier"/>
+              </a:rPr>
+              <a:t>labs</a:t>
+            </a:r>
+            <a:r>
+              <a:rPr>
+                <a:solidFill>
+                  <a:srgbClr val="003B4F"/>
+                </a:solidFill>
+                <a:latin typeface="Courier"/>
+              </a:rPr>
+              <a:t>(</a:t>
+            </a:r>
+            <a:r>
+              <a:rPr>
+                <a:solidFill>
+                  <a:srgbClr val="657422"/>
+                </a:solidFill>
+                <a:latin typeface="Courier"/>
+              </a:rPr>
+              <a:t>x =</a:t>
+            </a:r>
+            <a:r>
+              <a:rPr>
+                <a:solidFill>
+                  <a:srgbClr val="003B4F"/>
+                </a:solidFill>
+                <a:latin typeface="Courier"/>
+              </a:rPr>
+              <a:t> </a:t>
+            </a:r>
+            <a:r>
+              <a:rPr>
+                <a:solidFill>
+                  <a:srgbClr val="20794D"/>
+                </a:solidFill>
+                <a:latin typeface="Courier"/>
+              </a:rPr>
+              <a:t>"Side"</a:t>
+            </a:r>
+            <a:r>
+              <a:rPr>
+                <a:solidFill>
+                  <a:srgbClr val="003B4F"/>
+                </a:solidFill>
+                <a:latin typeface="Courier"/>
+              </a:rPr>
+              <a:t>, </a:t>
+            </a:r>
+            <a:r>
+              <a:rPr>
+                <a:solidFill>
+                  <a:srgbClr val="657422"/>
+                </a:solidFill>
+                <a:latin typeface="Courier"/>
+              </a:rPr>
+              <a:t>y =</a:t>
+            </a:r>
+            <a:r>
+              <a:rPr>
+                <a:solidFill>
+                  <a:srgbClr val="003B4F"/>
+                </a:solidFill>
+                <a:latin typeface="Courier"/>
+              </a:rPr>
+              <a:t> </a:t>
+            </a:r>
+            <a:r>
+              <a:rPr>
+                <a:solidFill>
+                  <a:srgbClr val="20794D"/>
+                </a:solidFill>
+                <a:latin typeface="Courier"/>
+              </a:rPr>
+              <a:t>"Leaf Weight (g)"</a:t>
+            </a:r>
+            <a:r>
+              <a:rPr>
+                <a:solidFill>
+                  <a:srgbClr val="003B4F"/>
+                </a:solidFill>
+                <a:latin typeface="Courier"/>
+              </a:rPr>
+              <a:t>) </a:t>
+            </a:r>
+            <a:r>
+              <a:rPr>
+                <a:solidFill>
+                  <a:srgbClr val="5E5E5E"/>
+                </a:solidFill>
+                <a:latin typeface="Courier"/>
+              </a:rPr>
+              <a:t>+</a:t>
+            </a:r>
+            <a:br/>
+            <a:r>
+              <a:rPr>
+                <a:solidFill>
+                  <a:srgbClr val="003B4F"/>
+                </a:solidFill>
+                <a:latin typeface="Courier"/>
+              </a:rPr>
+              <a:t>  </a:t>
+            </a:r>
+            <a:r>
+              <a:rPr>
+                <a:solidFill>
+                  <a:srgbClr val="4758AB"/>
+                </a:solidFill>
+                <a:latin typeface="Courier"/>
+              </a:rPr>
+              <a:t>theme_minimal</a:t>
+            </a:r>
+            <a:r>
+              <a:rPr>
+                <a:solidFill>
+                  <a:srgbClr val="003B4F"/>
+                </a:solidFill>
+                <a:latin typeface="Courier"/>
+              </a:rPr>
+              <a:t>() </a:t>
+            </a:r>
+            <a:r>
+              <a:rPr>
+                <a:solidFill>
+                  <a:srgbClr val="5E5E5E"/>
+                </a:solidFill>
+                <a:latin typeface="Courier"/>
+              </a:rPr>
+              <a:t>+</a:t>
+            </a:r>
+            <a:br/>
+            <a:r>
+              <a:rPr>
+                <a:solidFill>
+                  <a:srgbClr val="003B4F"/>
+                </a:solidFill>
+                <a:latin typeface="Courier"/>
+              </a:rPr>
+              <a:t>  </a:t>
+            </a:r>
+            <a:r>
+              <a:rPr>
+                <a:solidFill>
+                  <a:srgbClr val="4758AB"/>
+                </a:solidFill>
+                <a:latin typeface="Courier"/>
+              </a:rPr>
+              <a:t>theme</a:t>
+            </a:r>
+            <a:r>
+              <a:rPr>
+                <a:solidFill>
+                  <a:srgbClr val="003B4F"/>
+                </a:solidFill>
+                <a:latin typeface="Courier"/>
+              </a:rPr>
+              <a:t>(</a:t>
+            </a:r>
+            <a:r>
+              <a:rPr>
+                <a:solidFill>
+                  <a:srgbClr val="657422"/>
+                </a:solidFill>
+                <a:latin typeface="Courier"/>
+              </a:rPr>
+              <a:t>legend.position =</a:t>
+            </a:r>
+            <a:r>
+              <a:rPr>
+                <a:solidFill>
+                  <a:srgbClr val="003B4F"/>
+                </a:solidFill>
+                <a:latin typeface="Courier"/>
+              </a:rPr>
+              <a:t> </a:t>
+            </a:r>
+            <a:r>
+              <a:rPr>
+                <a:solidFill>
+                  <a:srgbClr val="20794D"/>
+                </a:solidFill>
+                <a:latin typeface="Courier"/>
+              </a:rPr>
+              <a:t>"none"</a:t>
+            </a:r>
+            <a:r>
+              <a:rPr>
+                <a:solidFill>
+                  <a:srgbClr val="003B4F"/>
+                </a:solidFill>
+                <a:latin typeface="Courier"/>
+              </a:rPr>
+              <a:t>)</a:t>
+            </a:r>
+            <a:br/>
+            <a:r>
+              <a:rPr>
+                <a:solidFill>
+                  <a:srgbClr val="003B4F"/>
+                </a:solidFill>
+                <a:latin typeface="Courier"/>
+              </a:rPr>
+              <a:t>recap_plot</a:t>
+            </a:r>
+          </a:p>
+        </p:txBody>
+      </p:sp>
+      <p:pic>
+        <p:nvPicPr>
+          <p:cNvPr descr="t_tests_and_hypotheses_files/figure-pptx/recap-plot-1.png" id="0" name="Picture 1"/>
+          <p:cNvPicPr>
+            <a:picLocks noGrp="1" noChangeAspect="1"/>
+          </p:cNvPicPr>
+          <p:nvPr/>
+        </p:nvPicPr>
+        <p:blipFill>
+          <a:blip r:embed="rId2"/>
+          <a:stretch>
+            <a:fillRect/>
+          </a:stretch>
+        </p:blipFill>
+        <p:spPr bwMode="auto">
+          <a:xfrm>
+            <a:off x="127000" y="1562100"/>
+            <a:ext cx="4432300" cy="2730500"/>
+          </a:xfrm>
+          <a:prstGeom prst="rect">
+            <a:avLst/>
+          </a:prstGeom>
+          <a:noFill/>
+          <a:ln w="9525">
+            <a:noFill/>
+            <a:headEnd/>
+            <a:tailEnd/>
+          </a:ln>
+        </p:spPr>
+      </p:pic>
+      <p:sp>
+        <p:nvSpPr>
+          <p:cNvPr id="5" name="Text Placeholder 4"/>
+          <p:cNvSpPr>
+            <a:spLocks noGrp="1"/>
+          </p:cNvSpPr>
+          <p:nvPr>
+            <p:ph idx="3" sz="quarter" type="body"/>
+          </p:nvPr>
+        </p:nvSpPr>
+        <p:spPr/>
+        <p:txBody>
+          <a:bodyPr/>
+          <a:lstStyle/>
+          <a:p>
+            <a:pPr lvl="0" indent="0" marL="0">
+              <a:buNone/>
+            </a:pPr>
+            <a:r>
+              <a:rPr/>
+              <a:t>The means look different — but:</a:t>
+            </a:r>
+          </a:p>
+          <a:p>
+            <a:pPr lvl="0"/>
+            <a:r>
+              <a:rPr/>
+              <a:t>We only have </a:t>
+            </a:r>
+            <a:r>
+              <a:rPr b="1"/>
+              <a:t>10 leaves per group</a:t>
+            </a:r>
+          </a:p>
+          <a:p>
+            <a:pPr lvl="0"/>
+            <a:r>
+              <a:rPr/>
+              <a:t>There is </a:t>
+            </a:r>
+            <a:r>
+              <a:rPr b="1"/>
+              <a:t>natural variability</a:t>
+            </a:r>
+            <a:r>
+              <a:rPr/>
+              <a:t> within each group</a:t>
+            </a:r>
+          </a:p>
+          <a:p>
+            <a:pPr lvl="0"/>
+            <a:r>
+              <a:rPr/>
+              <a:t>The groups’ ranges </a:t>
+            </a:r>
+            <a:r>
+              <a:rPr b="1"/>
+              <a:t>overlap</a:t>
+            </a:r>
+            <a:r>
+              <a:rPr/>
+              <a:t> somewhat</a:t>
+            </a:r>
+          </a:p>
+          <a:p>
+            <a:pPr lvl="0" indent="0" marL="0">
+              <a:buNone/>
+            </a:pPr>
+            <a:r>
+              <a:rPr/>
+              <a:t>A </a:t>
+            </a:r>
+            <a:r>
+              <a:rPr i="1"/>
+              <a:t>p</a:t>
+            </a:r>
+            <a:r>
+              <a:rPr/>
+              <a:t>-value tells us:</a:t>
+            </a:r>
+          </a:p>
+          <a:p>
+            <a:pPr lvl="0" indent="0" marL="1270000">
+              <a:buNone/>
+            </a:pPr>
+            <a:r>
+              <a:rPr sz="2000" i="1"/>
+              <a:t>“If H₀ were true, how often would we see a gap this large just by chance?”</a:t>
+            </a:r>
+          </a:p>
+          <a:p>
+            <a:pPr lvl="0" indent="0" marL="0">
+              <a:buNone/>
+            </a:pPr>
+            <a:r>
+              <a:rPr/>
+              <a:t>Small </a:t>
+            </a:r>
+            <a:r>
+              <a:rPr i="1"/>
+              <a:t>p</a:t>
+            </a:r>
+            <a:r>
+              <a:rPr/>
+              <a:t> → the gap is unlikely to be chance.</a:t>
+            </a:r>
+          </a:p>
+        </p:txBody>
+      </p:sp>
+    </p:spTree>
+  </p:cSld>
+</p:sld>
+</file>
+
+<file path=ppt/slides/slide11.xml><?xml version="1.0" encoding="UTF-8"?><p:sld xmlns:a="http://schemas.openxmlformats.org/drawingml/2006/main" xmlns:r="http://schemas.openxmlformats.org/officeDocument/2006/relationships" xmlns:p="http://schemas.openxmlformats.org/presentationml/2006/main"><p:cSld><p:spTree><p:nvGrpSpPr><p:cNvPr id="1" name="" /><p:cNvGrpSpPr /><p:nvPr /></p:nvGrpSpPr><p:grpSpPr><a:xfrm><a:off x="0" y="0" /><a:ext cx="0" cy="0" /><a:chOff x="0" y="0" /><a:chExt cx="0" cy="0" /></a:xfrm></p:grpSpPr><p:sp><p:nvSpPr><p:cNvPr id="2" name="Title 1" /><p:cNvSpPr><a:spLocks noGrp="1" /></p:cNvSpPr><p:nvPr><p:ph type="title" /></p:nvPr></p:nvSpPr><p:spPr><a:xfrm><a:off x="0" y="0" /><a:ext cx="9144000" cy="602780" /></a:xfrm><a:solidFill><a:srgbClr val="1A1A2E" /></a:solidFill></p:spPr><p:txBody><a:bodyPr /><a:lstStyle /><a:p><a:pPr lvl="0" indent="0" marL="0"><a:buNone /></a:pPr><a:r><a:rPr /><a:t>What Is a Two-Sample t-Test?</a:t></a:r></a:p></p:txBody></p:sp><mc:AlternateContent xmlns:mc="http://schemas.openxmlformats.org/markup-compatibility/2006"><mc:Choice xmlns:a14="http://schemas.microsoft.com/office/drawing/2010/main" Requires="a14"><p:sp><p:nvSpPr><p:cNvPr id="3" name="Content Placeholder 2" /><p:cNvSpPr><a:spLocks noGrp="1" /></p:cNvSpPr><p:nvPr><p:ph idx="1" sz="half" /></p:nvPr></p:nvSpPr><p:spPr /><p:txBody><a:bodyPr /><a:lstStyle /><a:p><a:pPr lvl="0" indent="0" marL="0"><a:buNone /></a:pPr><a:r><a:rPr /><a:t>A two-sample t-test compares the </a:t></a:r><a:r><a:rPr b="1" /><a:t>means of two independent groups</a:t></a:r><a:r><a:rPr /><a:t>.</a:t></a:r></a:p><a:p><a:pPr lvl="0" indent="0" marL="0"><a:buNone /></a:pPr><a:r><a:rPr /><a:t>It asks: </a:t></a:r><a:r><a:rPr i="1" /><a:t>Could both groups plausibly be drawn from populations with the same mean?</a:t></a:r></a:p><a:p><a:pPr lvl="0" indent="0" marL="0"><a:buNone /></a:pPr><a:r><a:rPr /><a:t>The </a:t></a:r><a:r><a:rPr b="1" /><a:t>t-statistic</a:t></a:r><a:r><a:rPr /><a:t> is:</a:t></a:r></a:p><a:p><a:pPr lvl="0" indent="0" marL="0"><a:buNone /></a:pPr><a14:m><m:oMathPara xmlns:m="http://schemas.openxmlformats.org/officeDocument/2006/math"><m:oMathParaPr><m:jc m:val="center" /></m:oMathParaPr><m:oMath><m:r><m:t>t</m:t></m:r><m:r><m:rPr><m:sty m:val="p" /></m:rPr><m:t>=</m:t></m:r><m:f><m:fPr><m:type m:val="bar" /></m:fPr><m:num><m:sSub><m:e><m:acc><m:accPr><m:chr m:val="‾" /></m:accPr><m:e><m:r><m:t>x</m:t></m:r></m:e></m:acc></m:e><m:sub><m:r><m:t>1</m:t></m:r></m:sub></m:sSub><m:r><m:rPr><m:sty m:val="p" /></m:rPr><m:t>−</m:t></m:r><m:sSub><m:e><m:acc><m:accPr><m:chr m:val="‾" /></m:accPr><m:e><m:r><m:t>x</m:t></m:r></m:e></m:acc></m:e><m:sub><m:r><m:t>2</m:t></m:r></m:sub></m:sSub></m:num><m:den><m:sSub><m:e><m:r><m:rPr><m:nor /><m:sty m:val="p" /></m:rPr><m:t>SE</m:t></m:r></m:e><m:sub><m:r><m:rPr><m:nor /><m:sty m:val="p" /></m:rPr><m:t>diff</m:t></m:r></m:sub></m:sSub></m:den></m:f></m:oMath></m:oMathPara></a14:m></a:p><a:p><a:pPr lvl="0" /><a:r><a:rPr /><a:t>Numerator: the </a:t></a:r><a:r><a:rPr b="1" /><a:t>observed difference</a:t></a:r><a:r><a:rPr /><a:t> in means</a:t></a:r></a:p><a:p><a:pPr lvl="0" /><a:r><a:rPr /><a:t>Denominator: the </a:t></a:r><a:r><a:rPr b="1" /><a:t>uncertainty</a:t></a:r><a:r><a:rPr /><a:t> in that difference (SE of the difference)</a:t></a:r></a:p><a:p><a:pPr lvl="0" indent="0" marL="0"><a:buNone /></a:pPr><a:r><a:rPr b="1" /><a:t>Large |t|</a:t></a:r><a:r><a:rPr /><a:t> → the difference is large relative to the noise → small </a:t></a:r><a:r><a:rPr i="1" /><a:t>p</a:t></a:r><a:r><a:rPr /><a:t>-value</a:t></a:r></a:p></p:txBody></p:sp></mc:Choice></mc:AlternateContent><p:graphicFrame><p:nvGraphicFramePr><p:cNvPr id="6" name="Content Placeholder 5" /><p:cNvGraphicFramePr><a:graphicFrameLocks noGrp="1" /></p:cNvGraphicFramePr><p:nvPr><p:ph idx="1" /></p:nvPr></p:nvGraphicFramePr><p:xfrm><a:off x="4495800" y="660400" /><a:ext cx="4406900" cy="3810000" /></p:xfrm><a:graphic><a:graphicData uri="http://schemas.openxmlformats.org/drawingml/2006/table"><a:tbl><a:tblPr firstRow="1" bandRow="1"><a:tableStyleId>{5C22544A-7EE6-4342-B048-85BDC9FD1C3A}</a:tableStyleId></a:tblPr><a:tblGrid><a:gridCol w="2197100" /><a:gridCol w="2197100" /></a:tblGrid><a:tr h="0"><a:tc><a:txBody><a:bodyPr /><a:lstStyle /><a:p><a:pPr lvl="0" indent="0" marL="0"><a:buNone /></a:pPr><a:r><a:rPr /><a:t>Component</a:t></a:r></a:p></a:txBody><a:tcPr /></a:tc><a:tc><a:txBody><a:bodyPr /><a:lstStyle /><a:p><a:pPr lvl="0" indent="0" marL="0"><a:buNone /></a:pPr><a:r><a:rPr /><a:t>Our context</a:t></a:r></a:p></a:txBody><a:tcPr /></a:tc></a:tr><a:tr h="0"><a:tc><a:txBody><a:bodyPr /><a:lstStyle /><a:p><a:pPr lvl="0" indent="0" marL="0"><a:buNone /></a:pPr><a:r><a:rPr /><a:t>Group 1</a:t></a:r></a:p></a:txBody></a:tc><a:tc><a:txBody><a:bodyPr /><a:lstStyle /><a:p><a:pPr lvl="0" indent="0" marL="0"><a:buNone /></a:pPr><a:r><a:rPr /><a:t>Shady leaves</a:t></a:r></a:p></a:txBody></a:tc></a:tr><a:tr h="0"><a:tc><a:txBody><a:bodyPr /><a:lstStyle /><a:p><a:pPr lvl="0" indent="0" marL="0"><a:buNone /></a:pPr><a:r><a:rPr /><a:t>Group 2</a:t></a:r></a:p></a:txBody></a:tc><a:tc><a:txBody><a:bodyPr /><a:lstStyle /><a:p><a:pPr lvl="0" indent="0" marL="0"><a:buNone /></a:pPr><a:r><a:rPr /><a:t>Sunny leaves</a:t></a:r></a:p></a:txBody></a:tc></a:tr><a:tr h="0"><a:tc><a:txBody><a:bodyPr /><a:lstStyle /><a:p><a:pPr lvl="0" indent="0" marL="0"><a:buNone /></a:pPr><a:r><a:rPr /><a:t>Measurement</a:t></a:r></a:p></a:txBody></a:tc><a:tc><a:txBody><a:bodyPr /><a:lstStyle /><a:p><a:pPr lvl="0" indent="0" marL="0"><a:buNone /></a:pPr><a:r><a:rPr><a:latin typeface="Courier" /></a:rPr><a:t>weight_g</a:t></a:r></a:p></a:txBody></a:tc></a:tr><a:tr h="0"><a:tc><a:txBody><a:bodyPr /><a:lstStyle /><a:p><a:pPr lvl="0" indent="0" marL="0"><a:buNone /></a:pPr><a:r><a:rPr /><a:t>H₀</a:t></a:r></a:p></a:txBody></a:tc><a:tc><a:txBody><a:bodyPr /><a:lstStyle /><a:p><a:pPr lvl="0" indent="0" marL="0"><a:buNone /></a:pPr><a14:m><m:oMath xmlns:m="http://schemas.openxmlformats.org/officeDocument/2006/math"><m:sSub><m:e><m:r><m:t>μ</m:t></m:r></m:e><m:sub><m:r><m:t>s</m:t></m:r><m:r><m:t>h</m:t></m:r><m:r><m:t>a</m:t></m:r><m:r><m:t>d</m:t></m:r><m:r><m:t>y</m:t></m:r></m:sub></m:sSub><m:r><m:rPr><m:sty m:val="p" /></m:rPr><m:t>=</m:t></m:r><m:sSub><m:e><m:r><m:t>μ</m:t></m:r></m:e><m:sub><m:r><m:t>s</m:t></m:r><m:r><m:t>u</m:t></m:r><m:r><m:t>n</m:t></m:r><m:r><m:t>n</m:t></m:r><m:r><m:t>y</m:t></m:r></m:sub></m:sSub></m:oMath></a14:m></a:p></a:txBody></a:tc></a:tr><a:tr h="0"><a:tc><a:txBody><a:bodyPr /><a:lstStyle /><a:p><a:pPr lvl="0" indent="0" marL="0"><a:buNone /></a:pPr><a:r><a:rPr /><a:t>Hₐ</a:t></a:r></a:p></a:txBody></a:tc><a:tc><a:txBody><a:bodyPr /><a:lstStyle /><a:p><a:pPr lvl="0" indent="0" marL="0"><a:buNone /></a:pPr><a14:m><m:oMath xmlns:m="http://schemas.openxmlformats.org/officeDocument/2006/math"><m:sSub><m:e><m:r><m:t>μ</m:t></m:r></m:e><m:sub><m:r><m:t>s</m:t></m:r><m:r><m:t>h</m:t></m:r><m:r><m:t>a</m:t></m:r><m:r><m:t>d</m:t></m:r><m:r><m:t>y</m:t></m:r></m:sub></m:sSub><m:r><m:rPr><m:sty m:val="p" /></m:rPr><m:t>≠</m:t></m:r><m:sSub><m:e><m:r><m:t>μ</m:t></m:r></m:e><m:sub><m:r><m:t>s</m:t></m:r><m:r><m:t>u</m:t></m:r><m:r><m:t>n</m:t></m:r><m:r><m:t>n</m:t></m:r><m:r><m:t>y</m:t></m:r></m:sub></m:sSub></m:oMath></a14:m></a:p></a:txBody></a:tc></a:tr></a:tbl></a:graphicData></a:graphic></p:graphicFrame></p:spTree></p:cSld></p:sld>
+</file>
+
+<file path=ppt/slides/slide12.xml><?xml version="1.0" encoding="utf-8"?>
 <p:sld xmlns:a="http://schemas.openxmlformats.org/drawingml/2006/main" xmlns:r="http://schemas.openxmlformats.org/officeDocument/2006/relationships" xmlns:p="http://schemas.openxmlformats.org/presentationml/2006/main">
   <p:cSld>
     <p:spTree>
@@ -3419,11 +4584,492 @@
             </a:pPr>
             <a:r>
               <a:rPr/>
-              <a:t>The Welch’s Formula in Action</a:t>
+              <a:t>Why Welch’s? — Don’t Assume Equal Variance</a:t>
             </a:r>
           </a:p>
         </p:txBody>
       </p:sp>
+      <mc:AlternateContent xmlns:mc="http://schemas.openxmlformats.org/markup-compatibility/2006">
+        <mc:Choice xmlns:a14="http://schemas.microsoft.com/office/drawing/2010/main" Requires="a14">
+          <p:sp>
+            <p:nvSpPr>
+              <p:cNvPr id="3" name="Content Placeholder 2"/>
+              <p:cNvSpPr>
+                <a:spLocks noGrp="1"/>
+              </p:cNvSpPr>
+              <p:nvPr>
+                <p:ph idx="1" sz="half"/>
+              </p:nvPr>
+            </p:nvSpPr>
+            <p:spPr/>
+            <p:txBody>
+              <a:bodyPr/>
+              <a:lstStyle/>
+              <a:p>
+                <a:pPr lvl="0" indent="0" marL="0">
+                  <a:buNone/>
+                </a:pPr>
+                <a:r>
+                  <a:rPr b="1"/>
+                  <a:t>Standard t-test</a:t>
+                </a:r>
+                <a:r>
+                  <a:rPr/>
+                  <a:t> — pools the two variances into one estimate. Requires both groups to have the </a:t>
+                </a:r>
+                <a:r>
+                  <a:rPr b="1"/>
+                  <a:t>same population variance</a:t>
+                </a:r>
+                <a:r>
+                  <a:rPr/>
+                  <a:t>.</a:t>
+                </a:r>
+              </a:p>
+              <a:p>
+                <a:pPr lvl="0" indent="0" marL="0">
+                  <a:buNone/>
+                </a:pPr>
+                <a:r>
+                  <a:rPr b="1"/>
+                  <a:t>Welch’s t-test</a:t>
+                </a:r>
+                <a:r>
+                  <a:rPr/>
+                  <a:t> — uses each group’s variance separately. Does </a:t>
+                </a:r>
+                <a:r>
+                  <a:rPr b="1"/>
+                  <a:t>not</a:t>
+                </a:r>
+                <a:r>
+                  <a:rPr/>
+                  <a:t> require equal variance.</a:t>
+                </a:r>
+              </a:p>
+              <a:p>
+                <a:pPr lvl="0" indent="0" marL="0">
+                  <a:buNone/>
+                </a:pPr>
+                <a14:m>
+                  <m:oMathPara xmlns:m="http://schemas.openxmlformats.org/officeDocument/2006/math">
+                    <m:oMathParaPr>
+                      <m:jc m:val="center"/>
+                    </m:oMathParaPr>
+                    <m:oMath>
+                      <m:sSub>
+                        <m:e>
+                          <m:r>
+                            <m:t>t</m:t>
+                          </m:r>
+                        </m:e>
+                        <m:sub>
+                          <m:r>
+                            <m:t>W</m:t>
+                          </m:r>
+                        </m:sub>
+                      </m:sSub>
+                      <m:r>
+                        <m:rPr>
+                          <m:sty m:val="p"/>
+                        </m:rPr>
+                        <m:t>=</m:t>
+                      </m:r>
+                      <m:f>
+                        <m:fPr>
+                          <m:type m:val="bar"/>
+                        </m:fPr>
+                        <m:num>
+                          <m:sSub>
+                            <m:e>
+                              <m:acc>
+                                <m:accPr>
+                                  <m:chr m:val="‾"/>
+                                </m:accPr>
+                                <m:e>
+                                  <m:r>
+                                    <m:t>x</m:t>
+                                  </m:r>
+                                </m:e>
+                              </m:acc>
+                            </m:e>
+                            <m:sub>
+                              <m:r>
+                                <m:t>1</m:t>
+                              </m:r>
+                            </m:sub>
+                          </m:sSub>
+                          <m:r>
+                            <m:rPr>
+                              <m:sty m:val="p"/>
+                            </m:rPr>
+                            <m:t>−</m:t>
+                          </m:r>
+                          <m:sSub>
+                            <m:e>
+                              <m:acc>
+                                <m:accPr>
+                                  <m:chr m:val="‾"/>
+                                </m:accPr>
+                                <m:e>
+                                  <m:r>
+                                    <m:t>x</m:t>
+                                  </m:r>
+                                </m:e>
+                              </m:acc>
+                            </m:e>
+                            <m:sub>
+                              <m:r>
+                                <m:t>2</m:t>
+                              </m:r>
+                            </m:sub>
+                          </m:sSub>
+                        </m:num>
+                        <m:den>
+                          <m:rad>
+                            <m:radPr>
+                              <m:degHide m:val="on"/>
+                            </m:radPr>
+                            <m:deg/>
+                            <m:e>
+                              <m:f>
+                                <m:fPr>
+                                  <m:type m:val="bar"/>
+                                </m:fPr>
+                                <m:num>
+                                  <m:sSubSup>
+                                    <m:e>
+                                      <m:r>
+                                        <m:t>s</m:t>
+                                      </m:r>
+                                    </m:e>
+                                    <m:sub>
+                                      <m:r>
+                                        <m:t>1</m:t>
+                                      </m:r>
+                                    </m:sub>
+                                    <m:sup>
+                                      <m:r>
+                                        <m:t>2</m:t>
+                                      </m:r>
+                                    </m:sup>
+                                  </m:sSubSup>
+                                </m:num>
+                                <m:den>
+                                  <m:sSub>
+                                    <m:e>
+                                      <m:r>
+                                        <m:t>n</m:t>
+                                      </m:r>
+                                    </m:e>
+                                    <m:sub>
+                                      <m:r>
+                                        <m:t>1</m:t>
+                                      </m:r>
+                                    </m:sub>
+                                  </m:sSub>
+                                </m:den>
+                              </m:f>
+                              <m:r>
+                                <m:rPr>
+                                  <m:sty m:val="p"/>
+                                </m:rPr>
+                                <m:t>+</m:t>
+                              </m:r>
+                              <m:f>
+                                <m:fPr>
+                                  <m:type m:val="bar"/>
+                                </m:fPr>
+                                <m:num>
+                                  <m:sSubSup>
+                                    <m:e>
+                                      <m:r>
+                                        <m:t>s</m:t>
+                                      </m:r>
+                                    </m:e>
+                                    <m:sub>
+                                      <m:r>
+                                        <m:t>2</m:t>
+                                      </m:r>
+                                    </m:sub>
+                                    <m:sup>
+                                      <m:r>
+                                        <m:t>2</m:t>
+                                      </m:r>
+                                    </m:sup>
+                                  </m:sSubSup>
+                                </m:num>
+                                <m:den>
+                                  <m:sSub>
+                                    <m:e>
+                                      <m:r>
+                                        <m:t>n</m:t>
+                                      </m:r>
+                                    </m:e>
+                                    <m:sub>
+                                      <m:r>
+                                        <m:t>2</m:t>
+                                      </m:r>
+                                    </m:sub>
+                                  </m:sSub>
+                                </m:den>
+                              </m:f>
+                            </m:e>
+                          </m:rad>
+                        </m:den>
+                      </m:f>
+                    </m:oMath>
+                  </m:oMathPara>
+                </a14:m>
+              </a:p>
+              <a:p>
+                <a:pPr lvl="0" indent="0" marL="0">
+                  <a:buNone/>
+                </a:pPr>
+                <a:r>
+                  <a:rPr/>
+                  <a:t>The denominator is the </a:t>
+                </a:r>
+                <a:r>
+                  <a:rPr b="1"/>
+                  <a:t>true SE of the difference</a:t>
+                </a:r>
+                <a:r>
+                  <a:rPr/>
+                  <a:t> — no pooling.</a:t>
+                </a:r>
+              </a:p>
+            </p:txBody>
+          </p:sp>
+        </mc:Choice>
+      </mc:AlternateContent>
+      <p:sp>
+        <p:nvSpPr>
+          <p:cNvPr id="4" name="Content Placeholder 3"/>
+          <p:cNvSpPr>
+            <a:spLocks noGrp="1"/>
+          </p:cNvSpPr>
+          <p:nvPr>
+            <p:ph idx="2" sz="half"/>
+          </p:nvPr>
+        </p:nvSpPr>
+        <p:spPr/>
+        <p:txBody>
+          <a:bodyPr/>
+          <a:lstStyle/>
+          <a:p>
+            <a:pPr lvl="0" indent="0" marL="0">
+              <a:buNone/>
+            </a:pPr>
+            <a:r>
+              <a:rPr b="1"/>
+              <a:t>Why always use Welch’s?</a:t>
+            </a:r>
+          </a:p>
+          <a:p>
+            <a:pPr lvl="0"/>
+            <a:r>
+              <a:rPr/>
+              <a:t>When variances </a:t>
+            </a:r>
+            <a:r>
+              <a:rPr b="1"/>
+              <a:t>are</a:t>
+            </a:r>
+            <a:r>
+              <a:rPr/>
+              <a:t> equal: almost identical result — minimal loss of power</a:t>
+            </a:r>
+          </a:p>
+          <a:p>
+            <a:pPr lvl="0"/>
+            <a:r>
+              <a:rPr/>
+              <a:t>When variances </a:t>
+            </a:r>
+            <a:r>
+              <a:rPr b="1"/>
+              <a:t>are not</a:t>
+            </a:r>
+            <a:r>
+              <a:rPr/>
+              <a:t> equal: standard t-test gives </a:t>
+            </a:r>
+            <a:r>
+              <a:rPr b="1"/>
+              <a:t>inflated Type I error</a:t>
+            </a:r>
+            <a:r>
+              <a:rPr/>
+              <a:t> (false positives)</a:t>
+            </a:r>
+          </a:p>
+          <a:p>
+            <a:pPr lvl="0"/>
+            <a:r>
+              <a:rPr b="1"/>
+              <a:t>Welch’s protects you either way</a:t>
+            </a:r>
+          </a:p>
+          <a:p>
+            <a:pPr lvl="0" indent="0" marL="1270000">
+              <a:buNone/>
+            </a:pPr>
+            <a:r>
+              <a:rPr sz="2000" b="1"/>
+              <a:t>Tip</a:t>
+            </a:r>
+          </a:p>
+          <a:p>
+            <a:pPr lvl="0" indent="0" marL="1270000">
+              <a:buNone/>
+            </a:pPr>
+            <a:r>
+              <a:rPr sz="2000" b="1"/>
+              <a:t>Best practice:</a:t>
+            </a:r>
+            <a:r>
+              <a:rPr sz="2000"/>
+              <a:t> use Welch’s as your </a:t>
+            </a:r>
+            <a:r>
+              <a:rPr sz="2000" b="1"/>
+              <a:t>default</a:t>
+            </a:r>
+            <a:r>
+              <a:rPr sz="2000"/>
+              <a:t> for all two-group comparisons.</a:t>
+            </a:r>
+          </a:p>
+          <a:p>
+            <a:pPr lvl="0" indent="0" marL="1270000">
+              <a:buNone/>
+            </a:pPr>
+            <a:r>
+              <a:rPr sz="2000"/>
+              <a:t>In R: </a:t>
+            </a:r>
+            <a:r>
+              <a:rPr sz="2000" b="1">
+                <a:latin typeface="Courier"/>
+              </a:rPr>
+              <a:t>var.equal = FALSE</a:t>
+            </a:r>
+          </a:p>
+        </p:txBody>
+      </p:sp>
+    </p:spTree>
+  </p:cSld>
+</p:sld>
+</file>
+
+<file path=ppt/slides/slide13.xml><?xml version="1.0" encoding="utf-8"?>
+<p:sld xmlns:a="http://schemas.openxmlformats.org/drawingml/2006/main" xmlns:r="http://schemas.openxmlformats.org/officeDocument/2006/relationships" xmlns:p="http://schemas.openxmlformats.org/presentationml/2006/main">
+  <p:cSld>
+    <p:spTree>
+      <p:nvGrpSpPr>
+        <p:cNvPr id="1" name=""/>
+        <p:cNvGrpSpPr/>
+        <p:nvPr/>
+      </p:nvGrpSpPr>
+      <p:grpSpPr>
+        <a:xfrm>
+          <a:off x="0" y="0"/>
+          <a:ext cx="0" cy="0"/>
+          <a:chOff x="0" y="0"/>
+          <a:chExt cx="0" cy="0"/>
+        </a:xfrm>
+      </p:grpSpPr>
+      <p:sp>
+        <p:nvSpPr>
+          <p:cNvPr id="2" name="Title 1"/>
+          <p:cNvSpPr>
+            <a:spLocks noGrp="1"/>
+          </p:cNvSpPr>
+          <p:nvPr>
+            <p:ph type="title"/>
+          </p:nvPr>
+        </p:nvSpPr>
+        <p:spPr>
+          <a:xfrm>
+            <a:off x="0" y="0"/>
+            <a:ext cx="9144000" cy="582780"/>
+          </a:xfrm>
+        </p:spPr>
+        <p:txBody>
+          <a:bodyPr/>
+          <a:lstStyle/>
+          <a:p>
+            <a:pPr lvl="0" indent="0" marL="0">
+              <a:buNone/>
+            </a:pPr>
+            <a:r>
+              <a:rPr/>
+              <a:t>The Welch’s Formula in Action</a:t>
+            </a:r>
+          </a:p>
+        </p:txBody>
+      </p:sp>
+      <p:sp>
+        <p:nvSpPr>
+          <p:cNvPr id="3" name="Content Placeholder 2"/>
+          <p:cNvSpPr>
+            <a:spLocks noGrp="1"/>
+          </p:cNvSpPr>
+          <p:nvPr>
+            <p:ph idx="1"/>
+          </p:nvPr>
+        </p:nvSpPr>
+        <p:spPr/>
+        <p:txBody>
+          <a:bodyPr/>
+          <a:lstStyle/>
+          <a:p>
+            <a:pPr lvl="0" indent="0" marL="1270000">
+              <a:buNone/>
+            </a:pPr>
+            <a:r>
+              <a:rPr sz="2000" b="1"/>
+              <a:t>Note</a:t>
+            </a:r>
+          </a:p>
+          <a:p>
+            <a:pPr lvl="0" indent="0" marL="1270000">
+              <a:buNone/>
+            </a:pPr>
+            <a:r>
+              <a:rPr sz="2000" b="1"/>
+              <a:t>🔮 Predict first:</a:t>
+            </a:r>
+            <a:r>
+              <a:rPr sz="2000"/>
+              <a:t> t = difference ÷ SE-of-the-difference, and the difference is 4 g. Do you expect |t| to land nearer 1, 5, or 10? Predict before the numbers appear.</a:t>
+            </a:r>
+          </a:p>
+        </p:txBody>
+      </p:sp>
+    </p:spTree>
+  </p:cSld>
+</p:sld>
+</file>
+
+<file path=ppt/slides/slide14.xml><?xml version="1.0" encoding="utf-8"?>
+<p:sld xmlns:a="http://schemas.openxmlformats.org/drawingml/2006/main" xmlns:r="http://schemas.openxmlformats.org/officeDocument/2006/relationships" xmlns:p="http://schemas.openxmlformats.org/presentationml/2006/main">
+  <p:cSld>
+    <p:spTree>
+      <p:nvGrpSpPr>
+        <p:cNvPr id="1" name=""/>
+        <p:cNvGrpSpPr/>
+        <p:nvPr/>
+      </p:nvGrpSpPr>
+      <p:grpSpPr>
+        <a:xfrm>
+          <a:off x="0" y="0"/>
+          <a:ext cx="0" cy="0"/>
+          <a:chOff x="0" y="0"/>
+          <a:chExt cx="0" cy="0"/>
+        </a:xfrm>
+      </p:grpSpPr>
       <p:sp>
         <p:nvSpPr>
           <p:cNvPr id="3" name="Content Placeholder 2"/>
@@ -5022,7 +6668,195 @@
 </p:sld>
 </file>
 
-<file path=ppt/slides/slide11.xml><?xml version="1.0" encoding="utf-8"?>
+<file path=ppt/slides/slide15.xml><?xml version="1.0" encoding="utf-8"?>
+<p:sld xmlns:a="http://schemas.openxmlformats.org/drawingml/2006/main" xmlns:r="http://schemas.openxmlformats.org/officeDocument/2006/relationships" xmlns:p="http://schemas.openxmlformats.org/presentationml/2006/main">
+  <p:cSld>
+    <p:spTree>
+      <p:nvGrpSpPr>
+        <p:cNvPr id="1" name=""/>
+        <p:cNvGrpSpPr/>
+        <p:nvPr/>
+      </p:nvGrpSpPr>
+      <p:grpSpPr>
+        <a:xfrm>
+          <a:off x="0" y="0"/>
+          <a:ext cx="0" cy="0"/>
+          <a:chOff x="0" y="0"/>
+          <a:chExt cx="0" cy="0"/>
+        </a:xfrm>
+      </p:grpSpPr>
+      <p:sp>
+        <p:nvSpPr>
+          <p:cNvPr id="2" name="Title 1"/>
+          <p:cNvSpPr>
+            <a:spLocks noGrp="1"/>
+          </p:cNvSpPr>
+          <p:nvPr>
+            <p:ph type="title"/>
+          </p:nvPr>
+        </p:nvSpPr>
+        <p:spPr>
+          <a:xfrm>
+            <a:off x="0" y="0"/>
+            <a:ext cx="9144000" cy="582780"/>
+          </a:xfrm>
+        </p:spPr>
+        <p:txBody>
+          <a:bodyPr/>
+          <a:lstStyle/>
+          <a:p>
+            <a:pPr lvl="0" indent="0" marL="0">
+              <a:buNone/>
+            </a:pPr>
+            <a:r>
+              <a:rPr/>
+              <a:t>🛑 Pause — Do Activity Parts 1–3 Now</a:t>
+            </a:r>
+          </a:p>
+        </p:txBody>
+      </p:sp>
+      <p:sp>
+        <p:nvSpPr>
+          <p:cNvPr id="3" name="Content Placeholder 2"/>
+          <p:cNvSpPr>
+            <a:spLocks noGrp="1"/>
+          </p:cNvSpPr>
+          <p:nvPr>
+            <p:ph idx="1"/>
+          </p:nvPr>
+        </p:nvSpPr>
+        <p:spPr/>
+        <p:txBody>
+          <a:bodyPr/>
+          <a:lstStyle/>
+          <a:p>
+            <a:pPr lvl="0" indent="0" marL="0">
+              <a:buNone/>
+            </a:pPr>
+            <a:r>
+              <a:rPr/>
+              <a:t>Load the data, write your hypotheses </a:t>
+            </a:r>
+            <a:r>
+              <a:rPr i="1"/>
+              <a:t>before</a:t>
+            </a:r>
+            <a:r>
+              <a:rPr/>
+              <a:t> looking at any results, and recompute the group means / SD / SE. Predict each output, type it, run it.</a:t>
+            </a:r>
+          </a:p>
+        </p:txBody>
+      </p:sp>
+    </p:spTree>
+  </p:cSld>
+</p:sld>
+</file>
+
+<file path=ppt/slides/slide16.xml><?xml version="1.0" encoding="utf-8"?>
+<p:sld xmlns:a="http://schemas.openxmlformats.org/drawingml/2006/main" xmlns:r="http://schemas.openxmlformats.org/officeDocument/2006/relationships" xmlns:p="http://schemas.openxmlformats.org/presentationml/2006/main">
+  <p:cSld>
+    <p:spTree>
+      <p:nvGrpSpPr>
+        <p:cNvPr id="1" name=""/>
+        <p:cNvGrpSpPr/>
+        <p:nvPr/>
+      </p:nvGrpSpPr>
+      <p:grpSpPr>
+        <a:xfrm>
+          <a:off x="0" y="0"/>
+          <a:ext cx="0" cy="0"/>
+          <a:chOff x="0" y="0"/>
+          <a:chExt cx="0" cy="0"/>
+        </a:xfrm>
+      </p:grpSpPr>
+      <p:sp>
+        <p:nvSpPr>
+          <p:cNvPr id="2" name="Title 1"/>
+          <p:cNvSpPr>
+            <a:spLocks noGrp="1"/>
+          </p:cNvSpPr>
+          <p:nvPr>
+            <p:ph type="title"/>
+          </p:nvPr>
+        </p:nvSpPr>
+        <p:spPr>
+          <a:xfrm>
+            <a:off x="0" y="0"/>
+            <a:ext cx="9144000" cy="582780"/>
+          </a:xfrm>
+        </p:spPr>
+        <p:txBody>
+          <a:bodyPr/>
+          <a:lstStyle/>
+          <a:p>
+            <a:pPr lvl="0" indent="0" marL="0">
+              <a:buNone/>
+            </a:pPr>
+            <a:r>
+              <a:rPr/>
+              <a:t>🧩 Chunk 2 of 4 · Framework, Hypotheses &amp; Assumptions</a:t>
+            </a:r>
+          </a:p>
+        </p:txBody>
+      </p:sp>
+      <p:sp>
+        <p:nvSpPr>
+          <p:cNvPr id="3" name="Content Placeholder 2"/>
+          <p:cNvSpPr>
+            <a:spLocks noGrp="1"/>
+          </p:cNvSpPr>
+          <p:nvPr>
+            <p:ph idx="1"/>
+          </p:nvPr>
+        </p:nvSpPr>
+        <p:spPr/>
+        <p:txBody>
+          <a:bodyPr/>
+          <a:lstStyle/>
+          <a:p>
+            <a:pPr lvl="0" indent="0" marL="0">
+              <a:buNone/>
+            </a:pPr>
+            <a:r>
+              <a:rPr b="1"/>
+              <a:t>We will cover:</a:t>
+            </a:r>
+            <a:r>
+              <a:rPr/>
+              <a:t> the five-step framework, stating H₀ / Hₐ, and checking normality (histogram, QQ, Shapiro-Wilk) and equal variance (Levene’s).</a:t>
+            </a:r>
+          </a:p>
+          <a:p>
+            <a:pPr lvl="0" indent="0" marL="1270000">
+              <a:buNone/>
+            </a:pPr>
+            <a:r>
+              <a:rPr sz="2000" b="1"/>
+              <a:t>Tip</a:t>
+            </a:r>
+          </a:p>
+          <a:p>
+            <a:pPr lvl="0" indent="0" marL="1270000">
+              <a:buNone/>
+            </a:pPr>
+            <a:r>
+              <a:rPr sz="2000" b="1"/>
+              <a:t>🖐 After this chunk: Activity Parts 4–7</a:t>
+            </a:r>
+            <a:r>
+              <a:rPr sz="2000"/>
+              <a:t> (histogram, QQ, Shapiro, Levene).</a:t>
+            </a:r>
+          </a:p>
+        </p:txBody>
+      </p:sp>
+    </p:spTree>
+  </p:cSld>
+</p:sld>
+</file>
+
+<file path=ppt/slides/slide17.xml><?xml version="1.0" encoding="utf-8"?>
 <p:sld xmlns:a="http://schemas.openxmlformats.org/drawingml/2006/main" xmlns:r="http://schemas.openxmlformats.org/officeDocument/2006/relationships" xmlns:p="http://schemas.openxmlformats.org/presentationml/2006/main">
   <p:cSld>
     <p:spTree>
@@ -5429,7 +7263,7 @@
 </p:sld>
 </file>
 
-<file path=ppt/slides/slide12.xml><?xml version="1.0" encoding="utf-8"?>
+<file path=ppt/slides/slide18.xml><?xml version="1.0" encoding="utf-8"?>
 <p:sld xmlns:a="http://schemas.openxmlformats.org/drawingml/2006/main" xmlns:r="http://schemas.openxmlformats.org/officeDocument/2006/relationships" xmlns:p="http://schemas.openxmlformats.org/presentationml/2006/main">
   <p:cSld>
     <p:spTree>
@@ -5817,7 +7651,7 @@
 </p:sld>
 </file>
 
-<file path=ppt/slides/slide13.xml><?xml version="1.0" encoding="utf-8"?>
+<file path=ppt/slides/slide19.xml><?xml version="1.0" encoding="utf-8"?>
 <p:sld xmlns:a="http://schemas.openxmlformats.org/drawingml/2006/main" xmlns:r="http://schemas.openxmlformats.org/officeDocument/2006/relationships" xmlns:p="http://schemas.openxmlformats.org/presentationml/2006/main">
   <p:cSld>
     <p:spTree>
@@ -6654,7 +8488,262 @@
 </p:sld>
 </file>
 
-<file path=ppt/slides/slide14.xml><?xml version="1.0" encoding="utf-8"?>
+<file path=ppt/slides/slide2.xml><?xml version="1.0" encoding="utf-8"?>
+<p:sld xmlns:a="http://schemas.openxmlformats.org/drawingml/2006/main" xmlns:r="http://schemas.openxmlformats.org/officeDocument/2006/relationships" xmlns:p="http://schemas.openxmlformats.org/presentationml/2006/main">
+  <p:cSld>
+    <p:spTree>
+      <p:nvGrpSpPr>
+        <p:cNvPr id="1" name=""/>
+        <p:cNvGrpSpPr/>
+        <p:nvPr/>
+      </p:nvGrpSpPr>
+      <p:grpSpPr>
+        <a:xfrm>
+          <a:off x="0" y="0"/>
+          <a:ext cx="0" cy="0"/>
+          <a:chOff x="0" y="0"/>
+          <a:chExt cx="0" cy="0"/>
+        </a:xfrm>
+      </p:grpSpPr>
+      <p:sp>
+        <p:nvSpPr>
+          <p:cNvPr id="2" name="Title 1"/>
+          <p:cNvSpPr>
+            <a:spLocks noGrp="1"/>
+          </p:cNvSpPr>
+          <p:nvPr>
+            <p:ph type="title"/>
+          </p:nvPr>
+        </p:nvSpPr>
+        <p:spPr>
+          <a:xfrm>
+            <a:off x="0" y="0"/>
+            <a:ext cx="9144000" cy="582780"/>
+          </a:xfrm>
+        </p:spPr>
+        <p:txBody>
+          <a:bodyPr/>
+          <a:lstStyle/>
+          <a:p>
+            <a:pPr lvl="0" indent="0" marL="0">
+              <a:buNone/>
+            </a:pPr>
+            <a:r>
+              <a:rPr/>
+              <a:t>Where we left off (Lecture 03)</a:t>
+            </a:r>
+          </a:p>
+        </p:txBody>
+      </p:sp>
+      <p:sp>
+        <p:nvSpPr>
+          <p:cNvPr id="3" name="Content Placeholder 2"/>
+          <p:cNvSpPr>
+            <a:spLocks noGrp="1"/>
+          </p:cNvSpPr>
+          <p:nvPr>
+            <p:ph idx="1"/>
+          </p:nvPr>
+        </p:nvSpPr>
+        <p:spPr/>
+        <p:txBody>
+          <a:bodyPr/>
+          <a:lstStyle/>
+          <a:p>
+            <a:pPr lvl="0"/>
+            <a:r>
+              <a:rPr b="1"/>
+              <a:t>Wrangling</a:t>
+            </a:r>
+            <a:r>
+              <a:rPr/>
+              <a:t> — </a:t>
+            </a:r>
+            <a:r>
+              <a:rPr>
+                <a:latin typeface="Courier"/>
+              </a:rPr>
+              <a:t>filter()</a:t>
+            </a:r>
+            <a:r>
+              <a:rPr/>
+              <a:t>, </a:t>
+            </a:r>
+            <a:r>
+              <a:rPr>
+                <a:latin typeface="Courier"/>
+              </a:rPr>
+              <a:t>select()</a:t>
+            </a:r>
+            <a:r>
+              <a:rPr/>
+              <a:t>, </a:t>
+            </a:r>
+            <a:r>
+              <a:rPr>
+                <a:latin typeface="Courier"/>
+              </a:rPr>
+              <a:t>mutate()</a:t>
+            </a:r>
+            <a:r>
+              <a:rPr/>
+              <a:t>, </a:t>
+            </a:r>
+            <a:r>
+              <a:rPr>
+                <a:latin typeface="Courier"/>
+              </a:rPr>
+              <a:t>arrange()</a:t>
+            </a:r>
+            <a:r>
+              <a:rPr/>
+              <a:t> as the core tidyverse verbs</a:t>
+            </a:r>
+          </a:p>
+          <a:p>
+            <a:pPr lvl="0"/>
+            <a:r>
+              <a:rPr b="1"/>
+              <a:t>Descriptive stats</a:t>
+            </a:r>
+            <a:r>
+              <a:rPr/>
+              <a:t> — mean, median, SD, SE with </a:t>
+            </a:r>
+            <a:r>
+              <a:rPr>
+                <a:latin typeface="Courier"/>
+              </a:rPr>
+              <a:t>group_by()</a:t>
+            </a:r>
+            <a:r>
+              <a:rPr/>
+              <a:t> + </a:t>
+            </a:r>
+            <a:r>
+              <a:rPr>
+                <a:latin typeface="Courier"/>
+              </a:rPr>
+              <a:t>summarize()</a:t>
+            </a:r>
+          </a:p>
+          <a:p>
+            <a:pPr lvl="0"/>
+            <a:r>
+              <a:rPr b="1"/>
+              <a:t>NA handling</a:t>
+            </a:r>
+            <a:r>
+              <a:rPr/>
+              <a:t> — </a:t>
+            </a:r>
+            <a:r>
+              <a:rPr>
+                <a:latin typeface="Courier"/>
+              </a:rPr>
+              <a:t>sum(!is.na())</a:t>
+            </a:r>
+            <a:r>
+              <a:rPr/>
+              <a:t> is the safe way to count </a:t>
+            </a:r>
+            <a:r>
+              <a:rPr i="1"/>
+              <a:t>n</a:t>
+            </a:r>
+          </a:p>
+          <a:p>
+            <a:pPr lvl="0"/>
+            <a:r>
+              <a:rPr b="1">
+                <a:latin typeface="Courier"/>
+              </a:rPr>
+              <a:t>skimr</a:t>
+            </a:r>
+            <a:r>
+              <a:rPr/>
+              <a:t> — fast full-dataset overview in one line</a:t>
+            </a:r>
+          </a:p>
+          <a:p>
+            <a:pPr lvl="0"/>
+            <a:r>
+              <a:rPr b="1"/>
+              <a:t>Boxplot</a:t>
+            </a:r>
+            <a:r>
+              <a:rPr/>
+              <a:t> + jittered points; </a:t>
+            </a:r>
+            <a:r>
+              <a:rPr b="1"/>
+              <a:t>mean ± SE</a:t>
+            </a:r>
+            <a:r>
+              <a:rPr/>
+              <a:t> with </a:t>
+            </a:r>
+            <a:r>
+              <a:rPr>
+                <a:latin typeface="Courier"/>
+              </a:rPr>
+              <a:t>stat_summary()</a:t>
+            </a:r>
+          </a:p>
+          <a:p>
+            <a:pPr lvl="0"/>
+            <a:r>
+              <a:rPr b="1"/>
+              <a:t>Finding:</a:t>
+            </a:r>
+            <a:r>
+              <a:rPr/>
+              <a:t> shady leaves appear heavier, taller, and wider than sunny leaves</a:t>
+            </a:r>
+          </a:p>
+          <a:p>
+            <a:pPr lvl="0" indent="0" marL="1270000">
+              <a:buNone/>
+            </a:pPr>
+            <a:r>
+              <a:rPr sz="2000" b="1"/>
+              <a:t>Note</a:t>
+            </a:r>
+          </a:p>
+          <a:p>
+            <a:pPr lvl="0" indent="0" marL="1270000">
+              <a:buNone/>
+            </a:pPr>
+            <a:r>
+              <a:rPr sz="2000" b="1"/>
+              <a:t>✅ Key idea from Lecture 03</a:t>
+            </a:r>
+          </a:p>
+          <a:p>
+            <a:pPr lvl="0" indent="0" marL="1270000">
+              <a:buNone/>
+            </a:pPr>
+            <a:r>
+              <a:rPr sz="2000"/>
+              <a:t>We described the pattern in our data. Today we formally test whether that pattern is </a:t>
+            </a:r>
+            <a:r>
+              <a:rPr sz="2000" i="1"/>
+              <a:t>statistically significant</a:t>
+            </a:r>
+            <a:r>
+              <a:rPr sz="2000"/>
+              <a:t>.</a:t>
+            </a:r>
+          </a:p>
+        </p:txBody>
+      </p:sp>
+    </p:spTree>
+  </p:cSld>
+</p:sld>
+</file>
+
+<file path=ppt/slides/slide20.xml><?xml version="1.0" encoding="utf-8"?>
 <p:sld xmlns:a="http://schemas.openxmlformats.org/drawingml/2006/main" xmlns:r="http://schemas.openxmlformats.org/officeDocument/2006/relationships" xmlns:p="http://schemas.openxmlformats.org/presentationml/2006/main">
   <p:cSld>
     <p:spTree>
@@ -7471,7 +9560,623 @@
 </p:sld>
 </file>
 
-<file path=ppt/slides/slide15.xml><?xml version="1.0" encoding="utf-8"?>
+<file path=ppt/slides/slide21.xml><?xml version="1.0" encoding="utf-8"?>
+<p:sld xmlns:a="http://schemas.openxmlformats.org/drawingml/2006/main" xmlns:r="http://schemas.openxmlformats.org/officeDocument/2006/relationships" xmlns:p="http://schemas.openxmlformats.org/presentationml/2006/main">
+  <p:cSld>
+    <p:spTree>
+      <p:nvGrpSpPr>
+        <p:cNvPr id="1" name=""/>
+        <p:cNvGrpSpPr/>
+        <p:nvPr/>
+      </p:nvGrpSpPr>
+      <p:grpSpPr>
+        <a:xfrm>
+          <a:off x="0" y="0"/>
+          <a:ext cx="0" cy="0"/>
+          <a:chOff x="0" y="0"/>
+          <a:chExt cx="0" cy="0"/>
+        </a:xfrm>
+      </p:grpSpPr>
+      <p:sp>
+        <p:nvSpPr>
+          <p:cNvPr id="2" name="Title 1"/>
+          <p:cNvSpPr>
+            <a:spLocks noGrp="1"/>
+          </p:cNvSpPr>
+          <p:nvPr>
+            <p:ph type="title"/>
+          </p:nvPr>
+        </p:nvSpPr>
+        <p:spPr>
+          <a:xfrm>
+            <a:off x="0" y="0"/>
+            <a:ext cx="9144000" cy="582780"/>
+          </a:xfrm>
+        </p:spPr>
+        <p:txBody>
+          <a:bodyPr/>
+          <a:lstStyle/>
+          <a:p>
+            <a:pPr lvl="0" indent="0" marL="0">
+              <a:buNone/>
+            </a:pPr>
+            <a:r>
+              <a:rPr/>
+              <a:t>Step 3 — Check Normality: Shapiro-Wilk Test</a:t>
+            </a:r>
+          </a:p>
+        </p:txBody>
+      </p:sp>
+      <p:sp>
+        <p:nvSpPr>
+          <p:cNvPr id="3" name="Content Placeholder 2"/>
+          <p:cNvSpPr>
+            <a:spLocks noGrp="1"/>
+          </p:cNvSpPr>
+          <p:nvPr>
+            <p:ph idx="1"/>
+          </p:nvPr>
+        </p:nvSpPr>
+        <p:spPr/>
+        <p:txBody>
+          <a:bodyPr/>
+          <a:lstStyle/>
+          <a:p>
+            <a:pPr lvl="0" indent="0" marL="1270000">
+              <a:buNone/>
+            </a:pPr>
+            <a:r>
+              <a:rPr sz="2000" b="1"/>
+              <a:t>Note</a:t>
+            </a:r>
+          </a:p>
+          <a:p>
+            <a:pPr lvl="0" indent="0" marL="1270000">
+              <a:buNone/>
+            </a:pPr>
+            <a:r>
+              <a:rPr sz="2000" b="1"/>
+              <a:t>🔮 Predict first:</a:t>
+            </a:r>
+            <a:r>
+              <a:rPr sz="2000"/>
+              <a:t> Shapiro-Wilk’s H₀ is “the data are normal.” From the histogram and QQ plot you just saw, predict for each side: will </a:t>
+            </a:r>
+            <a:r>
+              <a:rPr sz="2000" i="1"/>
+              <a:t>p</a:t>
+            </a:r>
+            <a:r>
+              <a:rPr sz="2000"/>
+              <a:t> be </a:t>
+            </a:r>
+            <a:r>
+              <a:rPr sz="2000" b="1"/>
+              <a:t>above</a:t>
+            </a:r>
+            <a:r>
+              <a:rPr sz="2000"/>
+              <a:t> or </a:t>
+            </a:r>
+            <a:r>
+              <a:rPr sz="2000" b="1"/>
+              <a:t>below</a:t>
+            </a:r>
+            <a:r>
+              <a:rPr sz="2000"/>
+              <a:t> 0.05?</a:t>
+            </a:r>
+          </a:p>
+        </p:txBody>
+      </p:sp>
+    </p:spTree>
+  </p:cSld>
+</p:sld>
+</file>
+
+<file path=ppt/slides/slide22.xml><?xml version="1.0" encoding="utf-8"?>
+<p:sld xmlns:a="http://schemas.openxmlformats.org/drawingml/2006/main" xmlns:r="http://schemas.openxmlformats.org/officeDocument/2006/relationships" xmlns:p="http://schemas.openxmlformats.org/presentationml/2006/main">
+  <p:cSld>
+    <p:spTree>
+      <p:nvGrpSpPr>
+        <p:cNvPr id="1" name=""/>
+        <p:cNvGrpSpPr/>
+        <p:nvPr/>
+      </p:nvGrpSpPr>
+      <p:grpSpPr>
+        <a:xfrm>
+          <a:off x="0" y="0"/>
+          <a:ext cx="0" cy="0"/>
+          <a:chOff x="0" y="0"/>
+          <a:chExt cx="0" cy="0"/>
+        </a:xfrm>
+      </p:grpSpPr>
+      <p:sp>
+        <p:nvSpPr>
+          <p:cNvPr id="3" name="Content Placeholder 2"/>
+          <p:cNvSpPr>
+            <a:spLocks noGrp="1"/>
+          </p:cNvSpPr>
+          <p:nvPr>
+            <p:ph idx="1" sz="half"/>
+          </p:nvPr>
+        </p:nvSpPr>
+        <p:spPr/>
+        <p:txBody>
+          <a:bodyPr/>
+          <a:lstStyle/>
+          <a:p>
+            <a:pPr lvl="0" indent="0">
+              <a:buNone/>
+            </a:pPr>
+            <a:r>
+              <a:rPr>
+                <a:solidFill>
+                  <a:srgbClr val="5E5E5E"/>
+                </a:solidFill>
+                <a:latin typeface="Courier"/>
+              </a:rPr>
+              <a:t># Shapiro-Wilk test for the sunny side -----------------</a:t>
+            </a:r>
+            <a:br/>
+            <a:r>
+              <a:rPr>
+                <a:solidFill>
+                  <a:srgbClr val="003B4F"/>
+                </a:solidFill>
+                <a:latin typeface="Courier"/>
+              </a:rPr>
+              <a:t>tree_df </a:t>
+            </a:r>
+            <a:r>
+              <a:rPr>
+                <a:solidFill>
+                  <a:srgbClr val="5E5E5E"/>
+                </a:solidFill>
+                <a:latin typeface="Courier"/>
+              </a:rPr>
+              <a:t>%&gt;%</a:t>
+            </a:r>
+            <a:br/>
+            <a:r>
+              <a:rPr>
+                <a:solidFill>
+                  <a:srgbClr val="003B4F"/>
+                </a:solidFill>
+                <a:latin typeface="Courier"/>
+              </a:rPr>
+              <a:t>  </a:t>
+            </a:r>
+            <a:r>
+              <a:rPr>
+                <a:solidFill>
+                  <a:srgbClr val="4758AB"/>
+                </a:solidFill>
+                <a:latin typeface="Courier"/>
+              </a:rPr>
+              <a:t>filter</a:t>
+            </a:r>
+            <a:r>
+              <a:rPr>
+                <a:solidFill>
+                  <a:srgbClr val="003B4F"/>
+                </a:solidFill>
+                <a:latin typeface="Courier"/>
+              </a:rPr>
+              <a:t>(side </a:t>
+            </a:r>
+            <a:r>
+              <a:rPr>
+                <a:solidFill>
+                  <a:srgbClr val="5E5E5E"/>
+                </a:solidFill>
+                <a:latin typeface="Courier"/>
+              </a:rPr>
+              <a:t>==</a:t>
+            </a:r>
+            <a:r>
+              <a:rPr>
+                <a:solidFill>
+                  <a:srgbClr val="003B4F"/>
+                </a:solidFill>
+                <a:latin typeface="Courier"/>
+              </a:rPr>
+              <a:t> </a:t>
+            </a:r>
+            <a:r>
+              <a:rPr>
+                <a:solidFill>
+                  <a:srgbClr val="20794D"/>
+                </a:solidFill>
+                <a:latin typeface="Courier"/>
+              </a:rPr>
+              <a:t>"sunny"</a:t>
+            </a:r>
+            <a:r>
+              <a:rPr>
+                <a:solidFill>
+                  <a:srgbClr val="003B4F"/>
+                </a:solidFill>
+                <a:latin typeface="Courier"/>
+              </a:rPr>
+              <a:t>) </a:t>
+            </a:r>
+            <a:r>
+              <a:rPr>
+                <a:solidFill>
+                  <a:srgbClr val="5E5E5E"/>
+                </a:solidFill>
+                <a:latin typeface="Courier"/>
+              </a:rPr>
+              <a:t>%&gt;%</a:t>
+            </a:r>
+            <a:br/>
+            <a:r>
+              <a:rPr>
+                <a:solidFill>
+                  <a:srgbClr val="003B4F"/>
+                </a:solidFill>
+                <a:latin typeface="Courier"/>
+              </a:rPr>
+              <a:t>  </a:t>
+            </a:r>
+            <a:r>
+              <a:rPr>
+                <a:solidFill>
+                  <a:srgbClr val="4758AB"/>
+                </a:solidFill>
+                <a:latin typeface="Courier"/>
+              </a:rPr>
+              <a:t>pull</a:t>
+            </a:r>
+            <a:r>
+              <a:rPr>
+                <a:solidFill>
+                  <a:srgbClr val="003B4F"/>
+                </a:solidFill>
+                <a:latin typeface="Courier"/>
+              </a:rPr>
+              <a:t>(weight_g) </a:t>
+            </a:r>
+            <a:r>
+              <a:rPr>
+                <a:solidFill>
+                  <a:srgbClr val="5E5E5E"/>
+                </a:solidFill>
+                <a:latin typeface="Courier"/>
+              </a:rPr>
+              <a:t>%&gt;%</a:t>
+            </a:r>
+            <a:br/>
+            <a:r>
+              <a:rPr>
+                <a:solidFill>
+                  <a:srgbClr val="003B4F"/>
+                </a:solidFill>
+                <a:latin typeface="Courier"/>
+              </a:rPr>
+              <a:t>  </a:t>
+            </a:r>
+            <a:r>
+              <a:rPr>
+                <a:solidFill>
+                  <a:srgbClr val="4758AB"/>
+                </a:solidFill>
+                <a:latin typeface="Courier"/>
+              </a:rPr>
+              <a:t>shapiro.test</a:t>
+            </a:r>
+            <a:r>
+              <a:rPr>
+                <a:solidFill>
+                  <a:srgbClr val="003B4F"/>
+                </a:solidFill>
+                <a:latin typeface="Courier"/>
+              </a:rPr>
+              <a:t>()</a:t>
+            </a:r>
+          </a:p>
+          <a:p>
+            <a:pPr lvl="0" indent="0">
+              <a:buNone/>
+            </a:pPr>
+            <a:r>
+              <a:rPr>
+                <a:latin typeface="Courier"/>
+              </a:rPr>
+              <a:t>
+    Shapiro-Wilk normality test
+data:  .
+W = 0.8197, p-value = 0.02513</a:t>
+            </a:r>
+          </a:p>
+          <a:p>
+            <a:pPr lvl="0" indent="0">
+              <a:buNone/>
+            </a:pPr>
+            <a:r>
+              <a:rPr>
+                <a:solidFill>
+                  <a:srgbClr val="5E5E5E"/>
+                </a:solidFill>
+                <a:latin typeface="Courier"/>
+              </a:rPr>
+              <a:t># Shapiro-Wilk test for the shady side -----------------</a:t>
+            </a:r>
+            <a:br/>
+            <a:r>
+              <a:rPr>
+                <a:solidFill>
+                  <a:srgbClr val="003B4F"/>
+                </a:solidFill>
+                <a:latin typeface="Courier"/>
+              </a:rPr>
+              <a:t>tree_df </a:t>
+            </a:r>
+            <a:r>
+              <a:rPr>
+                <a:solidFill>
+                  <a:srgbClr val="5E5E5E"/>
+                </a:solidFill>
+                <a:latin typeface="Courier"/>
+              </a:rPr>
+              <a:t>%&gt;%</a:t>
+            </a:r>
+            <a:br/>
+            <a:r>
+              <a:rPr>
+                <a:solidFill>
+                  <a:srgbClr val="003B4F"/>
+                </a:solidFill>
+                <a:latin typeface="Courier"/>
+              </a:rPr>
+              <a:t>  </a:t>
+            </a:r>
+            <a:r>
+              <a:rPr>
+                <a:solidFill>
+                  <a:srgbClr val="4758AB"/>
+                </a:solidFill>
+                <a:latin typeface="Courier"/>
+              </a:rPr>
+              <a:t>filter</a:t>
+            </a:r>
+            <a:r>
+              <a:rPr>
+                <a:solidFill>
+                  <a:srgbClr val="003B4F"/>
+                </a:solidFill>
+                <a:latin typeface="Courier"/>
+              </a:rPr>
+              <a:t>(side </a:t>
+            </a:r>
+            <a:r>
+              <a:rPr>
+                <a:solidFill>
+                  <a:srgbClr val="5E5E5E"/>
+                </a:solidFill>
+                <a:latin typeface="Courier"/>
+              </a:rPr>
+              <a:t>==</a:t>
+            </a:r>
+            <a:r>
+              <a:rPr>
+                <a:solidFill>
+                  <a:srgbClr val="003B4F"/>
+                </a:solidFill>
+                <a:latin typeface="Courier"/>
+              </a:rPr>
+              <a:t> </a:t>
+            </a:r>
+            <a:r>
+              <a:rPr>
+                <a:solidFill>
+                  <a:srgbClr val="20794D"/>
+                </a:solidFill>
+                <a:latin typeface="Courier"/>
+              </a:rPr>
+              <a:t>"shady"</a:t>
+            </a:r>
+            <a:r>
+              <a:rPr>
+                <a:solidFill>
+                  <a:srgbClr val="003B4F"/>
+                </a:solidFill>
+                <a:latin typeface="Courier"/>
+              </a:rPr>
+              <a:t>) </a:t>
+            </a:r>
+            <a:r>
+              <a:rPr>
+                <a:solidFill>
+                  <a:srgbClr val="5E5E5E"/>
+                </a:solidFill>
+                <a:latin typeface="Courier"/>
+              </a:rPr>
+              <a:t>%&gt;%</a:t>
+            </a:r>
+            <a:br/>
+            <a:r>
+              <a:rPr>
+                <a:solidFill>
+                  <a:srgbClr val="003B4F"/>
+                </a:solidFill>
+                <a:latin typeface="Courier"/>
+              </a:rPr>
+              <a:t>  </a:t>
+            </a:r>
+            <a:r>
+              <a:rPr>
+                <a:solidFill>
+                  <a:srgbClr val="4758AB"/>
+                </a:solidFill>
+                <a:latin typeface="Courier"/>
+              </a:rPr>
+              <a:t>pull</a:t>
+            </a:r>
+            <a:r>
+              <a:rPr>
+                <a:solidFill>
+                  <a:srgbClr val="003B4F"/>
+                </a:solidFill>
+                <a:latin typeface="Courier"/>
+              </a:rPr>
+              <a:t>(weight_g) </a:t>
+            </a:r>
+            <a:r>
+              <a:rPr>
+                <a:solidFill>
+                  <a:srgbClr val="5E5E5E"/>
+                </a:solidFill>
+                <a:latin typeface="Courier"/>
+              </a:rPr>
+              <a:t>%&gt;%</a:t>
+            </a:r>
+            <a:br/>
+            <a:r>
+              <a:rPr>
+                <a:solidFill>
+                  <a:srgbClr val="003B4F"/>
+                </a:solidFill>
+                <a:latin typeface="Courier"/>
+              </a:rPr>
+              <a:t>  </a:t>
+            </a:r>
+            <a:r>
+              <a:rPr>
+                <a:solidFill>
+                  <a:srgbClr val="4758AB"/>
+                </a:solidFill>
+                <a:latin typeface="Courier"/>
+              </a:rPr>
+              <a:t>shapiro.test</a:t>
+            </a:r>
+            <a:r>
+              <a:rPr>
+                <a:solidFill>
+                  <a:srgbClr val="003B4F"/>
+                </a:solidFill>
+                <a:latin typeface="Courier"/>
+              </a:rPr>
+              <a:t>()</a:t>
+            </a:r>
+          </a:p>
+          <a:p>
+            <a:pPr lvl="0" indent="0">
+              <a:buNone/>
+            </a:pPr>
+            <a:r>
+              <a:rPr>
+                <a:latin typeface="Courier"/>
+              </a:rPr>
+              <a:t>
+    Shapiro-Wilk normality test
+data:  .
+W = 0.89461, p-value = 0.191</a:t>
+            </a:r>
+          </a:p>
+        </p:txBody>
+      </p:sp>
+      <p:sp>
+        <p:nvSpPr>
+          <p:cNvPr id="4" name="Content Placeholder 3"/>
+          <p:cNvSpPr>
+            <a:spLocks noGrp="1"/>
+          </p:cNvSpPr>
+          <p:nvPr>
+            <p:ph idx="2" sz="half"/>
+          </p:nvPr>
+        </p:nvSpPr>
+        <p:spPr/>
+        <p:txBody>
+          <a:bodyPr/>
+          <a:lstStyle/>
+          <a:p>
+            <a:pPr lvl="0" indent="0" marL="0">
+              <a:buNone/>
+            </a:pPr>
+            <a:r>
+              <a:rPr b="1"/>
+              <a:t>Shapiro-Wilk H₀:</a:t>
+            </a:r>
+            <a:r>
+              <a:rPr/>
+              <a:t> the data are normally distributed.</a:t>
+            </a:r>
+          </a:p>
+          <a:p>
+            <a:pPr lvl="0"/>
+            <a:r>
+              <a:rPr i="1"/>
+              <a:t>p</a:t>
+            </a:r>
+            <a:r>
+              <a:rPr/>
+              <a:t> &gt; 0.05 → </a:t>
+            </a:r>
+            <a:r>
+              <a:rPr b="1"/>
+              <a:t>fail to reject</a:t>
+            </a:r>
+            <a:r>
+              <a:rPr/>
+              <a:t> normality → proceed with t-test</a:t>
+            </a:r>
+          </a:p>
+          <a:p>
+            <a:pPr lvl="0"/>
+            <a:r>
+              <a:rPr i="1"/>
+              <a:t>p</a:t>
+            </a:r>
+            <a:r>
+              <a:rPr/>
+              <a:t> &lt; 0.05 → evidence of non-normality → consider a non-parametric alternative</a:t>
+            </a:r>
+          </a:p>
+          <a:p>
+            <a:pPr lvl="0" indent="0" marL="1270000">
+              <a:buNone/>
+            </a:pPr>
+            <a:r>
+              <a:rPr sz="2000" b="1"/>
+              <a:t>Important</a:t>
+            </a:r>
+          </a:p>
+          <a:p>
+            <a:pPr lvl="0" indent="0" marL="1270000">
+              <a:buNone/>
+            </a:pPr>
+            <a:r>
+              <a:rPr sz="2000" b="1"/>
+              <a:t>Small-sample caution:</a:t>
+            </a:r>
+          </a:p>
+          <a:p>
+            <a:pPr lvl="0" indent="0" marL="1270000">
+              <a:buNone/>
+            </a:pPr>
+            <a:r>
+              <a:rPr sz="2000"/>
+              <a:t>With n = 10, this test has </a:t>
+            </a:r>
+            <a:r>
+              <a:rPr sz="2000" b="1"/>
+              <a:t>low power</a:t>
+            </a:r>
+            <a:r>
+              <a:rPr sz="2000"/>
+              <a:t> — it rarely detects non-normality even when present. The QQ plot is equally important.</a:t>
+            </a:r>
+          </a:p>
+        </p:txBody>
+      </p:sp>
+    </p:spTree>
+  </p:cSld>
+</p:sld>
+</file>
+
+<file path=ppt/slides/slide23.xml><?xml version="1.0" encoding="utf-8"?>
 <p:sld xmlns:a="http://schemas.openxmlformats.org/drawingml/2006/main" xmlns:r="http://schemas.openxmlformats.org/officeDocument/2006/relationships" xmlns:p="http://schemas.openxmlformats.org/presentationml/2006/main">
   <p:cSld>
     <p:spTree>
@@ -7516,7 +10221,7 @@
             </a:pPr>
             <a:r>
               <a:rPr/>
-              <a:t>Step 3 — Check Normality: Shapiro-Wilk Test</a:t>
+              <a:t>Step 4 — Check Variance: Levene’s Test</a:t>
             </a:r>
           </a:p>
         </p:txBody>
@@ -7546,17 +10251,26 @@
                 </a:solidFill>
                 <a:latin typeface="Courier"/>
               </a:rPr>
-              <a:t># Shapiro-Wilk test for the sunny side -----------------</a:t>
+              <a:t># Levene's test — are the variances similar? -----------</a:t>
             </a:r>
             <a:br/>
             <a:r>
               <a:rPr>
                 <a:solidFill>
-                  <a:srgbClr val="003B4F"/>
-                </a:solidFill>
-                <a:latin typeface="Courier"/>
-              </a:rPr>
-              <a:t>tree_df </a:t>
+                  <a:srgbClr val="4758AB"/>
+                </a:solidFill>
+                <a:latin typeface="Courier"/>
+              </a:rPr>
+              <a:t>leveneTest</a:t>
+            </a:r>
+            <a:r>
+              <a:rPr>
+                <a:solidFill>
+                  <a:srgbClr val="003B4F"/>
+                </a:solidFill>
+                <a:latin typeface="Courier"/>
+              </a:rPr>
+              <a:t>(weight_g </a:t>
             </a:r>
             <a:r>
               <a:rPr>
@@ -7565,145 +10279,34 @@
                 </a:solidFill>
                 <a:latin typeface="Courier"/>
               </a:rPr>
-              <a:t>%&gt;%</a:t>
-            </a:r>
-            <a:br/>
-            <a:r>
-              <a:rPr>
-                <a:solidFill>
-                  <a:srgbClr val="003B4F"/>
-                </a:solidFill>
-                <a:latin typeface="Courier"/>
-              </a:rPr>
-              <a:t>  </a:t>
-            </a:r>
-            <a:r>
-              <a:rPr>
-                <a:solidFill>
-                  <a:srgbClr val="4758AB"/>
-                </a:solidFill>
-                <a:latin typeface="Courier"/>
-              </a:rPr>
-              <a:t>filter</a:t>
-            </a:r>
-            <a:r>
-              <a:rPr>
-                <a:solidFill>
-                  <a:srgbClr val="003B4F"/>
-                </a:solidFill>
-                <a:latin typeface="Courier"/>
-              </a:rPr>
-              <a:t>(side </a:t>
-            </a:r>
-            <a:r>
-              <a:rPr>
-                <a:solidFill>
-                  <a:srgbClr val="5E5E5E"/>
-                </a:solidFill>
-                <a:latin typeface="Courier"/>
-              </a:rPr>
-              <a:t>==</a:t>
-            </a:r>
-            <a:r>
-              <a:rPr>
-                <a:solidFill>
-                  <a:srgbClr val="003B4F"/>
-                </a:solidFill>
-                <a:latin typeface="Courier"/>
-              </a:rPr>
-              <a:t> </a:t>
-            </a:r>
-            <a:r>
-              <a:rPr>
-                <a:solidFill>
-                  <a:srgbClr val="20794D"/>
-                </a:solidFill>
-                <a:latin typeface="Courier"/>
-              </a:rPr>
-              <a:t>"sunny"</a:t>
-            </a:r>
-            <a:r>
-              <a:rPr>
-                <a:solidFill>
-                  <a:srgbClr val="003B4F"/>
-                </a:solidFill>
-                <a:latin typeface="Courier"/>
-              </a:rPr>
-              <a:t>) </a:t>
-            </a:r>
-            <a:r>
-              <a:rPr>
-                <a:solidFill>
-                  <a:srgbClr val="5E5E5E"/>
-                </a:solidFill>
-                <a:latin typeface="Courier"/>
-              </a:rPr>
-              <a:t>%&gt;%</a:t>
-            </a:r>
-            <a:br/>
-            <a:r>
-              <a:rPr>
-                <a:solidFill>
-                  <a:srgbClr val="003B4F"/>
-                </a:solidFill>
-                <a:latin typeface="Courier"/>
-              </a:rPr>
-              <a:t>  </a:t>
-            </a:r>
-            <a:r>
-              <a:rPr>
-                <a:solidFill>
-                  <a:srgbClr val="4758AB"/>
-                </a:solidFill>
-                <a:latin typeface="Courier"/>
-              </a:rPr>
-              <a:t>pull</a:t>
-            </a:r>
-            <a:r>
-              <a:rPr>
-                <a:solidFill>
-                  <a:srgbClr val="003B4F"/>
-                </a:solidFill>
-                <a:latin typeface="Courier"/>
-              </a:rPr>
-              <a:t>(weight_g) </a:t>
-            </a:r>
-            <a:r>
-              <a:rPr>
-                <a:solidFill>
-                  <a:srgbClr val="5E5E5E"/>
-                </a:solidFill>
-                <a:latin typeface="Courier"/>
-              </a:rPr>
-              <a:t>%&gt;%</a:t>
-            </a:r>
-            <a:br/>
-            <a:r>
-              <a:rPr>
-                <a:solidFill>
-                  <a:srgbClr val="003B4F"/>
-                </a:solidFill>
-                <a:latin typeface="Courier"/>
-              </a:rPr>
-              <a:t>  </a:t>
-            </a:r>
-            <a:r>
-              <a:rPr>
-                <a:solidFill>
-                  <a:srgbClr val="4758AB"/>
-                </a:solidFill>
-                <a:latin typeface="Courier"/>
-              </a:rPr>
-              <a:t>shapiro.test</a:t>
-            </a:r>
-            <a:r>
-              <a:rPr>
-                <a:solidFill>
-                  <a:srgbClr val="003B4F"/>
-                </a:solidFill>
-                <a:latin typeface="Courier"/>
-              </a:rPr>
-              <a:t>()</a:t>
+              <a:t>~</a:t>
+            </a:r>
+            <a:r>
+              <a:rPr>
+                <a:solidFill>
+                  <a:srgbClr val="003B4F"/>
+                </a:solidFill>
+                <a:latin typeface="Courier"/>
+              </a:rPr>
+              <a:t> side, </a:t>
+            </a:r>
+            <a:r>
+              <a:rPr>
+                <a:solidFill>
+                  <a:srgbClr val="657422"/>
+                </a:solidFill>
+                <a:latin typeface="Courier"/>
+              </a:rPr>
+              <a:t>data =</a:t>
+            </a:r>
+            <a:r>
+              <a:rPr>
+                <a:solidFill>
+                  <a:srgbClr val="003B4F"/>
+                </a:solidFill>
+                <a:latin typeface="Courier"/>
+              </a:rPr>
+              <a:t> tree_df)</a:t>
             </a:r>
           </a:p>
           <a:p>
@@ -7714,195 +10317,10 @@
               <a:rPr>
                 <a:latin typeface="Courier"/>
               </a:rPr>
-              <a:t>
-    Shapiro-Wilk normality test
-data:  .
-W = 0.8197, p-value = 0.02513</a:t>
-            </a:r>
-          </a:p>
-          <a:p>
-            <a:pPr lvl="0" indent="0">
-              <a:buNone/>
-            </a:pPr>
-            <a:r>
-              <a:rPr>
-                <a:solidFill>
-                  <a:srgbClr val="5E5E5E"/>
-                </a:solidFill>
-                <a:latin typeface="Courier"/>
-              </a:rPr>
-              <a:t># Shapiro-Wilk test for the shady side -----------------</a:t>
-            </a:r>
-            <a:br/>
-            <a:r>
-              <a:rPr>
-                <a:solidFill>
-                  <a:srgbClr val="003B4F"/>
-                </a:solidFill>
-                <a:latin typeface="Courier"/>
-              </a:rPr>
-              <a:t>tree_df </a:t>
-            </a:r>
-            <a:r>
-              <a:rPr>
-                <a:solidFill>
-                  <a:srgbClr val="5E5E5E"/>
-                </a:solidFill>
-                <a:latin typeface="Courier"/>
-              </a:rPr>
-              <a:t>%&gt;%</a:t>
-            </a:r>
-            <a:br/>
-            <a:r>
-              <a:rPr>
-                <a:solidFill>
-                  <a:srgbClr val="003B4F"/>
-                </a:solidFill>
-                <a:latin typeface="Courier"/>
-              </a:rPr>
-              <a:t>  </a:t>
-            </a:r>
-            <a:r>
-              <a:rPr>
-                <a:solidFill>
-                  <a:srgbClr val="4758AB"/>
-                </a:solidFill>
-                <a:latin typeface="Courier"/>
-              </a:rPr>
-              <a:t>filter</a:t>
-            </a:r>
-            <a:r>
-              <a:rPr>
-                <a:solidFill>
-                  <a:srgbClr val="003B4F"/>
-                </a:solidFill>
-                <a:latin typeface="Courier"/>
-              </a:rPr>
-              <a:t>(side </a:t>
-            </a:r>
-            <a:r>
-              <a:rPr>
-                <a:solidFill>
-                  <a:srgbClr val="5E5E5E"/>
-                </a:solidFill>
-                <a:latin typeface="Courier"/>
-              </a:rPr>
-              <a:t>==</a:t>
-            </a:r>
-            <a:r>
-              <a:rPr>
-                <a:solidFill>
-                  <a:srgbClr val="003B4F"/>
-                </a:solidFill>
-                <a:latin typeface="Courier"/>
-              </a:rPr>
-              <a:t> </a:t>
-            </a:r>
-            <a:r>
-              <a:rPr>
-                <a:solidFill>
-                  <a:srgbClr val="20794D"/>
-                </a:solidFill>
-                <a:latin typeface="Courier"/>
-              </a:rPr>
-              <a:t>"shady"</a:t>
-            </a:r>
-            <a:r>
-              <a:rPr>
-                <a:solidFill>
-                  <a:srgbClr val="003B4F"/>
-                </a:solidFill>
-                <a:latin typeface="Courier"/>
-              </a:rPr>
-              <a:t>) </a:t>
-            </a:r>
-            <a:r>
-              <a:rPr>
-                <a:solidFill>
-                  <a:srgbClr val="5E5E5E"/>
-                </a:solidFill>
-                <a:latin typeface="Courier"/>
-              </a:rPr>
-              <a:t>%&gt;%</a:t>
-            </a:r>
-            <a:br/>
-            <a:r>
-              <a:rPr>
-                <a:solidFill>
-                  <a:srgbClr val="003B4F"/>
-                </a:solidFill>
-                <a:latin typeface="Courier"/>
-              </a:rPr>
-              <a:t>  </a:t>
-            </a:r>
-            <a:r>
-              <a:rPr>
-                <a:solidFill>
-                  <a:srgbClr val="4758AB"/>
-                </a:solidFill>
-                <a:latin typeface="Courier"/>
-              </a:rPr>
-              <a:t>pull</a:t>
-            </a:r>
-            <a:r>
-              <a:rPr>
-                <a:solidFill>
-                  <a:srgbClr val="003B4F"/>
-                </a:solidFill>
-                <a:latin typeface="Courier"/>
-              </a:rPr>
-              <a:t>(weight_g) </a:t>
-            </a:r>
-            <a:r>
-              <a:rPr>
-                <a:solidFill>
-                  <a:srgbClr val="5E5E5E"/>
-                </a:solidFill>
-                <a:latin typeface="Courier"/>
-              </a:rPr>
-              <a:t>%&gt;%</a:t>
-            </a:r>
-            <a:br/>
-            <a:r>
-              <a:rPr>
-                <a:solidFill>
-                  <a:srgbClr val="003B4F"/>
-                </a:solidFill>
-                <a:latin typeface="Courier"/>
-              </a:rPr>
-              <a:t>  </a:t>
-            </a:r>
-            <a:r>
-              <a:rPr>
-                <a:solidFill>
-                  <a:srgbClr val="4758AB"/>
-                </a:solidFill>
-                <a:latin typeface="Courier"/>
-              </a:rPr>
-              <a:t>shapiro.test</a:t>
-            </a:r>
-            <a:r>
-              <a:rPr>
-                <a:solidFill>
-                  <a:srgbClr val="003B4F"/>
-                </a:solidFill>
-                <a:latin typeface="Courier"/>
-              </a:rPr>
-              <a:t>()</a:t>
-            </a:r>
-          </a:p>
-          <a:p>
-            <a:pPr lvl="0" indent="0">
-              <a:buNone/>
-            </a:pPr>
-            <a:r>
-              <a:rPr>
-                <a:latin typeface="Courier"/>
-              </a:rPr>
-              <a:t>
-    Shapiro-Wilk normality test
-data:  .
-W = 0.89461, p-value = 0.191</a:t>
+              <a:t>Levene's Test for Homogeneity of Variance (center = median)
+      Df F value Pr(&gt;F)
+group  1     0.6 0.4486
+      18               </a:t>
             </a:r>
           </a:p>
         </p:txBody>
@@ -7927,11 +10345,19 @@
             </a:pPr>
             <a:r>
               <a:rPr b="1"/>
-              <a:t>Shapiro-Wilk H₀:</a:t>
+              <a:t>Levene’s test H₀:</a:t>
             </a:r>
             <a:r>
               <a:rPr/>
-              <a:t> the data are normally distributed.</a:t>
+              <a:t> the two groups have </a:t>
+            </a:r>
+            <a:r>
+              <a:rPr b="1"/>
+              <a:t>equal variance</a:t>
+            </a:r>
+            <a:r>
+              <a:rPr/>
+              <a:t>.</a:t>
             </a:r>
           </a:p>
           <a:p>
@@ -7942,15 +10368,7 @@
             </a:r>
             <a:r>
               <a:rPr/>
-              <a:t> &gt; 0.05 → </a:t>
-            </a:r>
-            <a:r>
-              <a:rPr b="1"/>
-              <a:t>fail to reject</a:t>
-            </a:r>
-            <a:r>
-              <a:rPr/>
-              <a:t> normality → proceed with t-test</a:t>
+              <a:t> &gt; 0.05 → variances are not significantly different</a:t>
             </a:r>
           </a:p>
           <a:p>
@@ -7961,42 +10379,52 @@
             </a:r>
             <a:r>
               <a:rPr/>
-              <a:t> &lt; 0.05 → evidence of non-normality → consider a non-parametric alternative</a:t>
-            </a:r>
-          </a:p>
-          <a:p>
-            <a:pPr lvl="0" indent="0" marL="1270000">
+              <a:t> &lt; 0.05 → variances are significantly different</a:t>
+            </a:r>
+          </a:p>
+          <a:p>
+            <a:pPr lvl="0" indent="0" marL="0">
               <a:buNone/>
             </a:pPr>
             <a:r>
-              <a:rPr sz="2000" b="1"/>
-              <a:t>Important</a:t>
-            </a:r>
-          </a:p>
-          <a:p>
-            <a:pPr lvl="0" indent="0" marL="1270000">
+              <a:rPr b="1"/>
+              <a:t>Our response regardless of the result:</a:t>
+            </a:r>
+          </a:p>
+          <a:p>
+            <a:pPr lvl="0" indent="0" marL="0">
               <a:buNone/>
             </a:pPr>
             <a:r>
-              <a:rPr sz="2000" b="1"/>
-              <a:t>Small-sample caution:</a:t>
-            </a:r>
-          </a:p>
-          <a:p>
-            <a:pPr lvl="0" indent="0" marL="1270000">
+              <a:rPr/>
+              <a:t>We will use Welch’s t-test (</a:t>
+            </a:r>
+            <a:r>
+              <a:rPr>
+                <a:latin typeface="Courier"/>
+              </a:rPr>
+              <a:t>var.equal = FALSE</a:t>
+            </a:r>
+            <a:r>
+              <a:rPr/>
+              <a:t>).</a:t>
+            </a:r>
+          </a:p>
+          <a:p>
+            <a:pPr lvl="0" indent="0" marL="0">
               <a:buNone/>
             </a:pPr>
             <a:r>
-              <a:rPr sz="2000"/>
-              <a:t>With n = 10, this test has </a:t>
-            </a:r>
-            <a:r>
-              <a:rPr sz="2000" b="1"/>
-              <a:t>low power</a:t>
-            </a:r>
-            <a:r>
-              <a:rPr sz="2000"/>
-              <a:t> — it rarely detects non-normality even when present. The QQ plot is equally important.</a:t>
+              <a:rPr/>
+              <a:t>Welch’s is valid whether or not the variances are equal. We run Levene’s to </a:t>
+            </a:r>
+            <a:r>
+              <a:rPr i="1"/>
+              <a:t>understand our data</a:t>
+            </a:r>
+            <a:r>
+              <a:rPr/>
+              <a:t>, not to choose our test.</a:t>
             </a:r>
           </a:p>
         </p:txBody>
@@ -8006,7 +10434,7 @@
 </p:sld>
 </file>
 
-<file path=ppt/slides/slide16.xml><?xml version="1.0" encoding="utf-8"?>
+<file path=ppt/slides/slide24.xml><?xml version="1.0" encoding="utf-8"?>
 <p:sld xmlns:a="http://schemas.openxmlformats.org/drawingml/2006/main" xmlns:r="http://schemas.openxmlformats.org/officeDocument/2006/relationships" xmlns:p="http://schemas.openxmlformats.org/presentationml/2006/main">
   <p:cSld>
     <p:spTree>
@@ -8051,7 +10479,7 @@
             </a:pPr>
             <a:r>
               <a:rPr/>
-              <a:t>Step 4 — Check Variance: Levene’s Test</a:t>
+              <a:t>Live Demo — Watch It Break (on purpose)</a:t>
             </a:r>
           </a:p>
         </p:txBody>
@@ -8071,17 +10499,142 @@
           <a:bodyPr/>
           <a:lstStyle/>
           <a:p>
+            <a:pPr lvl="0" indent="0" marL="0">
+              <a:buNone/>
+            </a:pPr>
+            <a:r>
+              <a:rPr/>
+              <a:t>Suppose I forgot </a:t>
+            </a:r>
+            <a:r>
+              <a:rPr>
+                <a:latin typeface="Courier"/>
+              </a:rPr>
+              <a:t>library(car)</a:t>
+            </a:r>
+            <a:r>
+              <a:rPr/>
+              <a:t> and run Levene’s:</a:t>
+            </a:r>
+          </a:p>
+          <a:p>
             <a:pPr lvl="0" indent="0">
               <a:buNone/>
             </a:pPr>
             <a:r>
               <a:rPr>
                 <a:solidFill>
+                  <a:srgbClr val="4758AB"/>
+                </a:solidFill>
+                <a:latin typeface="Courier"/>
+              </a:rPr>
+              <a:t>leveneTest</a:t>
+            </a:r>
+            <a:r>
+              <a:rPr>
+                <a:solidFill>
+                  <a:srgbClr val="003B4F"/>
+                </a:solidFill>
+                <a:latin typeface="Courier"/>
+              </a:rPr>
+              <a:t>(weight_g </a:t>
+            </a:r>
+            <a:r>
+              <a:rPr>
+                <a:solidFill>
                   <a:srgbClr val="5E5E5E"/>
                 </a:solidFill>
                 <a:latin typeface="Courier"/>
               </a:rPr>
-              <a:t># Levene's test — are the variances similar? -----------</a:t>
+              <a:t>~</a:t>
+            </a:r>
+            <a:r>
+              <a:rPr>
+                <a:solidFill>
+                  <a:srgbClr val="003B4F"/>
+                </a:solidFill>
+                <a:latin typeface="Courier"/>
+              </a:rPr>
+              <a:t> side, </a:t>
+            </a:r>
+            <a:r>
+              <a:rPr>
+                <a:solidFill>
+                  <a:srgbClr val="657422"/>
+                </a:solidFill>
+                <a:latin typeface="Courier"/>
+              </a:rPr>
+              <a:t>data =</a:t>
+            </a:r>
+            <a:r>
+              <a:rPr>
+                <a:solidFill>
+                  <a:srgbClr val="003B4F"/>
+                </a:solidFill>
+                <a:latin typeface="Courier"/>
+              </a:rPr>
+              <a:t> tree_df)</a:t>
+            </a:r>
+          </a:p>
+          <a:p>
+            <a:pPr lvl="0" indent="0" marL="0">
+              <a:buNone/>
+            </a:pPr>
+            <a:r>
+              <a:rPr/>
+              <a:t>R stops with:</a:t>
+            </a:r>
+          </a:p>
+          <a:p>
+            <a:pPr lvl="0" indent="0">
+              <a:buNone/>
+            </a:pPr>
+            <a:r>
+              <a:rPr>
+                <a:latin typeface="Courier"/>
+              </a:rPr>
+              <a:t>Error in leveneTest(weight_g ~ side, data = tree_df) :
+  could not find function "leveneTest"</a:t>
+            </a:r>
+          </a:p>
+          <a:p>
+            <a:pPr lvl="0" indent="0" marL="0">
+              <a:buNone/>
+            </a:pPr>
+            <a:r>
+              <a:rPr/>
+              <a:t>The fix — load the package that </a:t>
+            </a:r>
+            <a:r>
+              <a:rPr i="1"/>
+              <a:t>contains</a:t>
+            </a:r>
+            <a:r>
+              <a:rPr/>
+              <a:t> the function:</a:t>
+            </a:r>
+          </a:p>
+          <a:p>
+            <a:pPr lvl="0" indent="0">
+              <a:buNone/>
+            </a:pPr>
+            <a:r>
+              <a:rPr>
+                <a:solidFill>
+                  <a:srgbClr val="4758AB"/>
+                </a:solidFill>
+                <a:latin typeface="Courier"/>
+              </a:rPr>
+              <a:t>library</a:t>
+            </a:r>
+            <a:r>
+              <a:rPr>
+                <a:solidFill>
+                  <a:srgbClr val="003B4F"/>
+                </a:solidFill>
+                <a:latin typeface="Courier"/>
+              </a:rPr>
+              <a:t>(car)</a:t>
             </a:r>
             <a:br/>
             <a:r>
@@ -8137,20 +10690,6 @@
                 <a:latin typeface="Courier"/>
               </a:rPr>
               <a:t> tree_df)</a:t>
-            </a:r>
-          </a:p>
-          <a:p>
-            <a:pPr lvl="0" indent="0">
-              <a:buNone/>
-            </a:pPr>
-            <a:r>
-              <a:rPr>
-                <a:latin typeface="Courier"/>
-              </a:rPr>
-              <a:t>Levene's Test for Homogeneity of Variance (center = median)
-      Df F value Pr(&gt;F)
-group  1     0.6 0.4486
-      18               </a:t>
             </a:r>
           </a:p>
         </p:txBody>
@@ -8170,91 +10709,40 @@
           <a:bodyPr/>
           <a:lstStyle/>
           <a:p>
-            <a:pPr lvl="0" indent="0" marL="0">
+            <a:pPr lvl="0" indent="0" marL="1270000">
               <a:buNone/>
             </a:pPr>
             <a:r>
-              <a:rPr b="1"/>
-              <a:t>Levene’s test H₀:</a:t>
-            </a:r>
-            <a:r>
-              <a:rPr/>
-              <a:t> the two groups have </a:t>
-            </a:r>
-            <a:r>
-              <a:rPr b="1"/>
-              <a:t>equal variance</a:t>
-            </a:r>
-            <a:r>
-              <a:rPr/>
-              <a:t>.</a:t>
-            </a:r>
-          </a:p>
-          <a:p>
-            <a:pPr lvl="0"/>
-            <a:r>
-              <a:rPr i="1"/>
-              <a:t>p</a:t>
-            </a:r>
-            <a:r>
-              <a:rPr/>
-              <a:t> &gt; 0.05 → variances are not significantly different</a:t>
-            </a:r>
-          </a:p>
-          <a:p>
-            <a:pPr lvl="0"/>
-            <a:r>
-              <a:rPr i="1"/>
-              <a:t>p</a:t>
-            </a:r>
-            <a:r>
-              <a:rPr/>
-              <a:t> &lt; 0.05 → variances are significantly different</a:t>
-            </a:r>
-          </a:p>
-          <a:p>
-            <a:pPr lvl="0" indent="0" marL="0">
+              <a:rPr sz="2000" b="1"/>
+              <a:t>Tip</a:t>
+            </a:r>
+          </a:p>
+          <a:p>
+            <a:pPr lvl="0" indent="0" marL="1270000">
               <a:buNone/>
             </a:pPr>
             <a:r>
-              <a:rPr b="1"/>
-              <a:t>Our response regardless of the result:</a:t>
-            </a:r>
-          </a:p>
-          <a:p>
-            <a:pPr lvl="0" indent="0" marL="0">
+              <a:rPr sz="2000" b="1"/>
+              <a:t>✅ Why show a broken run?</a:t>
+            </a:r>
+          </a:p>
+          <a:p>
+            <a:pPr lvl="0" indent="0" marL="1270000">
               <a:buNone/>
             </a:pPr>
             <a:r>
-              <a:rPr/>
-              <a:t>We will use Welch’s t-test (</a:t>
-            </a:r>
-            <a:r>
-              <a:rPr>
-                <a:latin typeface="Courier"/>
-              </a:rPr>
-              <a:t>var.equal = FALSE</a:t>
-            </a:r>
-            <a:r>
-              <a:rPr/>
-              <a:t>).</a:t>
-            </a:r>
-          </a:p>
-          <a:p>
-            <a:pPr lvl="0" indent="0" marL="0">
-              <a:buNone/>
-            </a:pPr>
-            <a:r>
-              <a:rPr/>
-              <a:t>Welch’s is valid whether or not the variances are equal. We run Levene’s to </a:t>
-            </a:r>
-            <a:r>
-              <a:rPr i="1"/>
-              <a:t>understand our data</a:t>
-            </a:r>
-            <a:r>
-              <a:rPr/>
-              <a:t>, not to choose our test.</a:t>
+              <a:rPr sz="2000"/>
+              <a:t>“could not find function” almost always means a missing </a:t>
+            </a:r>
+            <a:r>
+              <a:rPr sz="2000">
+                <a:latin typeface="Courier"/>
+              </a:rPr>
+              <a:t>library()</a:t>
+            </a:r>
+            <a:r>
+              <a:rPr sz="2000"/>
+              <a:t> — not a typo. Watching me diagnose it here means you’ll fix it in seconds when it happens to you.</a:t>
             </a:r>
           </a:p>
         </p:txBody>
@@ -8264,7 +10752,7 @@
 </p:sld>
 </file>
 
-<file path=ppt/slides/slide17.xml><?xml version="1.0" encoding="utf-8"?>
+<file path=ppt/slides/slide25.xml><?xml version="1.0" encoding="utf-8"?>
 <p:sld xmlns:a="http://schemas.openxmlformats.org/drawingml/2006/main" xmlns:r="http://schemas.openxmlformats.org/officeDocument/2006/relationships" xmlns:p="http://schemas.openxmlformats.org/presentationml/2006/main">
   <p:cSld>
     <p:spTree>
@@ -8293,8 +10781,8 @@
         </p:nvSpPr>
         <p:spPr>
           <a:xfrm>
-            <a:off x="139485" y="78119"/>
-            <a:ext cx="8229600" cy="607682"/>
+            <a:off x="0" y="0"/>
+            <a:ext cx="9144000" cy="582780"/>
           </a:xfrm>
         </p:spPr>
         <p:txBody>
@@ -8306,11 +10794,287 @@
             </a:pPr>
             <a:r>
               <a:rPr/>
-              <a:t>Step 5 — Run the Welch’s t-Test</a:t>
+              <a:t>🛑 Pause — Do Activity Parts 4–7 Now</a:t>
             </a:r>
           </a:p>
         </p:txBody>
       </p:sp>
+      <p:sp>
+        <p:nvSpPr>
+          <p:cNvPr id="3" name="Content Placeholder 2"/>
+          <p:cNvSpPr>
+            <a:spLocks noGrp="1"/>
+          </p:cNvSpPr>
+          <p:nvPr>
+            <p:ph idx="1"/>
+          </p:nvPr>
+        </p:nvSpPr>
+        <p:spPr/>
+        <p:txBody>
+          <a:bodyPr/>
+          <a:lstStyle/>
+          <a:p>
+            <a:pPr lvl="0" indent="0" marL="0">
+              <a:buNone/>
+            </a:pPr>
+            <a:r>
+              <a:rPr/>
+              <a:t>Check every assumption </a:t>
+            </a:r>
+            <a:r>
+              <a:rPr i="1"/>
+              <a:t>before</a:t>
+            </a:r>
+            <a:r>
+              <a:rPr/>
+              <a:t> you test: histogram, QQ plot, Shapiro-Wilk, and Levene’s. Predict each p-value before you run it.</a:t>
+            </a:r>
+          </a:p>
+        </p:txBody>
+      </p:sp>
+    </p:spTree>
+  </p:cSld>
+</p:sld>
+</file>
+
+<file path=ppt/slides/slide26.xml><?xml version="1.0" encoding="utf-8"?>
+<p:sld xmlns:a="http://schemas.openxmlformats.org/drawingml/2006/main" xmlns:r="http://schemas.openxmlformats.org/officeDocument/2006/relationships" xmlns:p="http://schemas.openxmlformats.org/presentationml/2006/main">
+  <p:cSld>
+    <p:spTree>
+      <p:nvGrpSpPr>
+        <p:cNvPr id="1" name=""/>
+        <p:cNvGrpSpPr/>
+        <p:nvPr/>
+      </p:nvGrpSpPr>
+      <p:grpSpPr>
+        <a:xfrm>
+          <a:off x="0" y="0"/>
+          <a:ext cx="0" cy="0"/>
+          <a:chOff x="0" y="0"/>
+          <a:chExt cx="0" cy="0"/>
+        </a:xfrm>
+      </p:grpSpPr>
+      <p:sp>
+        <p:nvSpPr>
+          <p:cNvPr id="2" name="Title 1"/>
+          <p:cNvSpPr>
+            <a:spLocks noGrp="1"/>
+          </p:cNvSpPr>
+          <p:nvPr>
+            <p:ph type="title"/>
+          </p:nvPr>
+        </p:nvSpPr>
+        <p:spPr>
+          <a:xfrm>
+            <a:off x="0" y="0"/>
+            <a:ext cx="9144000" cy="582780"/>
+          </a:xfrm>
+        </p:spPr>
+        <p:txBody>
+          <a:bodyPr/>
+          <a:lstStyle/>
+          <a:p>
+            <a:pPr lvl="0" indent="0" marL="0">
+              <a:buNone/>
+            </a:pPr>
+            <a:r>
+              <a:rPr/>
+              <a:t>🧩 Chunk 3 of 4 · Run &amp; Interpret the Test</a:t>
+            </a:r>
+          </a:p>
+        </p:txBody>
+      </p:sp>
+      <p:sp>
+        <p:nvSpPr>
+          <p:cNvPr id="3" name="Content Placeholder 2"/>
+          <p:cNvSpPr>
+            <a:spLocks noGrp="1"/>
+          </p:cNvSpPr>
+          <p:nvPr>
+            <p:ph idx="1"/>
+          </p:nvPr>
+        </p:nvSpPr>
+        <p:spPr/>
+        <p:txBody>
+          <a:bodyPr/>
+          <a:lstStyle/>
+          <a:p>
+            <a:pPr lvl="0" indent="0" marL="0">
+              <a:buNone/>
+            </a:pPr>
+            <a:r>
+              <a:rPr b="1"/>
+              <a:t>We will cover:</a:t>
+            </a:r>
+            <a:r>
+              <a:rPr/>
+              <a:t> running Welch’s </a:t>
+            </a:r>
+            <a:r>
+              <a:rPr>
+                <a:latin typeface="Courier"/>
+              </a:rPr>
+              <a:t>t.test()</a:t>
+            </a:r>
+            <a:r>
+              <a:rPr/>
+              <a:t>, reading every line of the output, and making a formal reject / fail-to-reject decision.</a:t>
+            </a:r>
+          </a:p>
+          <a:p>
+            <a:pPr lvl="0" indent="0" marL="1270000">
+              <a:buNone/>
+            </a:pPr>
+            <a:r>
+              <a:rPr sz="2000" b="1"/>
+              <a:t>Tip</a:t>
+            </a:r>
+          </a:p>
+          <a:p>
+            <a:pPr lvl="0" indent="0" marL="1270000">
+              <a:buNone/>
+            </a:pPr>
+            <a:r>
+              <a:rPr sz="2000" b="1"/>
+              <a:t>🖐 After this chunk: Activity Parts 8–11</a:t>
+            </a:r>
+            <a:r>
+              <a:rPr sz="2000"/>
+              <a:t> (run, decode, calculate t by hand, decide).</a:t>
+            </a:r>
+          </a:p>
+        </p:txBody>
+      </p:sp>
+    </p:spTree>
+  </p:cSld>
+</p:sld>
+</file>
+
+<file path=ppt/slides/slide27.xml><?xml version="1.0" encoding="utf-8"?>
+<p:sld xmlns:a="http://schemas.openxmlformats.org/drawingml/2006/main" xmlns:r="http://schemas.openxmlformats.org/officeDocument/2006/relationships" xmlns:p="http://schemas.openxmlformats.org/presentationml/2006/main">
+  <p:cSld>
+    <p:spTree>
+      <p:nvGrpSpPr>
+        <p:cNvPr id="1" name=""/>
+        <p:cNvGrpSpPr/>
+        <p:nvPr/>
+      </p:nvGrpSpPr>
+      <p:grpSpPr>
+        <a:xfrm>
+          <a:off x="0" y="0"/>
+          <a:ext cx="0" cy="0"/>
+          <a:chOff x="0" y="0"/>
+          <a:chExt cx="0" cy="0"/>
+        </a:xfrm>
+      </p:grpSpPr>
+      <p:sp>
+        <p:nvSpPr>
+          <p:cNvPr id="2" name="Title 1"/>
+          <p:cNvSpPr>
+            <a:spLocks noGrp="1"/>
+          </p:cNvSpPr>
+          <p:nvPr>
+            <p:ph type="title"/>
+          </p:nvPr>
+        </p:nvSpPr>
+        <p:spPr>
+          <a:xfrm>
+            <a:off x="0" y="0"/>
+            <a:ext cx="9144000" cy="582780"/>
+          </a:xfrm>
+        </p:spPr>
+        <p:txBody>
+          <a:bodyPr/>
+          <a:lstStyle/>
+          <a:p>
+            <a:pPr lvl="0" indent="0" marL="0">
+              <a:buNone/>
+            </a:pPr>
+            <a:r>
+              <a:rPr/>
+              <a:t>Step 5 — Run the Welch’s t-Test</a:t>
+            </a:r>
+          </a:p>
+        </p:txBody>
+      </p:sp>
+      <p:sp>
+        <p:nvSpPr>
+          <p:cNvPr id="3" name="Content Placeholder 2"/>
+          <p:cNvSpPr>
+            <a:spLocks noGrp="1"/>
+          </p:cNvSpPr>
+          <p:nvPr>
+            <p:ph idx="1"/>
+          </p:nvPr>
+        </p:nvSpPr>
+        <p:spPr/>
+        <p:txBody>
+          <a:bodyPr/>
+          <a:lstStyle/>
+          <a:p>
+            <a:pPr lvl="0" indent="0" marL="1270000">
+              <a:buNone/>
+            </a:pPr>
+            <a:r>
+              <a:rPr sz="2000" b="1"/>
+              <a:t>Note</a:t>
+            </a:r>
+          </a:p>
+          <a:p>
+            <a:pPr lvl="0" indent="0" marL="1270000">
+              <a:buNone/>
+            </a:pPr>
+            <a:r>
+              <a:rPr sz="2000" b="1"/>
+              <a:t>🔮 Predict first:</a:t>
+            </a:r>
+            <a:r>
+              <a:rPr sz="2000"/>
+              <a:t> Write down a guess for the </a:t>
+            </a:r>
+            <a:r>
+              <a:rPr sz="2000" i="1"/>
+              <a:t>p</a:t>
+            </a:r>
+            <a:r>
+              <a:rPr sz="2000"/>
+              <a:t>-value before you run </a:t>
+            </a:r>
+            <a:r>
+              <a:rPr sz="2000">
+                <a:latin typeface="Courier"/>
+              </a:rPr>
+              <a:t>t.test()</a:t>
+            </a:r>
+            <a:r>
+              <a:rPr sz="2000"/>
+              <a:t> — above or below 0.05? Then see how close you were.</a:t>
+            </a:r>
+          </a:p>
+        </p:txBody>
+      </p:sp>
+    </p:spTree>
+  </p:cSld>
+</p:sld>
+</file>
+
+<file path=ppt/slides/slide28.xml><?xml version="1.0" encoding="utf-8"?>
+<p:sld xmlns:a="http://schemas.openxmlformats.org/drawingml/2006/main" xmlns:r="http://schemas.openxmlformats.org/officeDocument/2006/relationships" xmlns:p="http://schemas.openxmlformats.org/presentationml/2006/main">
+  <p:cSld>
+    <p:spTree>
+      <p:nvGrpSpPr>
+        <p:cNvPr id="1" name=""/>
+        <p:cNvGrpSpPr/>
+        <p:nvPr/>
+      </p:nvGrpSpPr>
+      <p:grpSpPr>
+        <a:xfrm>
+          <a:off x="0" y="0"/>
+          <a:ext cx="0" cy="0"/>
+          <a:chOff x="0" y="0"/>
+          <a:chExt cx="0" cy="0"/>
+        </a:xfrm>
+      </p:grpSpPr>
       <p:sp>
         <p:nvSpPr>
           <p:cNvPr id="3" name="Text Placeholder 2"/>
@@ -8820,7 +11584,7 @@
 </p:sld>
 </file>
 
-<file path=ppt/slides/slide18.xml><?xml version="1.0" encoding="utf-8"?>
+<file path=ppt/slides/slide29.xml><?xml version="1.0" encoding="utf-8"?>
 <p:sld xmlns:a="http://schemas.openxmlformats.org/drawingml/2006/main" xmlns:r="http://schemas.openxmlformats.org/officeDocument/2006/relationships" xmlns:p="http://schemas.openxmlformats.org/presentationml/2006/main">
   <p:cSld>
     <p:spTree>
@@ -10245,7 +13009,7 @@
 </p:sld>
 </file>
 
-<file path=ppt/slides/slide19.xml><?xml version="1.0" encoding="utf-8"?>
+<file path=ppt/slides/slide3.xml><?xml version="1.0" encoding="utf-8"?>
 <p:sld xmlns:a="http://schemas.openxmlformats.org/drawingml/2006/main" xmlns:r="http://schemas.openxmlformats.org/officeDocument/2006/relationships" xmlns:p="http://schemas.openxmlformats.org/presentationml/2006/main">
   <p:cSld>
     <p:spTree>
@@ -10290,7 +13054,7 @@
             </a:pPr>
             <a:r>
               <a:rPr/>
-              <a:t>Step 5 — Make a Decision</a:t>
+              <a:t>Goals for Today</a:t>
             </a:r>
           </a:p>
         </p:txBody>
@@ -10310,701 +13074,120 @@
           <a:bodyPr/>
           <a:lstStyle/>
           <a:p>
-            <a:pPr lvl="0" indent="0">
+            <a:pPr lvl="0"/>
+            <a:r>
+              <a:rPr b="1"/>
+              <a:t>Understand</a:t>
+            </a:r>
+            <a:r>
+              <a:rPr/>
+              <a:t> why comparing means is not enough — we need a test</a:t>
+            </a:r>
+          </a:p>
+          <a:p>
+            <a:pPr lvl="0"/>
+            <a:r>
+              <a:rPr b="1"/>
+              <a:t>State</a:t>
+            </a:r>
+            <a:r>
+              <a:rPr/>
+              <a:t> null and alternate hypotheses formally</a:t>
+            </a:r>
+          </a:p>
+          <a:p>
+            <a:pPr lvl="0"/>
+            <a:r>
+              <a:rPr b="1"/>
+              <a:t>Check assumptions</a:t>
+            </a:r>
+            <a:r>
+              <a:rPr/>
+              <a:t> before running any test</a:t>
+            </a:r>
+          </a:p>
+          <a:p>
+            <a:pPr lvl="1"/>
+            <a:r>
+              <a:rPr/>
+              <a:t>normality: histogram, QQ plot, Shapiro-Wilk</a:t>
+            </a:r>
+          </a:p>
+          <a:p>
+            <a:pPr lvl="1"/>
+            <a:r>
+              <a:rPr/>
+              <a:t>variance: Levene’s test</a:t>
+            </a:r>
+          </a:p>
+          <a:p>
+            <a:pPr lvl="0"/>
+            <a:r>
+              <a:rPr b="1"/>
+              <a:t>Run</a:t>
+            </a:r>
+            <a:r>
+              <a:rPr/>
+              <a:t> Welch’s two-sample t-test in R</a:t>
+            </a:r>
+          </a:p>
+          <a:p>
+            <a:pPr lvl="0"/>
+            <a:r>
+              <a:rPr b="1"/>
+              <a:t>Read</a:t>
+            </a:r>
+            <a:r>
+              <a:rPr/>
+              <a:t> every line of the </a:t>
+            </a:r>
+            <a:r>
+              <a:rPr>
+                <a:latin typeface="Courier"/>
+              </a:rPr>
+              <a:t>t.test()</a:t>
+            </a:r>
+            <a:r>
+              <a:rPr/>
+              <a:t> output</a:t>
+            </a:r>
+          </a:p>
+          <a:p>
+            <a:pPr lvl="0"/>
+            <a:r>
+              <a:rPr b="1"/>
+              <a:t>Report</a:t>
+            </a:r>
+            <a:r>
+              <a:rPr/>
+              <a:t> results in scientific writing format</a:t>
+            </a:r>
+          </a:p>
+          <a:p>
+            <a:pPr lvl="0" indent="0" marL="1270000">
               <a:buNone/>
             </a:pPr>
             <a:r>
-              <a:rPr>
-                <a:solidFill>
-                  <a:srgbClr val="5E5E5E"/>
-                </a:solidFill>
-                <a:latin typeface="Courier"/>
-              </a:rPr>
-              <a:t># State the decision formally --------------------------</a:t>
-            </a:r>
-            <a:br/>
-            <a:r>
-              <a:rPr>
-                <a:solidFill>
-                  <a:srgbClr val="5E5E5E"/>
-                </a:solidFill>
-                <a:latin typeface="Courier"/>
-              </a:rPr>
-              <a:t># if/else: R checks the condition and runs one of two blocks</a:t>
-            </a:r>
-            <a:br/>
-            <a:r>
-              <a:rPr>
-                <a:solidFill>
-                  <a:srgbClr val="5E5E5E"/>
-                </a:solidFill>
-                <a:latin typeface="Courier"/>
-              </a:rPr>
-              <a:t># We will learn these formally in the functions lecture</a:t>
-            </a:r>
-            <a:br/>
-            <a:r>
-              <a:rPr>
-                <a:solidFill>
-                  <a:srgbClr val="003B4F"/>
-                </a:solidFill>
-                <a:latin typeface="Courier"/>
-              </a:rPr>
-              <a:t>p_val &lt;- leaf_ttest_model</a:t>
-            </a:r>
-            <a:r>
-              <a:rPr>
-                <a:solidFill>
-                  <a:srgbClr val="5E5E5E"/>
-                </a:solidFill>
-                <a:latin typeface="Courier"/>
-              </a:rPr>
-              <a:t>$</a:t>
-            </a:r>
-            <a:r>
-              <a:rPr>
-                <a:solidFill>
-                  <a:srgbClr val="003B4F"/>
-                </a:solidFill>
-                <a:latin typeface="Courier"/>
-              </a:rPr>
-              <a:t>p.value</a:t>
-            </a:r>
-            <a:br/>
-            <a:r>
-              <a:rPr>
-                <a:solidFill>
-                  <a:srgbClr val="003B4F"/>
-                </a:solidFill>
-                <a:latin typeface="Courier"/>
-              </a:rPr>
-              <a:t>alpha &lt;- </a:t>
-            </a:r>
-            <a:r>
-              <a:rPr>
-                <a:solidFill>
-                  <a:srgbClr val="AD0000"/>
-                </a:solidFill>
-                <a:latin typeface="Courier"/>
-              </a:rPr>
-              <a:t>0.05</a:t>
-            </a:r>
-            <a:br/>
-            <a:br/>
-            <a:r>
-              <a:rPr b="1">
-                <a:solidFill>
-                  <a:srgbClr val="003B4F"/>
-                </a:solidFill>
-                <a:latin typeface="Courier"/>
-              </a:rPr>
-              <a:t>if</a:t>
-            </a:r>
-            <a:r>
-              <a:rPr>
-                <a:solidFill>
-                  <a:srgbClr val="003B4F"/>
-                </a:solidFill>
-                <a:latin typeface="Courier"/>
-              </a:rPr>
-              <a:t> (p_val </a:t>
-            </a:r>
-            <a:r>
-              <a:rPr>
-                <a:solidFill>
-                  <a:srgbClr val="5E5E5E"/>
-                </a:solidFill>
-                <a:latin typeface="Courier"/>
-              </a:rPr>
-              <a:t>&lt;</a:t>
-            </a:r>
-            <a:r>
-              <a:rPr>
-                <a:solidFill>
-                  <a:srgbClr val="003B4F"/>
-                </a:solidFill>
-                <a:latin typeface="Courier"/>
-              </a:rPr>
-              <a:t> alpha) {</a:t>
-            </a:r>
-            <a:br/>
-            <a:r>
-              <a:rPr>
-                <a:solidFill>
-                  <a:srgbClr val="003B4F"/>
-                </a:solidFill>
-                <a:latin typeface="Courier"/>
-              </a:rPr>
-              <a:t>  </a:t>
-            </a:r>
-            <a:r>
-              <a:rPr>
-                <a:solidFill>
-                  <a:srgbClr val="4758AB"/>
-                </a:solidFill>
-                <a:latin typeface="Courier"/>
-              </a:rPr>
-              <a:t>cat</a:t>
-            </a:r>
-            <a:r>
-              <a:rPr>
-                <a:solidFill>
-                  <a:srgbClr val="003B4F"/>
-                </a:solidFill>
-                <a:latin typeface="Courier"/>
-              </a:rPr>
-              <a:t>(</a:t>
-            </a:r>
-            <a:r>
-              <a:rPr>
-                <a:solidFill>
-                  <a:srgbClr val="20794D"/>
-                </a:solidFill>
-                <a:latin typeface="Courier"/>
-              </a:rPr>
-              <a:t>"p ="</a:t>
-            </a:r>
-            <a:r>
-              <a:rPr>
-                <a:solidFill>
-                  <a:srgbClr val="003B4F"/>
-                </a:solidFill>
-                <a:latin typeface="Courier"/>
-              </a:rPr>
-              <a:t>, </a:t>
-            </a:r>
-            <a:r>
-              <a:rPr>
-                <a:solidFill>
-                  <a:srgbClr val="4758AB"/>
-                </a:solidFill>
-                <a:latin typeface="Courier"/>
-              </a:rPr>
-              <a:t>signif</a:t>
-            </a:r>
-            <a:r>
-              <a:rPr>
-                <a:solidFill>
-                  <a:srgbClr val="003B4F"/>
-                </a:solidFill>
-                <a:latin typeface="Courier"/>
-              </a:rPr>
-              <a:t>(p_val, </a:t>
-            </a:r>
-            <a:r>
-              <a:rPr>
-                <a:solidFill>
-                  <a:srgbClr val="AD0000"/>
-                </a:solidFill>
-                <a:latin typeface="Courier"/>
-              </a:rPr>
-              <a:t>3</a:t>
-            </a:r>
-            <a:r>
-              <a:rPr>
-                <a:solidFill>
-                  <a:srgbClr val="003B4F"/>
-                </a:solidFill>
-                <a:latin typeface="Courier"/>
-              </a:rPr>
-              <a:t>), </a:t>
-            </a:r>
-            <a:r>
-              <a:rPr>
-                <a:solidFill>
-                  <a:srgbClr val="20794D"/>
-                </a:solidFill>
-                <a:latin typeface="Courier"/>
-              </a:rPr>
-              <a:t>"&lt; α ="</a:t>
-            </a:r>
-            <a:r>
-              <a:rPr>
-                <a:solidFill>
-                  <a:srgbClr val="003B4F"/>
-                </a:solidFill>
-                <a:latin typeface="Courier"/>
-              </a:rPr>
-              <a:t>, alpha, </a:t>
-            </a:r>
-            <a:r>
-              <a:rPr>
-                <a:solidFill>
-                  <a:srgbClr val="20794D"/>
-                </a:solidFill>
-                <a:latin typeface="Courier"/>
-              </a:rPr>
-              <a:t>"</a:t>
-            </a:r>
-            <a:r>
-              <a:rPr>
-                <a:solidFill>
-                  <a:srgbClr val="5E5E5E"/>
-                </a:solidFill>
-                <a:latin typeface="Courier"/>
-              </a:rPr>
-              <a:t>\n</a:t>
-            </a:r>
-            <a:r>
-              <a:rPr>
-                <a:solidFill>
-                  <a:srgbClr val="20794D"/>
-                </a:solidFill>
-                <a:latin typeface="Courier"/>
-              </a:rPr>
-              <a:t>"</a:t>
-            </a:r>
-            <a:r>
-              <a:rPr>
-                <a:solidFill>
-                  <a:srgbClr val="003B4F"/>
-                </a:solidFill>
-                <a:latin typeface="Courier"/>
-              </a:rPr>
-              <a:t>)</a:t>
-            </a:r>
-            <a:br/>
-            <a:r>
-              <a:rPr>
-                <a:solidFill>
-                  <a:srgbClr val="003B4F"/>
-                </a:solidFill>
-                <a:latin typeface="Courier"/>
-              </a:rPr>
-              <a:t>  </a:t>
-            </a:r>
-            <a:r>
-              <a:rPr>
-                <a:solidFill>
-                  <a:srgbClr val="4758AB"/>
-                </a:solidFill>
-                <a:latin typeface="Courier"/>
-              </a:rPr>
-              <a:t>cat</a:t>
-            </a:r>
-            <a:r>
-              <a:rPr>
-                <a:solidFill>
-                  <a:srgbClr val="003B4F"/>
-                </a:solidFill>
-                <a:latin typeface="Courier"/>
-              </a:rPr>
-              <a:t>(</a:t>
-            </a:r>
-            <a:r>
-              <a:rPr>
-                <a:solidFill>
-                  <a:srgbClr val="20794D"/>
-                </a:solidFill>
-                <a:latin typeface="Courier"/>
-              </a:rPr>
-              <a:t>"Decision: REJECT H₀</a:t>
-            </a:r>
-            <a:r>
-              <a:rPr>
-                <a:solidFill>
-                  <a:srgbClr val="5E5E5E"/>
-                </a:solidFill>
-                <a:latin typeface="Courier"/>
-              </a:rPr>
-              <a:t>\n</a:t>
-            </a:r>
-            <a:r>
-              <a:rPr>
-                <a:solidFill>
-                  <a:srgbClr val="20794D"/>
-                </a:solidFill>
-                <a:latin typeface="Courier"/>
-              </a:rPr>
-              <a:t>"</a:t>
-            </a:r>
-            <a:r>
-              <a:rPr>
-                <a:solidFill>
-                  <a:srgbClr val="003B4F"/>
-                </a:solidFill>
-                <a:latin typeface="Courier"/>
-              </a:rPr>
-              <a:t>)</a:t>
-            </a:r>
-            <a:br/>
-            <a:r>
-              <a:rPr>
-                <a:solidFill>
-                  <a:srgbClr val="003B4F"/>
-                </a:solidFill>
-                <a:latin typeface="Courier"/>
-              </a:rPr>
-              <a:t>  </a:t>
-            </a:r>
-            <a:r>
-              <a:rPr>
-                <a:solidFill>
-                  <a:srgbClr val="4758AB"/>
-                </a:solidFill>
-                <a:latin typeface="Courier"/>
-              </a:rPr>
-              <a:t>cat</a:t>
-            </a:r>
-            <a:r>
-              <a:rPr>
-                <a:solidFill>
-                  <a:srgbClr val="003B4F"/>
-                </a:solidFill>
-                <a:latin typeface="Courier"/>
-              </a:rPr>
-              <a:t>(</a:t>
-            </a:r>
-            <a:r>
-              <a:rPr>
-                <a:solidFill>
-                  <a:srgbClr val="20794D"/>
-                </a:solidFill>
-                <a:latin typeface="Courier"/>
-              </a:rPr>
-              <a:t>"Conclusion: leaf weight differs between sides.</a:t>
-            </a:r>
-            <a:r>
-              <a:rPr>
-                <a:solidFill>
-                  <a:srgbClr val="5E5E5E"/>
-                </a:solidFill>
-                <a:latin typeface="Courier"/>
-              </a:rPr>
-              <a:t>\n</a:t>
-            </a:r>
-            <a:r>
-              <a:rPr>
-                <a:solidFill>
-                  <a:srgbClr val="20794D"/>
-                </a:solidFill>
-                <a:latin typeface="Courier"/>
-              </a:rPr>
-              <a:t>"</a:t>
-            </a:r>
-            <a:r>
-              <a:rPr>
-                <a:solidFill>
-                  <a:srgbClr val="003B4F"/>
-                </a:solidFill>
-                <a:latin typeface="Courier"/>
-              </a:rPr>
-              <a:t>)</a:t>
-            </a:r>
-            <a:br/>
-            <a:r>
-              <a:rPr>
-                <a:solidFill>
-                  <a:srgbClr val="003B4F"/>
-                </a:solidFill>
-                <a:latin typeface="Courier"/>
-              </a:rPr>
-              <a:t>} </a:t>
-            </a:r>
-            <a:r>
-              <a:rPr b="1">
-                <a:solidFill>
-                  <a:srgbClr val="003B4F"/>
-                </a:solidFill>
-                <a:latin typeface="Courier"/>
-              </a:rPr>
-              <a:t>else</a:t>
-            </a:r>
-            <a:r>
-              <a:rPr>
-                <a:solidFill>
-                  <a:srgbClr val="003B4F"/>
-                </a:solidFill>
-                <a:latin typeface="Courier"/>
-              </a:rPr>
-              <a:t> {</a:t>
-            </a:r>
-            <a:br/>
-            <a:r>
-              <a:rPr>
-                <a:solidFill>
-                  <a:srgbClr val="003B4F"/>
-                </a:solidFill>
-                <a:latin typeface="Courier"/>
-              </a:rPr>
-              <a:t>  </a:t>
-            </a:r>
-            <a:r>
-              <a:rPr>
-                <a:solidFill>
-                  <a:srgbClr val="4758AB"/>
-                </a:solidFill>
-                <a:latin typeface="Courier"/>
-              </a:rPr>
-              <a:t>cat</a:t>
-            </a:r>
-            <a:r>
-              <a:rPr>
-                <a:solidFill>
-                  <a:srgbClr val="003B4F"/>
-                </a:solidFill>
-                <a:latin typeface="Courier"/>
-              </a:rPr>
-              <a:t>(</a:t>
-            </a:r>
-            <a:r>
-              <a:rPr>
-                <a:solidFill>
-                  <a:srgbClr val="20794D"/>
-                </a:solidFill>
-                <a:latin typeface="Courier"/>
-              </a:rPr>
-              <a:t>"p ="</a:t>
-            </a:r>
-            <a:r>
-              <a:rPr>
-                <a:solidFill>
-                  <a:srgbClr val="003B4F"/>
-                </a:solidFill>
-                <a:latin typeface="Courier"/>
-              </a:rPr>
-              <a:t>, </a:t>
-            </a:r>
-            <a:r>
-              <a:rPr>
-                <a:solidFill>
-                  <a:srgbClr val="4758AB"/>
-                </a:solidFill>
-                <a:latin typeface="Courier"/>
-              </a:rPr>
-              <a:t>signif</a:t>
-            </a:r>
-            <a:r>
-              <a:rPr>
-                <a:solidFill>
-                  <a:srgbClr val="003B4F"/>
-                </a:solidFill>
-                <a:latin typeface="Courier"/>
-              </a:rPr>
-              <a:t>(p_val, </a:t>
-            </a:r>
-            <a:r>
-              <a:rPr>
-                <a:solidFill>
-                  <a:srgbClr val="AD0000"/>
-                </a:solidFill>
-                <a:latin typeface="Courier"/>
-              </a:rPr>
-              <a:t>3</a:t>
-            </a:r>
-            <a:r>
-              <a:rPr>
-                <a:solidFill>
-                  <a:srgbClr val="003B4F"/>
-                </a:solidFill>
-                <a:latin typeface="Courier"/>
-              </a:rPr>
-              <a:t>), </a:t>
-            </a:r>
-            <a:r>
-              <a:rPr>
-                <a:solidFill>
-                  <a:srgbClr val="20794D"/>
-                </a:solidFill>
-                <a:latin typeface="Courier"/>
-              </a:rPr>
-              <a:t>"&gt;= α ="</a:t>
-            </a:r>
-            <a:r>
-              <a:rPr>
-                <a:solidFill>
-                  <a:srgbClr val="003B4F"/>
-                </a:solidFill>
-                <a:latin typeface="Courier"/>
-              </a:rPr>
-              <a:t>, alpha, </a:t>
-            </a:r>
-            <a:r>
-              <a:rPr>
-                <a:solidFill>
-                  <a:srgbClr val="20794D"/>
-                </a:solidFill>
-                <a:latin typeface="Courier"/>
-              </a:rPr>
-              <a:t>"</a:t>
-            </a:r>
-            <a:r>
-              <a:rPr>
-                <a:solidFill>
-                  <a:srgbClr val="5E5E5E"/>
-                </a:solidFill>
-                <a:latin typeface="Courier"/>
-              </a:rPr>
-              <a:t>\n</a:t>
-            </a:r>
-            <a:r>
-              <a:rPr>
-                <a:solidFill>
-                  <a:srgbClr val="20794D"/>
-                </a:solidFill>
-                <a:latin typeface="Courier"/>
-              </a:rPr>
-              <a:t>"</a:t>
-            </a:r>
-            <a:r>
-              <a:rPr>
-                <a:solidFill>
-                  <a:srgbClr val="003B4F"/>
-                </a:solidFill>
-                <a:latin typeface="Courier"/>
-              </a:rPr>
-              <a:t>)</a:t>
-            </a:r>
-            <a:br/>
-            <a:r>
-              <a:rPr>
-                <a:solidFill>
-                  <a:srgbClr val="003B4F"/>
-                </a:solidFill>
-                <a:latin typeface="Courier"/>
-              </a:rPr>
-              <a:t>  </a:t>
-            </a:r>
-            <a:r>
-              <a:rPr>
-                <a:solidFill>
-                  <a:srgbClr val="4758AB"/>
-                </a:solidFill>
-                <a:latin typeface="Courier"/>
-              </a:rPr>
-              <a:t>cat</a:t>
-            </a:r>
-            <a:r>
-              <a:rPr>
-                <a:solidFill>
-                  <a:srgbClr val="003B4F"/>
-                </a:solidFill>
-                <a:latin typeface="Courier"/>
-              </a:rPr>
-              <a:t>(</a:t>
-            </a:r>
-            <a:r>
-              <a:rPr>
-                <a:solidFill>
-                  <a:srgbClr val="20794D"/>
-                </a:solidFill>
-                <a:latin typeface="Courier"/>
-              </a:rPr>
-              <a:t>"Decision: FAIL TO REJECT H₀</a:t>
-            </a:r>
-            <a:r>
-              <a:rPr>
-                <a:solidFill>
-                  <a:srgbClr val="5E5E5E"/>
-                </a:solidFill>
-                <a:latin typeface="Courier"/>
-              </a:rPr>
-              <a:t>\n</a:t>
-            </a:r>
-            <a:r>
-              <a:rPr>
-                <a:solidFill>
-                  <a:srgbClr val="20794D"/>
-                </a:solidFill>
-                <a:latin typeface="Courier"/>
-              </a:rPr>
-              <a:t>"</a:t>
-            </a:r>
-            <a:r>
-              <a:rPr>
-                <a:solidFill>
-                  <a:srgbClr val="003B4F"/>
-                </a:solidFill>
-                <a:latin typeface="Courier"/>
-              </a:rPr>
-              <a:t>)</a:t>
-            </a:r>
-            <a:br/>
-            <a:r>
-              <a:rPr>
-                <a:solidFill>
-                  <a:srgbClr val="003B4F"/>
-                </a:solidFill>
-                <a:latin typeface="Courier"/>
-              </a:rPr>
-              <a:t>  </a:t>
-            </a:r>
-            <a:r>
-              <a:rPr>
-                <a:solidFill>
-                  <a:srgbClr val="4758AB"/>
-                </a:solidFill>
-                <a:latin typeface="Courier"/>
-              </a:rPr>
-              <a:t>cat</a:t>
-            </a:r>
-            <a:r>
-              <a:rPr>
-                <a:solidFill>
-                  <a:srgbClr val="003B4F"/>
-                </a:solidFill>
-                <a:latin typeface="Courier"/>
-              </a:rPr>
-              <a:t>(</a:t>
-            </a:r>
-            <a:r>
-              <a:rPr>
-                <a:solidFill>
-                  <a:srgbClr val="20794D"/>
-                </a:solidFill>
-                <a:latin typeface="Courier"/>
-              </a:rPr>
-              <a:t>"Conclusion: insufficient evidence of a difference.</a:t>
-            </a:r>
-            <a:r>
-              <a:rPr>
-                <a:solidFill>
-                  <a:srgbClr val="5E5E5E"/>
-                </a:solidFill>
-                <a:latin typeface="Courier"/>
-              </a:rPr>
-              <a:t>\n</a:t>
-            </a:r>
-            <a:r>
-              <a:rPr>
-                <a:solidFill>
-                  <a:srgbClr val="20794D"/>
-                </a:solidFill>
-                <a:latin typeface="Courier"/>
-              </a:rPr>
-              <a:t>"</a:t>
-            </a:r>
-            <a:r>
-              <a:rPr>
-                <a:solidFill>
-                  <a:srgbClr val="003B4F"/>
-                </a:solidFill>
-                <a:latin typeface="Courier"/>
-              </a:rPr>
-              <a:t>)</a:t>
-            </a:r>
-            <a:br/>
-            <a:r>
-              <a:rPr>
-                <a:solidFill>
-                  <a:srgbClr val="003B4F"/>
-                </a:solidFill>
-                <a:latin typeface="Courier"/>
-              </a:rPr>
-              <a:t>}</a:t>
-            </a:r>
-          </a:p>
-          <a:p>
-            <a:pPr lvl="0" indent="0">
+              <a:rPr sz="2000" b="1"/>
+              <a:t>Tip</a:t>
+            </a:r>
+          </a:p>
+          <a:p>
+            <a:pPr lvl="0" indent="0" marL="1270000">
               <a:buNone/>
             </a:pPr>
             <a:r>
-              <a:rPr>
-                <a:latin typeface="Courier"/>
-              </a:rPr>
-              <a:t>p = 2.51e-08 &lt; α = 0.05 
-Decision: REJECT H₀
-Conclusion: leaf weight differs between sides.</a:t>
+              <a:rPr sz="2000" b="1"/>
+              <a:t>🖐 Try it yourself</a:t>
+            </a:r>
+          </a:p>
+          <a:p>
+            <a:pPr lvl="0" indent="0" marL="1270000">
+              <a:buNone/>
+            </a:pPr>
+            <a:r>
+              <a:rPr sz="2000"/>
+              <a:t>By the end you will run and interpret a complete t-test on our leaf data.</a:t>
             </a:r>
           </a:p>
         </p:txBody>
@@ -11024,99 +13207,95 @@
           <a:bodyPr/>
           <a:lstStyle/>
           <a:p>
-            <a:pPr lvl="0" indent="0" marL="1270000">
+            <a:pPr lvl="0" indent="0" marL="0">
               <a:buNone/>
             </a:pPr>
             <a:r>
-              <a:rPr sz="2000" b="1"/>
-              <a:t>Important</a:t>
-            </a:r>
-          </a:p>
-          <a:p>
-            <a:pPr lvl="0" indent="0" marL="1270000">
+              <a:rPr b="1"/>
+              <a:t>Tools added today:</a:t>
+            </a:r>
+          </a:p>
+          <a:p>
+            <a:pPr lvl="0"/>
+            <a:r>
+              <a:rPr>
+                <a:latin typeface="Courier"/>
+              </a:rPr>
+              <a:t>car</a:t>
+            </a:r>
+            <a:r>
+              <a:rPr/>
+              <a:t> — Levene’s variance test</a:t>
+            </a:r>
+          </a:p>
+          <a:p>
+            <a:pPr lvl="0" indent="0" marL="0">
               <a:buNone/>
             </a:pPr>
             <a:r>
-              <a:rPr sz="2000" b="1"/>
-              <a:t>What a small p-value means:</a:t>
-            </a:r>
-          </a:p>
-          <a:p>
-            <a:pPr lvl="0" indent="0" marL="1270000">
+              <a:rPr b="1"/>
+              <a:t>References:</a:t>
+            </a:r>
+          </a:p>
+          <a:p>
+            <a:pPr lvl="0"/>
+            <a:r>
+              <a:rPr/>
+              <a:t>📖 </a:t>
+            </a:r>
+            <a:r>
+              <a:rPr>
+                <a:hlinkClick r:id="rId2"/>
+              </a:rPr>
+              <a:t>R4DS §3</a:t>
+            </a:r>
+          </a:p>
+          <a:p>
+            <a:pPr lvl="0"/>
+            <a:r>
+              <a:rPr/>
+              <a:t>🌐 </a:t>
+            </a:r>
+            <a:r>
+              <a:rPr>
+                <a:hlinkClick r:id="rId3"/>
+              </a:rPr>
+              <a:t>Data Carpentry</a:t>
+            </a:r>
+          </a:p>
+          <a:p>
+            <a:pPr lvl="0" indent="0" marL="0">
               <a:buNone/>
             </a:pPr>
             <a:r>
-              <a:rPr sz="2000"/>
-              <a:t>If H₀ were true (no real difference), we would get a t-statistic this large or larger less than </a:t>
-            </a:r>
-            <a:r>
-              <a:rPr sz="2000">
-                <a:latin typeface="Courier"/>
-              </a:rPr>
-              <a:t>p</a:t>
-            </a:r>
-            <a:r>
-              <a:rPr sz="2000"/>
-              <a:t> × 100% of the time just by chance.</a:t>
-            </a:r>
-          </a:p>
-          <a:p>
-            <a:pPr lvl="0" indent="0" marL="1270000">
-              <a:buNone/>
-            </a:pPr>
-            <a:r>
-              <a:rPr sz="2000"/>
-              <a:t>We set α = 0.05 </a:t>
-            </a:r>
-            <a:r>
-              <a:rPr sz="2000" i="1"/>
-              <a:t>before</a:t>
-            </a:r>
-            <a:r>
-              <a:rPr sz="2000"/>
-              <a:t> the test. If </a:t>
-            </a:r>
-            <a:r>
-              <a:rPr sz="2000" i="1"/>
-              <a:t>p</a:t>
-            </a:r>
-            <a:r>
-              <a:rPr sz="2000"/>
-              <a:t> &lt; α, we reject H₀.</a:t>
-            </a:r>
-          </a:p>
-          <a:p>
-            <a:pPr lvl="0" indent="0" marL="0">
-              <a:buNone/>
-            </a:pPr>
-            <a:r>
               <a:rPr b="1"/>
-              <a:t>What a small p-value does NOT mean:</a:t>
+              <a:t>Today’s naming:</a:t>
             </a:r>
           </a:p>
           <a:p>
             <a:pPr lvl="0"/>
             <a:r>
               <a:rPr/>
-              <a:t>It is not the probability that H₀ is true</a:t>
+              <a:t>test objects → </a:t>
+            </a:r>
+            <a:r>
+              <a:rPr>
+                <a:latin typeface="Courier"/>
+              </a:rPr>
+              <a:t>_model</a:t>
             </a:r>
           </a:p>
           <a:p>
             <a:pPr lvl="0"/>
             <a:r>
               <a:rPr/>
-              <a:t>Statistical significance ≠ biological importance</a:t>
-            </a:r>
-          </a:p>
-          <a:p>
-            <a:pPr lvl="0"/>
-            <a:r>
-              <a:rPr/>
-              <a:t>Report the effect size (difference in means) alongside </a:t>
-            </a:r>
-            <a:r>
-              <a:rPr i="1"/>
-              <a:t>p</a:t>
+              <a:t>plots → </a:t>
+            </a:r>
+            <a:r>
+              <a:rPr>
+                <a:latin typeface="Courier"/>
+              </a:rPr>
+              <a:t>_plot</a:t>
             </a:r>
           </a:p>
         </p:txBody>
@@ -11126,7 +13305,888 @@
 </p:sld>
 </file>
 
-<file path=ppt/slides/slide2.xml><?xml version="1.0" encoding="utf-8"?>
+<file path=ppt/slides/slide30.xml><?xml version="1.0" encoding="utf-8"?>
+<p:sld xmlns:a="http://schemas.openxmlformats.org/drawingml/2006/main" xmlns:r="http://schemas.openxmlformats.org/officeDocument/2006/relationships" xmlns:p="http://schemas.openxmlformats.org/presentationml/2006/main">
+  <p:cSld>
+    <p:spTree>
+      <p:nvGrpSpPr>
+        <p:cNvPr id="1" name=""/>
+        <p:cNvGrpSpPr/>
+        <p:nvPr/>
+      </p:nvGrpSpPr>
+      <p:grpSpPr>
+        <a:xfrm>
+          <a:off x="0" y="0"/>
+          <a:ext cx="0" cy="0"/>
+          <a:chOff x="0" y="0"/>
+          <a:chExt cx="0" cy="0"/>
+        </a:xfrm>
+      </p:grpSpPr>
+      <p:sp>
+        <p:nvSpPr>
+          <p:cNvPr id="2" name="Title 1"/>
+          <p:cNvSpPr>
+            <a:spLocks noGrp="1"/>
+          </p:cNvSpPr>
+          <p:nvPr>
+            <p:ph type="title"/>
+          </p:nvPr>
+        </p:nvSpPr>
+        <p:spPr>
+          <a:xfrm>
+            <a:off x="0" y="0"/>
+            <a:ext cx="9144000" cy="602780"/>
+          </a:xfrm>
+          <a:solidFill>
+            <a:srgbClr val="1A1A2E"/>
+          </a:solidFill>
+        </p:spPr>
+        <p:txBody>
+          <a:bodyPr/>
+          <a:lstStyle/>
+          <a:p>
+            <a:pPr lvl="0" indent="0" marL="0">
+              <a:buNone/>
+            </a:pPr>
+            <a:r>
+              <a:rPr/>
+              <a:t>Step 5 — Make a Decision</a:t>
+            </a:r>
+          </a:p>
+        </p:txBody>
+      </p:sp>
+      <p:sp>
+        <p:nvSpPr>
+          <p:cNvPr id="3" name="Content Placeholder 2"/>
+          <p:cNvSpPr>
+            <a:spLocks noGrp="1"/>
+          </p:cNvSpPr>
+          <p:nvPr>
+            <p:ph idx="1" sz="half"/>
+          </p:nvPr>
+        </p:nvSpPr>
+        <p:spPr/>
+        <p:txBody>
+          <a:bodyPr/>
+          <a:lstStyle/>
+          <a:p>
+            <a:pPr lvl="0" indent="0">
+              <a:buNone/>
+            </a:pPr>
+            <a:r>
+              <a:rPr>
+                <a:solidFill>
+                  <a:srgbClr val="5E5E5E"/>
+                </a:solidFill>
+                <a:latin typeface="Courier"/>
+              </a:rPr>
+              <a:t># State the decision formally --------------------------</a:t>
+            </a:r>
+            <a:br/>
+            <a:r>
+              <a:rPr>
+                <a:solidFill>
+                  <a:srgbClr val="5E5E5E"/>
+                </a:solidFill>
+                <a:latin typeface="Courier"/>
+              </a:rPr>
+              <a:t># if/else: R checks the condition and runs one of two blocks</a:t>
+            </a:r>
+            <a:br/>
+            <a:r>
+              <a:rPr>
+                <a:solidFill>
+                  <a:srgbClr val="5E5E5E"/>
+                </a:solidFill>
+                <a:latin typeface="Courier"/>
+              </a:rPr>
+              <a:t># We will learn these formally in the functions lecture</a:t>
+            </a:r>
+            <a:br/>
+            <a:r>
+              <a:rPr>
+                <a:solidFill>
+                  <a:srgbClr val="003B4F"/>
+                </a:solidFill>
+                <a:latin typeface="Courier"/>
+              </a:rPr>
+              <a:t>p_val &lt;- leaf_ttest_model</a:t>
+            </a:r>
+            <a:r>
+              <a:rPr>
+                <a:solidFill>
+                  <a:srgbClr val="5E5E5E"/>
+                </a:solidFill>
+                <a:latin typeface="Courier"/>
+              </a:rPr>
+              <a:t>$</a:t>
+            </a:r>
+            <a:r>
+              <a:rPr>
+                <a:solidFill>
+                  <a:srgbClr val="003B4F"/>
+                </a:solidFill>
+                <a:latin typeface="Courier"/>
+              </a:rPr>
+              <a:t>p.value</a:t>
+            </a:r>
+            <a:br/>
+            <a:r>
+              <a:rPr>
+                <a:solidFill>
+                  <a:srgbClr val="003B4F"/>
+                </a:solidFill>
+                <a:latin typeface="Courier"/>
+              </a:rPr>
+              <a:t>alpha &lt;- </a:t>
+            </a:r>
+            <a:r>
+              <a:rPr>
+                <a:solidFill>
+                  <a:srgbClr val="AD0000"/>
+                </a:solidFill>
+                <a:latin typeface="Courier"/>
+              </a:rPr>
+              <a:t>0.05</a:t>
+            </a:r>
+            <a:br/>
+            <a:br/>
+            <a:r>
+              <a:rPr b="1">
+                <a:solidFill>
+                  <a:srgbClr val="003B4F"/>
+                </a:solidFill>
+                <a:latin typeface="Courier"/>
+              </a:rPr>
+              <a:t>if</a:t>
+            </a:r>
+            <a:r>
+              <a:rPr>
+                <a:solidFill>
+                  <a:srgbClr val="003B4F"/>
+                </a:solidFill>
+                <a:latin typeface="Courier"/>
+              </a:rPr>
+              <a:t> (p_val </a:t>
+            </a:r>
+            <a:r>
+              <a:rPr>
+                <a:solidFill>
+                  <a:srgbClr val="5E5E5E"/>
+                </a:solidFill>
+                <a:latin typeface="Courier"/>
+              </a:rPr>
+              <a:t>&lt;</a:t>
+            </a:r>
+            <a:r>
+              <a:rPr>
+                <a:solidFill>
+                  <a:srgbClr val="003B4F"/>
+                </a:solidFill>
+                <a:latin typeface="Courier"/>
+              </a:rPr>
+              <a:t> alpha) {</a:t>
+            </a:r>
+            <a:br/>
+            <a:r>
+              <a:rPr>
+                <a:solidFill>
+                  <a:srgbClr val="003B4F"/>
+                </a:solidFill>
+                <a:latin typeface="Courier"/>
+              </a:rPr>
+              <a:t>  </a:t>
+            </a:r>
+            <a:r>
+              <a:rPr>
+                <a:solidFill>
+                  <a:srgbClr val="4758AB"/>
+                </a:solidFill>
+                <a:latin typeface="Courier"/>
+              </a:rPr>
+              <a:t>cat</a:t>
+            </a:r>
+            <a:r>
+              <a:rPr>
+                <a:solidFill>
+                  <a:srgbClr val="003B4F"/>
+                </a:solidFill>
+                <a:latin typeface="Courier"/>
+              </a:rPr>
+              <a:t>(</a:t>
+            </a:r>
+            <a:r>
+              <a:rPr>
+                <a:solidFill>
+                  <a:srgbClr val="20794D"/>
+                </a:solidFill>
+                <a:latin typeface="Courier"/>
+              </a:rPr>
+              <a:t>"p ="</a:t>
+            </a:r>
+            <a:r>
+              <a:rPr>
+                <a:solidFill>
+                  <a:srgbClr val="003B4F"/>
+                </a:solidFill>
+                <a:latin typeface="Courier"/>
+              </a:rPr>
+              <a:t>, </a:t>
+            </a:r>
+            <a:r>
+              <a:rPr>
+                <a:solidFill>
+                  <a:srgbClr val="4758AB"/>
+                </a:solidFill>
+                <a:latin typeface="Courier"/>
+              </a:rPr>
+              <a:t>signif</a:t>
+            </a:r>
+            <a:r>
+              <a:rPr>
+                <a:solidFill>
+                  <a:srgbClr val="003B4F"/>
+                </a:solidFill>
+                <a:latin typeface="Courier"/>
+              </a:rPr>
+              <a:t>(p_val, </a:t>
+            </a:r>
+            <a:r>
+              <a:rPr>
+                <a:solidFill>
+                  <a:srgbClr val="AD0000"/>
+                </a:solidFill>
+                <a:latin typeface="Courier"/>
+              </a:rPr>
+              <a:t>3</a:t>
+            </a:r>
+            <a:r>
+              <a:rPr>
+                <a:solidFill>
+                  <a:srgbClr val="003B4F"/>
+                </a:solidFill>
+                <a:latin typeface="Courier"/>
+              </a:rPr>
+              <a:t>), </a:t>
+            </a:r>
+            <a:r>
+              <a:rPr>
+                <a:solidFill>
+                  <a:srgbClr val="20794D"/>
+                </a:solidFill>
+                <a:latin typeface="Courier"/>
+              </a:rPr>
+              <a:t>"&lt; α ="</a:t>
+            </a:r>
+            <a:r>
+              <a:rPr>
+                <a:solidFill>
+                  <a:srgbClr val="003B4F"/>
+                </a:solidFill>
+                <a:latin typeface="Courier"/>
+              </a:rPr>
+              <a:t>, alpha, </a:t>
+            </a:r>
+            <a:r>
+              <a:rPr>
+                <a:solidFill>
+                  <a:srgbClr val="20794D"/>
+                </a:solidFill>
+                <a:latin typeface="Courier"/>
+              </a:rPr>
+              <a:t>"</a:t>
+            </a:r>
+            <a:r>
+              <a:rPr>
+                <a:solidFill>
+                  <a:srgbClr val="5E5E5E"/>
+                </a:solidFill>
+                <a:latin typeface="Courier"/>
+              </a:rPr>
+              <a:t>\n</a:t>
+            </a:r>
+            <a:r>
+              <a:rPr>
+                <a:solidFill>
+                  <a:srgbClr val="20794D"/>
+                </a:solidFill>
+                <a:latin typeface="Courier"/>
+              </a:rPr>
+              <a:t>"</a:t>
+            </a:r>
+            <a:r>
+              <a:rPr>
+                <a:solidFill>
+                  <a:srgbClr val="003B4F"/>
+                </a:solidFill>
+                <a:latin typeface="Courier"/>
+              </a:rPr>
+              <a:t>)</a:t>
+            </a:r>
+            <a:br/>
+            <a:r>
+              <a:rPr>
+                <a:solidFill>
+                  <a:srgbClr val="003B4F"/>
+                </a:solidFill>
+                <a:latin typeface="Courier"/>
+              </a:rPr>
+              <a:t>  </a:t>
+            </a:r>
+            <a:r>
+              <a:rPr>
+                <a:solidFill>
+                  <a:srgbClr val="4758AB"/>
+                </a:solidFill>
+                <a:latin typeface="Courier"/>
+              </a:rPr>
+              <a:t>cat</a:t>
+            </a:r>
+            <a:r>
+              <a:rPr>
+                <a:solidFill>
+                  <a:srgbClr val="003B4F"/>
+                </a:solidFill>
+                <a:latin typeface="Courier"/>
+              </a:rPr>
+              <a:t>(</a:t>
+            </a:r>
+            <a:r>
+              <a:rPr>
+                <a:solidFill>
+                  <a:srgbClr val="20794D"/>
+                </a:solidFill>
+                <a:latin typeface="Courier"/>
+              </a:rPr>
+              <a:t>"Decision: REJECT H₀</a:t>
+            </a:r>
+            <a:r>
+              <a:rPr>
+                <a:solidFill>
+                  <a:srgbClr val="5E5E5E"/>
+                </a:solidFill>
+                <a:latin typeface="Courier"/>
+              </a:rPr>
+              <a:t>\n</a:t>
+            </a:r>
+            <a:r>
+              <a:rPr>
+                <a:solidFill>
+                  <a:srgbClr val="20794D"/>
+                </a:solidFill>
+                <a:latin typeface="Courier"/>
+              </a:rPr>
+              <a:t>"</a:t>
+            </a:r>
+            <a:r>
+              <a:rPr>
+                <a:solidFill>
+                  <a:srgbClr val="003B4F"/>
+                </a:solidFill>
+                <a:latin typeface="Courier"/>
+              </a:rPr>
+              <a:t>)</a:t>
+            </a:r>
+            <a:br/>
+            <a:r>
+              <a:rPr>
+                <a:solidFill>
+                  <a:srgbClr val="003B4F"/>
+                </a:solidFill>
+                <a:latin typeface="Courier"/>
+              </a:rPr>
+              <a:t>  </a:t>
+            </a:r>
+            <a:r>
+              <a:rPr>
+                <a:solidFill>
+                  <a:srgbClr val="4758AB"/>
+                </a:solidFill>
+                <a:latin typeface="Courier"/>
+              </a:rPr>
+              <a:t>cat</a:t>
+            </a:r>
+            <a:r>
+              <a:rPr>
+                <a:solidFill>
+                  <a:srgbClr val="003B4F"/>
+                </a:solidFill>
+                <a:latin typeface="Courier"/>
+              </a:rPr>
+              <a:t>(</a:t>
+            </a:r>
+            <a:r>
+              <a:rPr>
+                <a:solidFill>
+                  <a:srgbClr val="20794D"/>
+                </a:solidFill>
+                <a:latin typeface="Courier"/>
+              </a:rPr>
+              <a:t>"Conclusion: leaf weight differs between sides.</a:t>
+            </a:r>
+            <a:r>
+              <a:rPr>
+                <a:solidFill>
+                  <a:srgbClr val="5E5E5E"/>
+                </a:solidFill>
+                <a:latin typeface="Courier"/>
+              </a:rPr>
+              <a:t>\n</a:t>
+            </a:r>
+            <a:r>
+              <a:rPr>
+                <a:solidFill>
+                  <a:srgbClr val="20794D"/>
+                </a:solidFill>
+                <a:latin typeface="Courier"/>
+              </a:rPr>
+              <a:t>"</a:t>
+            </a:r>
+            <a:r>
+              <a:rPr>
+                <a:solidFill>
+                  <a:srgbClr val="003B4F"/>
+                </a:solidFill>
+                <a:latin typeface="Courier"/>
+              </a:rPr>
+              <a:t>)</a:t>
+            </a:r>
+            <a:br/>
+            <a:r>
+              <a:rPr>
+                <a:solidFill>
+                  <a:srgbClr val="003B4F"/>
+                </a:solidFill>
+                <a:latin typeface="Courier"/>
+              </a:rPr>
+              <a:t>} </a:t>
+            </a:r>
+            <a:r>
+              <a:rPr b="1">
+                <a:solidFill>
+                  <a:srgbClr val="003B4F"/>
+                </a:solidFill>
+                <a:latin typeface="Courier"/>
+              </a:rPr>
+              <a:t>else</a:t>
+            </a:r>
+            <a:r>
+              <a:rPr>
+                <a:solidFill>
+                  <a:srgbClr val="003B4F"/>
+                </a:solidFill>
+                <a:latin typeface="Courier"/>
+              </a:rPr>
+              <a:t> {</a:t>
+            </a:r>
+            <a:br/>
+            <a:r>
+              <a:rPr>
+                <a:solidFill>
+                  <a:srgbClr val="003B4F"/>
+                </a:solidFill>
+                <a:latin typeface="Courier"/>
+              </a:rPr>
+              <a:t>  </a:t>
+            </a:r>
+            <a:r>
+              <a:rPr>
+                <a:solidFill>
+                  <a:srgbClr val="4758AB"/>
+                </a:solidFill>
+                <a:latin typeface="Courier"/>
+              </a:rPr>
+              <a:t>cat</a:t>
+            </a:r>
+            <a:r>
+              <a:rPr>
+                <a:solidFill>
+                  <a:srgbClr val="003B4F"/>
+                </a:solidFill>
+                <a:latin typeface="Courier"/>
+              </a:rPr>
+              <a:t>(</a:t>
+            </a:r>
+            <a:r>
+              <a:rPr>
+                <a:solidFill>
+                  <a:srgbClr val="20794D"/>
+                </a:solidFill>
+                <a:latin typeface="Courier"/>
+              </a:rPr>
+              <a:t>"p ="</a:t>
+            </a:r>
+            <a:r>
+              <a:rPr>
+                <a:solidFill>
+                  <a:srgbClr val="003B4F"/>
+                </a:solidFill>
+                <a:latin typeface="Courier"/>
+              </a:rPr>
+              <a:t>, </a:t>
+            </a:r>
+            <a:r>
+              <a:rPr>
+                <a:solidFill>
+                  <a:srgbClr val="4758AB"/>
+                </a:solidFill>
+                <a:latin typeface="Courier"/>
+              </a:rPr>
+              <a:t>signif</a:t>
+            </a:r>
+            <a:r>
+              <a:rPr>
+                <a:solidFill>
+                  <a:srgbClr val="003B4F"/>
+                </a:solidFill>
+                <a:latin typeface="Courier"/>
+              </a:rPr>
+              <a:t>(p_val, </a:t>
+            </a:r>
+            <a:r>
+              <a:rPr>
+                <a:solidFill>
+                  <a:srgbClr val="AD0000"/>
+                </a:solidFill>
+                <a:latin typeface="Courier"/>
+              </a:rPr>
+              <a:t>3</a:t>
+            </a:r>
+            <a:r>
+              <a:rPr>
+                <a:solidFill>
+                  <a:srgbClr val="003B4F"/>
+                </a:solidFill>
+                <a:latin typeface="Courier"/>
+              </a:rPr>
+              <a:t>), </a:t>
+            </a:r>
+            <a:r>
+              <a:rPr>
+                <a:solidFill>
+                  <a:srgbClr val="20794D"/>
+                </a:solidFill>
+                <a:latin typeface="Courier"/>
+              </a:rPr>
+              <a:t>"&gt;= α ="</a:t>
+            </a:r>
+            <a:r>
+              <a:rPr>
+                <a:solidFill>
+                  <a:srgbClr val="003B4F"/>
+                </a:solidFill>
+                <a:latin typeface="Courier"/>
+              </a:rPr>
+              <a:t>, alpha, </a:t>
+            </a:r>
+            <a:r>
+              <a:rPr>
+                <a:solidFill>
+                  <a:srgbClr val="20794D"/>
+                </a:solidFill>
+                <a:latin typeface="Courier"/>
+              </a:rPr>
+              <a:t>"</a:t>
+            </a:r>
+            <a:r>
+              <a:rPr>
+                <a:solidFill>
+                  <a:srgbClr val="5E5E5E"/>
+                </a:solidFill>
+                <a:latin typeface="Courier"/>
+              </a:rPr>
+              <a:t>\n</a:t>
+            </a:r>
+            <a:r>
+              <a:rPr>
+                <a:solidFill>
+                  <a:srgbClr val="20794D"/>
+                </a:solidFill>
+                <a:latin typeface="Courier"/>
+              </a:rPr>
+              <a:t>"</a:t>
+            </a:r>
+            <a:r>
+              <a:rPr>
+                <a:solidFill>
+                  <a:srgbClr val="003B4F"/>
+                </a:solidFill>
+                <a:latin typeface="Courier"/>
+              </a:rPr>
+              <a:t>)</a:t>
+            </a:r>
+            <a:br/>
+            <a:r>
+              <a:rPr>
+                <a:solidFill>
+                  <a:srgbClr val="003B4F"/>
+                </a:solidFill>
+                <a:latin typeface="Courier"/>
+              </a:rPr>
+              <a:t>  </a:t>
+            </a:r>
+            <a:r>
+              <a:rPr>
+                <a:solidFill>
+                  <a:srgbClr val="4758AB"/>
+                </a:solidFill>
+                <a:latin typeface="Courier"/>
+              </a:rPr>
+              <a:t>cat</a:t>
+            </a:r>
+            <a:r>
+              <a:rPr>
+                <a:solidFill>
+                  <a:srgbClr val="003B4F"/>
+                </a:solidFill>
+                <a:latin typeface="Courier"/>
+              </a:rPr>
+              <a:t>(</a:t>
+            </a:r>
+            <a:r>
+              <a:rPr>
+                <a:solidFill>
+                  <a:srgbClr val="20794D"/>
+                </a:solidFill>
+                <a:latin typeface="Courier"/>
+              </a:rPr>
+              <a:t>"Decision: FAIL TO REJECT H₀</a:t>
+            </a:r>
+            <a:r>
+              <a:rPr>
+                <a:solidFill>
+                  <a:srgbClr val="5E5E5E"/>
+                </a:solidFill>
+                <a:latin typeface="Courier"/>
+              </a:rPr>
+              <a:t>\n</a:t>
+            </a:r>
+            <a:r>
+              <a:rPr>
+                <a:solidFill>
+                  <a:srgbClr val="20794D"/>
+                </a:solidFill>
+                <a:latin typeface="Courier"/>
+              </a:rPr>
+              <a:t>"</a:t>
+            </a:r>
+            <a:r>
+              <a:rPr>
+                <a:solidFill>
+                  <a:srgbClr val="003B4F"/>
+                </a:solidFill>
+                <a:latin typeface="Courier"/>
+              </a:rPr>
+              <a:t>)</a:t>
+            </a:r>
+            <a:br/>
+            <a:r>
+              <a:rPr>
+                <a:solidFill>
+                  <a:srgbClr val="003B4F"/>
+                </a:solidFill>
+                <a:latin typeface="Courier"/>
+              </a:rPr>
+              <a:t>  </a:t>
+            </a:r>
+            <a:r>
+              <a:rPr>
+                <a:solidFill>
+                  <a:srgbClr val="4758AB"/>
+                </a:solidFill>
+                <a:latin typeface="Courier"/>
+              </a:rPr>
+              <a:t>cat</a:t>
+            </a:r>
+            <a:r>
+              <a:rPr>
+                <a:solidFill>
+                  <a:srgbClr val="003B4F"/>
+                </a:solidFill>
+                <a:latin typeface="Courier"/>
+              </a:rPr>
+              <a:t>(</a:t>
+            </a:r>
+            <a:r>
+              <a:rPr>
+                <a:solidFill>
+                  <a:srgbClr val="20794D"/>
+                </a:solidFill>
+                <a:latin typeface="Courier"/>
+              </a:rPr>
+              <a:t>"Conclusion: insufficient evidence of a difference.</a:t>
+            </a:r>
+            <a:r>
+              <a:rPr>
+                <a:solidFill>
+                  <a:srgbClr val="5E5E5E"/>
+                </a:solidFill>
+                <a:latin typeface="Courier"/>
+              </a:rPr>
+              <a:t>\n</a:t>
+            </a:r>
+            <a:r>
+              <a:rPr>
+                <a:solidFill>
+                  <a:srgbClr val="20794D"/>
+                </a:solidFill>
+                <a:latin typeface="Courier"/>
+              </a:rPr>
+              <a:t>"</a:t>
+            </a:r>
+            <a:r>
+              <a:rPr>
+                <a:solidFill>
+                  <a:srgbClr val="003B4F"/>
+                </a:solidFill>
+                <a:latin typeface="Courier"/>
+              </a:rPr>
+              <a:t>)</a:t>
+            </a:r>
+            <a:br/>
+            <a:r>
+              <a:rPr>
+                <a:solidFill>
+                  <a:srgbClr val="003B4F"/>
+                </a:solidFill>
+                <a:latin typeface="Courier"/>
+              </a:rPr>
+              <a:t>}</a:t>
+            </a:r>
+          </a:p>
+          <a:p>
+            <a:pPr lvl="0" indent="0">
+              <a:buNone/>
+            </a:pPr>
+            <a:r>
+              <a:rPr>
+                <a:latin typeface="Courier"/>
+              </a:rPr>
+              <a:t>p = 2.51e-08 &lt; α = 0.05 
+Decision: REJECT H₀
+Conclusion: leaf weight differs between sides.</a:t>
+            </a:r>
+          </a:p>
+        </p:txBody>
+      </p:sp>
+      <p:sp>
+        <p:nvSpPr>
+          <p:cNvPr id="4" name="Content Placeholder 3"/>
+          <p:cNvSpPr>
+            <a:spLocks noGrp="1"/>
+          </p:cNvSpPr>
+          <p:nvPr>
+            <p:ph idx="2" sz="half"/>
+          </p:nvPr>
+        </p:nvSpPr>
+        <p:spPr/>
+        <p:txBody>
+          <a:bodyPr/>
+          <a:lstStyle/>
+          <a:p>
+            <a:pPr lvl="0" indent="0" marL="1270000">
+              <a:buNone/>
+            </a:pPr>
+            <a:r>
+              <a:rPr sz="2000" b="1"/>
+              <a:t>Important</a:t>
+            </a:r>
+          </a:p>
+          <a:p>
+            <a:pPr lvl="0" indent="0" marL="1270000">
+              <a:buNone/>
+            </a:pPr>
+            <a:r>
+              <a:rPr sz="2000" b="1"/>
+              <a:t>What a small p-value means:</a:t>
+            </a:r>
+          </a:p>
+          <a:p>
+            <a:pPr lvl="0" indent="0" marL="1270000">
+              <a:buNone/>
+            </a:pPr>
+            <a:r>
+              <a:rPr sz="2000"/>
+              <a:t>If H₀ were true (no real difference), we would get a t-statistic this large or larger less than </a:t>
+            </a:r>
+            <a:r>
+              <a:rPr sz="2000">
+                <a:latin typeface="Courier"/>
+              </a:rPr>
+              <a:t>p</a:t>
+            </a:r>
+            <a:r>
+              <a:rPr sz="2000"/>
+              <a:t> × 100% of the time just by chance.</a:t>
+            </a:r>
+          </a:p>
+          <a:p>
+            <a:pPr lvl="0" indent="0" marL="1270000">
+              <a:buNone/>
+            </a:pPr>
+            <a:r>
+              <a:rPr sz="2000"/>
+              <a:t>We set α = 0.05 </a:t>
+            </a:r>
+            <a:r>
+              <a:rPr sz="2000" i="1"/>
+              <a:t>before</a:t>
+            </a:r>
+            <a:r>
+              <a:rPr sz="2000"/>
+              <a:t> the test. If </a:t>
+            </a:r>
+            <a:r>
+              <a:rPr sz="2000" i="1"/>
+              <a:t>p</a:t>
+            </a:r>
+            <a:r>
+              <a:rPr sz="2000"/>
+              <a:t> &lt; α, we reject H₀.</a:t>
+            </a:r>
+          </a:p>
+          <a:p>
+            <a:pPr lvl="0" indent="0" marL="0">
+              <a:buNone/>
+            </a:pPr>
+            <a:r>
+              <a:rPr b="1"/>
+              <a:t>What a small p-value does NOT mean:</a:t>
+            </a:r>
+          </a:p>
+          <a:p>
+            <a:pPr lvl="0"/>
+            <a:r>
+              <a:rPr/>
+              <a:t>It is not the probability that H₀ is true</a:t>
+            </a:r>
+          </a:p>
+          <a:p>
+            <a:pPr lvl="0"/>
+            <a:r>
+              <a:rPr/>
+              <a:t>Statistical significance ≠ biological importance</a:t>
+            </a:r>
+          </a:p>
+          <a:p>
+            <a:pPr lvl="0"/>
+            <a:r>
+              <a:rPr/>
+              <a:t>Report the effect size (difference in means) alongside </a:t>
+            </a:r>
+            <a:r>
+              <a:rPr i="1"/>
+              <a:t>p</a:t>
+            </a:r>
+          </a:p>
+        </p:txBody>
+      </p:sp>
+    </p:spTree>
+  </p:cSld>
+</p:sld>
+</file>
+
+<file path=ppt/slides/slide31.xml><?xml version="1.0" encoding="utf-8"?>
 <p:sld xmlns:a="http://schemas.openxmlformats.org/drawingml/2006/main" xmlns:r="http://schemas.openxmlformats.org/officeDocument/2006/relationships" xmlns:p="http://schemas.openxmlformats.org/presentationml/2006/main">
   <p:cSld>
     <p:spTree>
@@ -11168,7 +14228,7 @@
             </a:pPr>
             <a:r>
               <a:rPr/>
-              <a:t>Where we left off (Lecture 03)</a:t>
+              <a:t>🛑 Pause — Do Activity Parts 8–11 Now</a:t>
             </a:r>
           </a:p>
         </p:txBody>
@@ -11188,190 +14248,12 @@
           <a:bodyPr/>
           <a:lstStyle/>
           <a:p>
-            <a:pPr lvl="0"/>
-            <a:r>
-              <a:rPr b="1"/>
-              <a:t>Wrangling</a:t>
-            </a:r>
+            <a:pPr lvl="0" indent="0" marL="0">
+              <a:buNone/>
+            </a:pPr>
             <a:r>
               <a:rPr/>
-              <a:t> — </a:t>
-            </a:r>
-            <a:r>
-              <a:rPr>
-                <a:latin typeface="Courier"/>
-              </a:rPr>
-              <a:t>filter()</a:t>
-            </a:r>
-            <a:r>
-              <a:rPr/>
-              <a:t>, </a:t>
-            </a:r>
-            <a:r>
-              <a:rPr>
-                <a:latin typeface="Courier"/>
-              </a:rPr>
-              <a:t>select()</a:t>
-            </a:r>
-            <a:r>
-              <a:rPr/>
-              <a:t>, </a:t>
-            </a:r>
-            <a:r>
-              <a:rPr>
-                <a:latin typeface="Courier"/>
-              </a:rPr>
-              <a:t>mutate()</a:t>
-            </a:r>
-            <a:r>
-              <a:rPr/>
-              <a:t>, </a:t>
-            </a:r>
-            <a:r>
-              <a:rPr>
-                <a:latin typeface="Courier"/>
-              </a:rPr>
-              <a:t>arrange()</a:t>
-            </a:r>
-            <a:r>
-              <a:rPr/>
-              <a:t> as the core tidyverse verbs</a:t>
-            </a:r>
-          </a:p>
-          <a:p>
-            <a:pPr lvl="0"/>
-            <a:r>
-              <a:rPr b="1"/>
-              <a:t>Descriptive stats</a:t>
-            </a:r>
-            <a:r>
-              <a:rPr/>
-              <a:t> — mean, median, SD, SE with </a:t>
-            </a:r>
-            <a:r>
-              <a:rPr>
-                <a:latin typeface="Courier"/>
-              </a:rPr>
-              <a:t>group_by()</a:t>
-            </a:r>
-            <a:r>
-              <a:rPr/>
-              <a:t> + </a:t>
-            </a:r>
-            <a:r>
-              <a:rPr>
-                <a:latin typeface="Courier"/>
-              </a:rPr>
-              <a:t>summarize()</a:t>
-            </a:r>
-          </a:p>
-          <a:p>
-            <a:pPr lvl="0"/>
-            <a:r>
-              <a:rPr b="1"/>
-              <a:t>NA handling</a:t>
-            </a:r>
-            <a:r>
-              <a:rPr/>
-              <a:t> — </a:t>
-            </a:r>
-            <a:r>
-              <a:rPr>
-                <a:latin typeface="Courier"/>
-              </a:rPr>
-              <a:t>sum(!is.na())</a:t>
-            </a:r>
-            <a:r>
-              <a:rPr/>
-              <a:t> is the safe way to count </a:t>
-            </a:r>
-            <a:r>
-              <a:rPr i="1"/>
-              <a:t>n</a:t>
-            </a:r>
-          </a:p>
-          <a:p>
-            <a:pPr lvl="0"/>
-            <a:r>
-              <a:rPr b="1">
-                <a:latin typeface="Courier"/>
-              </a:rPr>
-              <a:t>skimr</a:t>
-            </a:r>
-            <a:r>
-              <a:rPr/>
-              <a:t> — fast full-dataset overview in one line</a:t>
-            </a:r>
-          </a:p>
-          <a:p>
-            <a:pPr lvl="0"/>
-            <a:r>
-              <a:rPr b="1"/>
-              <a:t>Boxplot</a:t>
-            </a:r>
-            <a:r>
-              <a:rPr/>
-              <a:t> + jittered points; </a:t>
-            </a:r>
-            <a:r>
-              <a:rPr b="1"/>
-              <a:t>mean ± SE</a:t>
-            </a:r>
-            <a:r>
-              <a:rPr/>
-              <a:t> with </a:t>
-            </a:r>
-            <a:r>
-              <a:rPr>
-                <a:latin typeface="Courier"/>
-              </a:rPr>
-              <a:t>stat_summary()</a:t>
-            </a:r>
-          </a:p>
-          <a:p>
-            <a:pPr lvl="0"/>
-            <a:r>
-              <a:rPr b="1"/>
-              <a:t>Finding:</a:t>
-            </a:r>
-            <a:r>
-              <a:rPr/>
-              <a:t> shady leaves appear heavier, taller, and wider than sunny leaves</a:t>
-            </a:r>
-          </a:p>
-          <a:p>
-            <a:pPr lvl="0" indent="0" marL="1270000">
-              <a:buNone/>
-            </a:pPr>
-            <a:r>
-              <a:rPr sz="2000" b="1"/>
-              <a:t>Note</a:t>
-            </a:r>
-          </a:p>
-          <a:p>
-            <a:pPr lvl="0" indent="0" marL="1270000">
-              <a:buNone/>
-            </a:pPr>
-            <a:r>
-              <a:rPr sz="2000" b="1"/>
-              <a:t>✅ Key idea from Lecture 03</a:t>
-            </a:r>
-          </a:p>
-          <a:p>
-            <a:pPr lvl="0" indent="0" marL="1270000">
-              <a:buNone/>
-            </a:pPr>
-            <a:r>
-              <a:rPr sz="2000"/>
-              <a:t>We described the pattern in our data. Today we formally test whether that pattern is </a:t>
-            </a:r>
-            <a:r>
-              <a:rPr sz="2000" i="1"/>
-              <a:t>statistically significant</a:t>
-            </a:r>
-            <a:r>
-              <a:rPr sz="2000"/>
-              <a:t>.</a:t>
+              <a:t>Run the test, decode t / df / p / CI, reproduce t by hand, and state your decision in formal language. Predict the p-value first.</a:t>
             </a:r>
           </a:p>
         </p:txBody>
@@ -11381,7 +14263,110 @@
 </p:sld>
 </file>
 
-<file path=ppt/slides/slide20.xml><?xml version="1.0" encoding="utf-8"?>
+<file path=ppt/slides/slide32.xml><?xml version="1.0" encoding="utf-8"?>
+<p:sld xmlns:a="http://schemas.openxmlformats.org/drawingml/2006/main" xmlns:r="http://schemas.openxmlformats.org/officeDocument/2006/relationships" xmlns:p="http://schemas.openxmlformats.org/presentationml/2006/main">
+  <p:cSld>
+    <p:spTree>
+      <p:nvGrpSpPr>
+        <p:cNvPr id="1" name=""/>
+        <p:cNvGrpSpPr/>
+        <p:nvPr/>
+      </p:nvGrpSpPr>
+      <p:grpSpPr>
+        <a:xfrm>
+          <a:off x="0" y="0"/>
+          <a:ext cx="0" cy="0"/>
+          <a:chOff x="0" y="0"/>
+          <a:chExt cx="0" cy="0"/>
+        </a:xfrm>
+      </p:grpSpPr>
+      <p:sp>
+        <p:nvSpPr>
+          <p:cNvPr id="2" name="Title 1"/>
+          <p:cNvSpPr>
+            <a:spLocks noGrp="1"/>
+          </p:cNvSpPr>
+          <p:nvPr>
+            <p:ph type="title"/>
+          </p:nvPr>
+        </p:nvSpPr>
+        <p:spPr>
+          <a:xfrm>
+            <a:off x="0" y="0"/>
+            <a:ext cx="9144000" cy="582780"/>
+          </a:xfrm>
+        </p:spPr>
+        <p:txBody>
+          <a:bodyPr/>
+          <a:lstStyle/>
+          <a:p>
+            <a:pPr lvl="0" indent="0" marL="0">
+              <a:buNone/>
+            </a:pPr>
+            <a:r>
+              <a:rPr/>
+              <a:t>🧩 Chunk 4 of 4 · Visualize &amp; Report</a:t>
+            </a:r>
+          </a:p>
+        </p:txBody>
+      </p:sp>
+      <p:sp>
+        <p:nvSpPr>
+          <p:cNvPr id="3" name="Content Placeholder 2"/>
+          <p:cNvSpPr>
+            <a:spLocks noGrp="1"/>
+          </p:cNvSpPr>
+          <p:nvPr>
+            <p:ph idx="1"/>
+          </p:nvPr>
+        </p:nvSpPr>
+        <p:spPr/>
+        <p:txBody>
+          <a:bodyPr/>
+          <a:lstStyle/>
+          <a:p>
+            <a:pPr lvl="0" indent="0" marL="0">
+              <a:buNone/>
+            </a:pPr>
+            <a:r>
+              <a:rPr b="1"/>
+              <a:t>We will cover:</a:t>
+            </a:r>
+            <a:r>
+              <a:rPr/>
+              <a:t> embedding the test result in a boxplot and a mean ± SE plot, writing a scientific results sentence, and saving publication-quality figures.</a:t>
+            </a:r>
+          </a:p>
+          <a:p>
+            <a:pPr lvl="0" indent="0" marL="1270000">
+              <a:buNone/>
+            </a:pPr>
+            <a:r>
+              <a:rPr sz="2000" b="1"/>
+              <a:t>Tip</a:t>
+            </a:r>
+          </a:p>
+          <a:p>
+            <a:pPr lvl="0" indent="0" marL="1270000">
+              <a:buNone/>
+            </a:pPr>
+            <a:r>
+              <a:rPr sz="2000" b="1"/>
+              <a:t>🖐 After this chunk: Activity Parts 12–13</a:t>
+            </a:r>
+            <a:r>
+              <a:rPr sz="2000"/>
+              <a:t> (plots and the results sentence).</a:t>
+            </a:r>
+          </a:p>
+        </p:txBody>
+      </p:sp>
+    </p:spTree>
+  </p:cSld>
+</p:sld>
+</file>
+
+<file path=ppt/slides/slide33.xml><?xml version="1.0" encoding="utf-8"?>
 <p:sld xmlns:a="http://schemas.openxmlformats.org/drawingml/2006/main" xmlns:r="http://schemas.openxmlformats.org/officeDocument/2006/relationships" xmlns:p="http://schemas.openxmlformats.org/presentationml/2006/main">
   <p:cSld>
     <p:spTree>
@@ -12575,7 +15560,7 @@
 </p:sld>
 </file>
 
-<file path=ppt/slides/slide21.xml><?xml version="1.0" encoding="utf-8"?>
+<file path=ppt/slides/slide34.xml><?xml version="1.0" encoding="utf-8"?>
 <p:sld xmlns:a="http://schemas.openxmlformats.org/drawingml/2006/main" xmlns:r="http://schemas.openxmlformats.org/officeDocument/2006/relationships" xmlns:p="http://schemas.openxmlformats.org/presentationml/2006/main">
   <p:cSld>
     <p:spTree>
@@ -14021,7 +17006,7 @@
 </p:sld>
 </file>
 
-<file path=ppt/slides/slide22.xml><?xml version="1.0" encoding="utf-8"?>
+<file path=ppt/slides/slide35.xml><?xml version="1.0" encoding="utf-8"?>
 <p:sld xmlns:a="http://schemas.openxmlformats.org/drawingml/2006/main" xmlns:r="http://schemas.openxmlformats.org/officeDocument/2006/relationships" xmlns:p="http://schemas.openxmlformats.org/presentationml/2006/main">
   <p:cSld>
     <p:spTree>
@@ -15403,7 +18388,7 @@
 </p:sld>
 </file>
 
-<file path=ppt/slides/slide23.xml><?xml version="1.0" encoding="utf-8"?>
+<file path=ppt/slides/slide36.xml><?xml version="1.0" encoding="utf-8"?>
 <p:sld xmlns:a="http://schemas.openxmlformats.org/drawingml/2006/main" xmlns:r="http://schemas.openxmlformats.org/officeDocument/2006/relationships" xmlns:p="http://schemas.openxmlformats.org/presentationml/2006/main">
   <p:cSld>
     <p:spTree>
@@ -16006,7 +18991,7 @@
 </p:sld>
 </file>
 
-<file path=ppt/slides/slide24.xml><?xml version="1.0" encoding="utf-8"?>
+<file path=ppt/slides/slide37.xml><?xml version="1.0" encoding="utf-8"?>
 <p:sld xmlns:a="http://schemas.openxmlformats.org/drawingml/2006/main" xmlns:r="http://schemas.openxmlformats.org/officeDocument/2006/relationships" xmlns:p="http://schemas.openxmlformats.org/presentationml/2006/main">
   <p:cSld>
     <p:spTree>
@@ -16103,7 +19088,84 @@
 </p:sld>
 </file>
 
-<file path=ppt/slides/slide25.xml><?xml version="1.0" encoding="utf-8"?>
+<file path=ppt/slides/slide38.xml><?xml version="1.0" encoding="utf-8"?>
+<p:sld xmlns:a="http://schemas.openxmlformats.org/drawingml/2006/main" xmlns:r="http://schemas.openxmlformats.org/officeDocument/2006/relationships" xmlns:p="http://schemas.openxmlformats.org/presentationml/2006/main">
+  <p:cSld>
+    <p:spTree>
+      <p:nvGrpSpPr>
+        <p:cNvPr id="1" name=""/>
+        <p:cNvGrpSpPr/>
+        <p:nvPr/>
+      </p:nvGrpSpPr>
+      <p:grpSpPr>
+        <a:xfrm>
+          <a:off x="0" y="0"/>
+          <a:ext cx="0" cy="0"/>
+          <a:chOff x="0" y="0"/>
+          <a:chExt cx="0" cy="0"/>
+        </a:xfrm>
+      </p:grpSpPr>
+      <p:sp>
+        <p:nvSpPr>
+          <p:cNvPr id="2" name="Title 1"/>
+          <p:cNvSpPr>
+            <a:spLocks noGrp="1"/>
+          </p:cNvSpPr>
+          <p:nvPr>
+            <p:ph type="title"/>
+          </p:nvPr>
+        </p:nvSpPr>
+        <p:spPr>
+          <a:xfrm>
+            <a:off x="0" y="0"/>
+            <a:ext cx="9144000" cy="582780"/>
+          </a:xfrm>
+        </p:spPr>
+        <p:txBody>
+          <a:bodyPr/>
+          <a:lstStyle/>
+          <a:p>
+            <a:pPr lvl="0" indent="0" marL="0">
+              <a:buNone/>
+            </a:pPr>
+            <a:r>
+              <a:rPr/>
+              <a:t>🛑 Pause — Do Activity Parts 12–13 Now</a:t>
+            </a:r>
+          </a:p>
+        </p:txBody>
+      </p:sp>
+      <p:sp>
+        <p:nvSpPr>
+          <p:cNvPr id="3" name="Content Placeholder 2"/>
+          <p:cNvSpPr>
+            <a:spLocks noGrp="1"/>
+          </p:cNvSpPr>
+          <p:nvPr>
+            <p:ph idx="1"/>
+          </p:nvPr>
+        </p:nvSpPr>
+        <p:spPr/>
+        <p:txBody>
+          <a:bodyPr/>
+          <a:lstStyle/>
+          <a:p>
+            <a:pPr lvl="0" indent="0" marL="0">
+              <a:buNone/>
+            </a:pPr>
+            <a:r>
+              <a:rPr/>
+              <a:t>Build both figures with the statistics embedded in the subtitle, then write your results sentence. Predict what the subtitle will say before you run it.</a:t>
+            </a:r>
+          </a:p>
+        </p:txBody>
+      </p:sp>
+    </p:spTree>
+  </p:cSld>
+</p:sld>
+</file>
+
+<file path=ppt/slides/slide39.xml><?xml version="1.0" encoding="utf-8"?>
 <p:sld xmlns:a="http://schemas.openxmlformats.org/drawingml/2006/main" xmlns:r="http://schemas.openxmlformats.org/officeDocument/2006/relationships" xmlns:p="http://schemas.openxmlformats.org/presentationml/2006/main">
   <p:cSld>
     <p:spTree>
@@ -16451,302 +19513,6 @@
             <a:r>
               <a:rPr/>
               <a:t>R², residuals, and assumption checking</a:t>
-            </a:r>
-          </a:p>
-        </p:txBody>
-      </p:sp>
-    </p:spTree>
-  </p:cSld>
-</p:sld>
-</file>
-
-<file path=ppt/slides/slide3.xml><?xml version="1.0" encoding="utf-8"?>
-<p:sld xmlns:a="http://schemas.openxmlformats.org/drawingml/2006/main" xmlns:r="http://schemas.openxmlformats.org/officeDocument/2006/relationships" xmlns:p="http://schemas.openxmlformats.org/presentationml/2006/main">
-  <p:cSld>
-    <p:spTree>
-      <p:nvGrpSpPr>
-        <p:cNvPr id="1" name=""/>
-        <p:cNvGrpSpPr/>
-        <p:nvPr/>
-      </p:nvGrpSpPr>
-      <p:grpSpPr>
-        <a:xfrm>
-          <a:off x="0" y="0"/>
-          <a:ext cx="0" cy="0"/>
-          <a:chOff x="0" y="0"/>
-          <a:chExt cx="0" cy="0"/>
-        </a:xfrm>
-      </p:grpSpPr>
-      <p:sp>
-        <p:nvSpPr>
-          <p:cNvPr id="2" name="Title 1"/>
-          <p:cNvSpPr>
-            <a:spLocks noGrp="1"/>
-          </p:cNvSpPr>
-          <p:nvPr>
-            <p:ph type="title"/>
-          </p:nvPr>
-        </p:nvSpPr>
-        <p:spPr>
-          <a:xfrm>
-            <a:off x="0" y="0"/>
-            <a:ext cx="9144000" cy="602780"/>
-          </a:xfrm>
-          <a:solidFill>
-            <a:srgbClr val="1A1A2E"/>
-          </a:solidFill>
-        </p:spPr>
-        <p:txBody>
-          <a:bodyPr/>
-          <a:lstStyle/>
-          <a:p>
-            <a:pPr lvl="0" indent="0" marL="0">
-              <a:buNone/>
-            </a:pPr>
-            <a:r>
-              <a:rPr/>
-              <a:t>Goals for Today</a:t>
-            </a:r>
-          </a:p>
-        </p:txBody>
-      </p:sp>
-      <p:sp>
-        <p:nvSpPr>
-          <p:cNvPr id="3" name="Content Placeholder 2"/>
-          <p:cNvSpPr>
-            <a:spLocks noGrp="1"/>
-          </p:cNvSpPr>
-          <p:nvPr>
-            <p:ph idx="1" sz="half"/>
-          </p:nvPr>
-        </p:nvSpPr>
-        <p:spPr/>
-        <p:txBody>
-          <a:bodyPr/>
-          <a:lstStyle/>
-          <a:p>
-            <a:pPr lvl="0"/>
-            <a:r>
-              <a:rPr b="1"/>
-              <a:t>Understand</a:t>
-            </a:r>
-            <a:r>
-              <a:rPr/>
-              <a:t> why comparing means is not enough — we need a test</a:t>
-            </a:r>
-          </a:p>
-          <a:p>
-            <a:pPr lvl="0"/>
-            <a:r>
-              <a:rPr b="1"/>
-              <a:t>State</a:t>
-            </a:r>
-            <a:r>
-              <a:rPr/>
-              <a:t> null and alternate hypotheses formally</a:t>
-            </a:r>
-          </a:p>
-          <a:p>
-            <a:pPr lvl="0"/>
-            <a:r>
-              <a:rPr b="1"/>
-              <a:t>Check assumptions</a:t>
-            </a:r>
-            <a:r>
-              <a:rPr/>
-              <a:t> before running any test</a:t>
-            </a:r>
-          </a:p>
-          <a:p>
-            <a:pPr lvl="1"/>
-            <a:r>
-              <a:rPr/>
-              <a:t>normality: histogram, QQ plot, Shapiro-Wilk</a:t>
-            </a:r>
-          </a:p>
-          <a:p>
-            <a:pPr lvl="1"/>
-            <a:r>
-              <a:rPr/>
-              <a:t>variance: Levene’s test</a:t>
-            </a:r>
-          </a:p>
-          <a:p>
-            <a:pPr lvl="0"/>
-            <a:r>
-              <a:rPr b="1"/>
-              <a:t>Run</a:t>
-            </a:r>
-            <a:r>
-              <a:rPr/>
-              <a:t> Welch’s two-sample t-test in R</a:t>
-            </a:r>
-          </a:p>
-          <a:p>
-            <a:pPr lvl="0"/>
-            <a:r>
-              <a:rPr b="1"/>
-              <a:t>Read</a:t>
-            </a:r>
-            <a:r>
-              <a:rPr/>
-              <a:t> every line of the </a:t>
-            </a:r>
-            <a:r>
-              <a:rPr>
-                <a:latin typeface="Courier"/>
-              </a:rPr>
-              <a:t>t.test()</a:t>
-            </a:r>
-            <a:r>
-              <a:rPr/>
-              <a:t> output</a:t>
-            </a:r>
-          </a:p>
-          <a:p>
-            <a:pPr lvl="0"/>
-            <a:r>
-              <a:rPr b="1"/>
-              <a:t>Report</a:t>
-            </a:r>
-            <a:r>
-              <a:rPr/>
-              <a:t> results in scientific writing format</a:t>
-            </a:r>
-          </a:p>
-          <a:p>
-            <a:pPr lvl="0" indent="0" marL="1270000">
-              <a:buNone/>
-            </a:pPr>
-            <a:r>
-              <a:rPr sz="2000" b="1"/>
-              <a:t>Tip</a:t>
-            </a:r>
-          </a:p>
-          <a:p>
-            <a:pPr lvl="0" indent="0" marL="1270000">
-              <a:buNone/>
-            </a:pPr>
-            <a:r>
-              <a:rPr sz="2000" b="1"/>
-              <a:t>🖐 Try it yourself</a:t>
-            </a:r>
-          </a:p>
-          <a:p>
-            <a:pPr lvl="0" indent="0" marL="1270000">
-              <a:buNone/>
-            </a:pPr>
-            <a:r>
-              <a:rPr sz="2000"/>
-              <a:t>By the end you will run and interpret a complete t-test on our leaf data.</a:t>
-            </a:r>
-          </a:p>
-        </p:txBody>
-      </p:sp>
-      <p:sp>
-        <p:nvSpPr>
-          <p:cNvPr id="4" name="Content Placeholder 3"/>
-          <p:cNvSpPr>
-            <a:spLocks noGrp="1"/>
-          </p:cNvSpPr>
-          <p:nvPr>
-            <p:ph idx="2" sz="half"/>
-          </p:nvPr>
-        </p:nvSpPr>
-        <p:spPr/>
-        <p:txBody>
-          <a:bodyPr/>
-          <a:lstStyle/>
-          <a:p>
-            <a:pPr lvl="0" indent="0" marL="0">
-              <a:buNone/>
-            </a:pPr>
-            <a:r>
-              <a:rPr b="1"/>
-              <a:t>Tools added today:</a:t>
-            </a:r>
-          </a:p>
-          <a:p>
-            <a:pPr lvl="0"/>
-            <a:r>
-              <a:rPr>
-                <a:latin typeface="Courier"/>
-              </a:rPr>
-              <a:t>car</a:t>
-            </a:r>
-            <a:r>
-              <a:rPr/>
-              <a:t> — Levene’s variance test</a:t>
-            </a:r>
-          </a:p>
-          <a:p>
-            <a:pPr lvl="0" indent="0" marL="0">
-              <a:buNone/>
-            </a:pPr>
-            <a:r>
-              <a:rPr b="1"/>
-              <a:t>References:</a:t>
-            </a:r>
-          </a:p>
-          <a:p>
-            <a:pPr lvl="0"/>
-            <a:r>
-              <a:rPr/>
-              <a:t>📖 </a:t>
-            </a:r>
-            <a:r>
-              <a:rPr>
-                <a:hlinkClick r:id="rId2"/>
-              </a:rPr>
-              <a:t>R4DS §3</a:t>
-            </a:r>
-          </a:p>
-          <a:p>
-            <a:pPr lvl="0"/>
-            <a:r>
-              <a:rPr/>
-              <a:t>🌐 </a:t>
-            </a:r>
-            <a:r>
-              <a:rPr>
-                <a:hlinkClick r:id="rId3"/>
-              </a:rPr>
-              <a:t>Data Carpentry</a:t>
-            </a:r>
-          </a:p>
-          <a:p>
-            <a:pPr lvl="0" indent="0" marL="0">
-              <a:buNone/>
-            </a:pPr>
-            <a:r>
-              <a:rPr b="1"/>
-              <a:t>Today’s naming:</a:t>
-            </a:r>
-          </a:p>
-          <a:p>
-            <a:pPr lvl="0"/>
-            <a:r>
-              <a:rPr/>
-              <a:t>test objects → </a:t>
-            </a:r>
-            <a:r>
-              <a:rPr>
-                <a:latin typeface="Courier"/>
-              </a:rPr>
-              <a:t>_model</a:t>
-            </a:r>
-          </a:p>
-          <a:p>
-            <a:pPr lvl="0"/>
-            <a:r>
-              <a:rPr/>
-              <a:t>plots → </a:t>
-            </a:r>
-            <a:r>
-              <a:rPr>
-                <a:latin typeface="Courier"/>
-              </a:rPr>
-              <a:t>_plot</a:t>
             </a:r>
           </a:p>
         </p:txBody>
@@ -16789,8 +19555,11 @@
         <p:spPr>
           <a:xfrm>
             <a:off x="0" y="0"/>
-            <a:ext cx="9144000" cy="582780"/>
+            <a:ext cx="9144000" cy="602780"/>
           </a:xfrm>
+          <a:solidFill>
+            <a:srgbClr val="1A1A2E"/>
+          </a:solidFill>
         </p:spPr>
         <p:txBody>
           <a:bodyPr/>
@@ -16801,7 +19570,7 @@
             </a:pPr>
             <a:r>
               <a:rPr/>
-              <a:t>Load Libraries and Data</a:t>
+              <a:t>How to Use These Slides — Predict · Type · Run</a:t>
             </a:r>
           </a:p>
         </p:txBody>
@@ -16813,7 +19582,7 @@
             <a:spLocks noGrp="1"/>
           </p:cNvSpPr>
           <p:nvPr>
-            <p:ph idx="1"/>
+            <p:ph idx="1" sz="half"/>
           </p:nvPr>
         </p:nvSpPr>
         <p:spPr/>
@@ -16821,191 +19590,94 @@
           <a:bodyPr/>
           <a:lstStyle/>
           <a:p>
-            <a:pPr lvl="0" indent="0">
+            <a:pPr lvl="0" indent="0" marL="0">
               <a:buNone/>
             </a:pPr>
             <a:r>
-              <a:rPr>
-                <a:solidFill>
-                  <a:srgbClr val="5E5E5E"/>
-                </a:solidFill>
-                <a:latin typeface="Courier"/>
-              </a:rPr>
-              <a:t># Load all packages at the top ----------------------------</a:t>
-            </a:r>
-            <a:br/>
-            <a:r>
-              <a:rPr>
-                <a:solidFill>
-                  <a:srgbClr val="4758AB"/>
-                </a:solidFill>
-                <a:latin typeface="Courier"/>
-              </a:rPr>
-              <a:t>library</a:t>
-            </a:r>
-            <a:r>
-              <a:rPr>
-                <a:solidFill>
-                  <a:srgbClr val="003B4F"/>
-                </a:solidFill>
-                <a:latin typeface="Courier"/>
-              </a:rPr>
-              <a:t>(readxl) </a:t>
-            </a:r>
-            <a:r>
-              <a:rPr>
-                <a:solidFill>
-                  <a:srgbClr val="5E5E5E"/>
-                </a:solidFill>
-                <a:latin typeface="Courier"/>
-              </a:rPr>
-              <a:t># reading Excel files</a:t>
-            </a:r>
-            <a:br/>
-            <a:r>
-              <a:rPr>
-                <a:solidFill>
-                  <a:srgbClr val="4758AB"/>
-                </a:solidFill>
-                <a:latin typeface="Courier"/>
-              </a:rPr>
-              <a:t>library</a:t>
-            </a:r>
-            <a:r>
-              <a:rPr>
-                <a:solidFill>
-                  <a:srgbClr val="003B4F"/>
-                </a:solidFill>
-                <a:latin typeface="Courier"/>
-              </a:rPr>
-              <a:t>(tidyverse) </a:t>
-            </a:r>
-            <a:r>
-              <a:rPr>
-                <a:solidFill>
-                  <a:srgbClr val="5E5E5E"/>
-                </a:solidFill>
-                <a:latin typeface="Courier"/>
-              </a:rPr>
-              <a:t># data manipulation + ggplot2</a:t>
-            </a:r>
-            <a:br/>
-            <a:r>
-              <a:rPr>
-                <a:solidFill>
-                  <a:srgbClr val="4758AB"/>
-                </a:solidFill>
-                <a:latin typeface="Courier"/>
-              </a:rPr>
-              <a:t>library</a:t>
-            </a:r>
-            <a:r>
-              <a:rPr>
-                <a:solidFill>
-                  <a:srgbClr val="003B4F"/>
-                </a:solidFill>
-                <a:latin typeface="Courier"/>
-              </a:rPr>
-              <a:t>(skimr) </a:t>
-            </a:r>
-            <a:r>
-              <a:rPr>
-                <a:solidFill>
-                  <a:srgbClr val="5E5E5E"/>
-                </a:solidFill>
-                <a:latin typeface="Courier"/>
-              </a:rPr>
-              <a:t># fast summaries</a:t>
-            </a:r>
-            <a:br/>
-            <a:r>
-              <a:rPr>
-                <a:solidFill>
-                  <a:srgbClr val="4758AB"/>
-                </a:solidFill>
-                <a:latin typeface="Courier"/>
-              </a:rPr>
-              <a:t>library</a:t>
-            </a:r>
-            <a:r>
-              <a:rPr>
-                <a:solidFill>
-                  <a:srgbClr val="003B4F"/>
-                </a:solidFill>
-                <a:latin typeface="Courier"/>
-              </a:rPr>
-              <a:t>(car) </a:t>
-            </a:r>
-            <a:r>
-              <a:rPr>
-                <a:solidFill>
-                  <a:srgbClr val="5E5E5E"/>
-                </a:solidFill>
-                <a:latin typeface="Courier"/>
-              </a:rPr>
-              <a:t># Levene's test for variance equality</a:t>
-            </a:r>
-          </a:p>
-          <a:p>
-            <a:pPr lvl="0" indent="0">
+              <a:rPr/>
+              <a:t>This lecture runs in </a:t>
+            </a:r>
+            <a:r>
+              <a:rPr b="1"/>
+              <a:t>four short chunks</a:t>
+            </a:r>
+            <a:r>
+              <a:rPr/>
+              <a:t>. After each chunk you switch to the </a:t>
+            </a:r>
+            <a:r>
+              <a:rPr b="1"/>
+              <a:t>activity worksheet</a:t>
+            </a:r>
+            <a:r>
+              <a:rPr/>
+              <a:t> and type the code yourself.</a:t>
+            </a:r>
+          </a:p>
+          <a:p>
+            <a:pPr lvl="0" indent="0" marL="0">
               <a:buNone/>
             </a:pPr>
             <a:r>
-              <a:rPr>
-                <a:solidFill>
-                  <a:srgbClr val="5E5E5E"/>
-                </a:solidFill>
-                <a:latin typeface="Courier"/>
-              </a:rPr>
-              <a:t># Load the leaf data from the data folder -----------------</a:t>
-            </a:r>
-            <a:br/>
-            <a:r>
-              <a:rPr>
-                <a:solidFill>
-                  <a:srgbClr val="003B4F"/>
-                </a:solidFill>
-                <a:latin typeface="Courier"/>
-              </a:rPr>
-              <a:t>tree_df &lt;- </a:t>
-            </a:r>
-            <a:r>
-              <a:rPr>
-                <a:solidFill>
-                  <a:srgbClr val="4758AB"/>
-                </a:solidFill>
-                <a:latin typeface="Courier"/>
-              </a:rPr>
-              <a:t>read_excel</a:t>
-            </a:r>
-            <a:r>
-              <a:rPr>
-                <a:solidFill>
-                  <a:srgbClr val="003B4F"/>
-                </a:solidFill>
-                <a:latin typeface="Courier"/>
-              </a:rPr>
-              <a:t>(</a:t>
-            </a:r>
-            <a:r>
-              <a:rPr>
-                <a:solidFill>
-                  <a:srgbClr val="20794D"/>
-                </a:solidFill>
-                <a:latin typeface="Courier"/>
-              </a:rPr>
-              <a:t>"data/2026_06_25_tree_experiment_raw_data.xlsx"</a:t>
-            </a:r>
-            <a:r>
-              <a:rPr>
-                <a:solidFill>
-                  <a:srgbClr val="003B4F"/>
-                </a:solidFill>
-                <a:latin typeface="Courier"/>
-              </a:rPr>
-              <a:t>)</a:t>
-            </a:r>
-          </a:p>
+              <a:rPr b="1"/>
+              <a:t>For every code block, do three things:</a:t>
+            </a:r>
+          </a:p>
+          <a:p>
+            <a:pPr lvl="0" indent="-342900" marL="342900">
+              <a:buAutoNum type="arabicPeriod"/>
+            </a:pPr>
+            <a:r>
+              <a:rPr b="1"/>
+              <a:t>Predict</a:t>
+            </a:r>
+            <a:r>
+              <a:rPr/>
+              <a:t> — before it runs, say what you think the output will be</a:t>
+            </a:r>
+          </a:p>
+          <a:p>
+            <a:pPr lvl="0" indent="-342900" marL="342900">
+              <a:buAutoNum type="arabicPeriod"/>
+            </a:pPr>
+            <a:r>
+              <a:rPr b="1"/>
+              <a:t>Type</a:t>
+            </a:r>
+            <a:r>
+              <a:rPr/>
+              <a:t> it out by hand — do not copy-paste</a:t>
+            </a:r>
+          </a:p>
+          <a:p>
+            <a:pPr lvl="0" indent="-342900" marL="342900">
+              <a:buAutoNum type="arabicPeriod"/>
+            </a:pPr>
+            <a:r>
+              <a:rPr b="1"/>
+              <a:t>Run</a:t>
+            </a:r>
+            <a:r>
+              <a:rPr/>
+              <a:t> it and compare to your prediction</a:t>
+            </a:r>
+          </a:p>
+        </p:txBody>
+      </p:sp>
+      <p:sp>
+        <p:nvSpPr>
+          <p:cNvPr id="4" name="Content Placeholder 3"/>
+          <p:cNvSpPr>
+            <a:spLocks noGrp="1"/>
+          </p:cNvSpPr>
+          <p:nvPr>
+            <p:ph idx="2" sz="half"/>
+          </p:nvPr>
+        </p:nvSpPr>
+        <p:spPr/>
+        <p:txBody>
+          <a:bodyPr/>
+          <a:lstStyle/>
           <a:p>
             <a:pPr lvl="0" indent="0" marL="1270000">
               <a:buNone/>
@@ -17020,63 +19692,57 @@
               <a:buNone/>
             </a:pPr>
             <a:r>
-              <a:rPr sz="2000">
-                <a:latin typeface="Courier"/>
-              </a:rPr>
-              <a:t>car</a:t>
+              <a:rPr sz="2000" b="1"/>
+              <a:t>✅ Why bother? (the evidence)</a:t>
+            </a:r>
+          </a:p>
+          <a:p>
+            <a:pPr lvl="0"/>
+            <a:r>
+              <a:rPr sz="2000" b="1"/>
+              <a:t>Predicting first</a:t>
             </a:r>
             <a:r>
               <a:rPr sz="2000"/>
-              <a:t> is the </a:t>
-            </a:r>
+              <a:t> forces your brain to </a:t>
+            </a:r>
+            <a:r>
+              <a:rPr sz="2000" i="1"/>
+              <a:t>retrieve</a:t>
+            </a:r>
+            <a:r>
+              <a:rPr sz="2000"/>
+              <a:t> what it knows. The gap between your guess and the real answer is what makes the idea stick — vital for slippery ideas like </a:t>
+            </a:r>
+            <a:r>
+              <a:rPr sz="2000" i="1"/>
+              <a:t>p</a:t>
+            </a:r>
+            <a:r>
+              <a:rPr sz="2000"/>
+              <a:t>-values.</a:t>
+            </a:r>
+          </a:p>
+          <a:p>
+            <a:pPr lvl="0"/>
             <a:r>
               <a:rPr sz="2000" b="1"/>
-              <a:t>C</a:t>
+              <a:t>Typing by hand</a:t>
             </a:r>
             <a:r>
               <a:rPr sz="2000"/>
-              <a:t>ompanion to </a:t>
-            </a:r>
+              <a:t> builds the finger-memory and error-spotting that copy-paste skips.</a:t>
+            </a:r>
+          </a:p>
+          <a:p>
+            <a:pPr lvl="0"/>
             <a:r>
               <a:rPr sz="2000" b="1"/>
-              <a:t>A</a:t>
+              <a:t>Chunk → immediate practice</a:t>
             </a:r>
             <a:r>
               <a:rPr sz="2000"/>
-              <a:t>pplied </a:t>
-            </a:r>
-            <a:r>
-              <a:rPr sz="2000" b="1"/>
-              <a:t>R</a:t>
-            </a:r>
-            <a:r>
-              <a:rPr sz="2000"/>
-              <a:t>egression package. It contains </a:t>
-            </a:r>
-            <a:r>
-              <a:rPr sz="2000">
-                <a:latin typeface="Courier"/>
-              </a:rPr>
-              <a:t>leveneTest()</a:t>
-            </a:r>
-            <a:r>
-              <a:rPr sz="2000"/>
-              <a:t>, which we use to check whether our two groups have similar variance.</a:t>
-            </a:r>
-          </a:p>
-          <a:p>
-            <a:pPr lvl="0" indent="0" marL="1270000">
-              <a:buNone/>
-            </a:pPr>
-            <a:r>
-              <a:rPr sz="2000"/>
-              <a:t>Install once: </a:t>
-            </a:r>
-            <a:r>
-              <a:rPr sz="2000">
-                <a:latin typeface="Courier"/>
-              </a:rPr>
-              <a:t>install.packages("car")</a:t>
+              <a:t> keeps a new idea in working memory long enough to form a lasting schema.</a:t>
             </a:r>
           </a:p>
         </p:txBody>
@@ -17116,11 +19782,8 @@
         <p:spPr>
           <a:xfrm>
             <a:off x="0" y="0"/>
-            <a:ext cx="9144000" cy="602780"/>
+            <a:ext cx="9144000" cy="582780"/>
           </a:xfrm>
-          <a:solidFill>
-            <a:srgbClr val="1A1A2E"/>
-          </a:solidFill>
         </p:spPr>
         <p:txBody>
           <a:bodyPr/>
@@ -17131,7 +19794,7 @@
             </a:pPr>
             <a:r>
               <a:rPr/>
-              <a:t>What We Know So Far</a:t>
+              <a:t>Load Libraries and Data</a:t>
             </a:r>
           </a:p>
         </p:txBody>
@@ -17143,7 +19806,7 @@
             <a:spLocks noGrp="1"/>
           </p:cNvSpPr>
           <p:nvPr>
-            <p:ph idx="1" sz="half"/>
+            <p:ph idx="1"/>
           </p:nvPr>
         </p:nvSpPr>
         <p:spPr/>
@@ -17161,17 +19824,26 @@
                 </a:solidFill>
                 <a:latin typeface="Courier"/>
               </a:rPr>
-              <a:t># Quick recap from Lecture 03 ----------------------------</a:t>
+              <a:t># Load all packages at the top ----------------------------</a:t>
             </a:r>
             <a:br/>
             <a:r>
               <a:rPr>
                 <a:solidFill>
-                  <a:srgbClr val="003B4F"/>
-                </a:solidFill>
-                <a:latin typeface="Courier"/>
-              </a:rPr>
-              <a:t>recap_df &lt;- tree_df </a:t>
+                  <a:srgbClr val="4758AB"/>
+                </a:solidFill>
+                <a:latin typeface="Courier"/>
+              </a:rPr>
+              <a:t>library</a:t>
+            </a:r>
+            <a:r>
+              <a:rPr>
+                <a:solidFill>
+                  <a:srgbClr val="003B4F"/>
+                </a:solidFill>
+                <a:latin typeface="Courier"/>
+              </a:rPr>
+              <a:t>(readxl) </a:t>
             </a:r>
             <a:r>
               <a:rPr>
@@ -17180,35 +19852,26 @@
                 </a:solidFill>
                 <a:latin typeface="Courier"/>
               </a:rPr>
-              <a:t>%&gt;%</a:t>
+              <a:t># reading Excel files</a:t>
             </a:r>
             <a:br/>
             <a:r>
               <a:rPr>
                 <a:solidFill>
-                  <a:srgbClr val="003B4F"/>
-                </a:solidFill>
-                <a:latin typeface="Courier"/>
-              </a:rPr>
-              <a:t>  </a:t>
-            </a:r>
-            <a:r>
-              <a:rPr>
-                <a:solidFill>
                   <a:srgbClr val="4758AB"/>
                 </a:solidFill>
                 <a:latin typeface="Courier"/>
               </a:rPr>
-              <a:t>group_by</a:t>
-            </a:r>
-            <a:r>
-              <a:rPr>
-                <a:solidFill>
-                  <a:srgbClr val="003B4F"/>
-                </a:solidFill>
-                <a:latin typeface="Courier"/>
-              </a:rPr>
-              <a:t>(side) </a:t>
+              <a:t>library</a:t>
+            </a:r>
+            <a:r>
+              <a:rPr>
+                <a:solidFill>
+                  <a:srgbClr val="003B4F"/>
+                </a:solidFill>
+                <a:latin typeface="Courier"/>
+              </a:rPr>
+              <a:t>(tidyverse) </a:t>
             </a:r>
             <a:r>
               <a:rPr>
@@ -17217,26 +19880,96 @@
                 </a:solidFill>
                 <a:latin typeface="Courier"/>
               </a:rPr>
-              <a:t>%&gt;%</a:t>
+              <a:t># data manipulation + ggplot2</a:t>
             </a:r>
             <a:br/>
             <a:r>
               <a:rPr>
                 <a:solidFill>
-                  <a:srgbClr val="003B4F"/>
-                </a:solidFill>
-                <a:latin typeface="Courier"/>
-              </a:rPr>
-              <a:t>  </a:t>
-            </a:r>
-            <a:r>
-              <a:rPr>
-                <a:solidFill>
                   <a:srgbClr val="4758AB"/>
                 </a:solidFill>
                 <a:latin typeface="Courier"/>
               </a:rPr>
-              <a:t>summarize</a:t>
+              <a:t>library</a:t>
+            </a:r>
+            <a:r>
+              <a:rPr>
+                <a:solidFill>
+                  <a:srgbClr val="003B4F"/>
+                </a:solidFill>
+                <a:latin typeface="Courier"/>
+              </a:rPr>
+              <a:t>(skimr) </a:t>
+            </a:r>
+            <a:r>
+              <a:rPr>
+                <a:solidFill>
+                  <a:srgbClr val="5E5E5E"/>
+                </a:solidFill>
+                <a:latin typeface="Courier"/>
+              </a:rPr>
+              <a:t># fast summaries</a:t>
+            </a:r>
+            <a:br/>
+            <a:r>
+              <a:rPr>
+                <a:solidFill>
+                  <a:srgbClr val="4758AB"/>
+                </a:solidFill>
+                <a:latin typeface="Courier"/>
+              </a:rPr>
+              <a:t>library</a:t>
+            </a:r>
+            <a:r>
+              <a:rPr>
+                <a:solidFill>
+                  <a:srgbClr val="003B4F"/>
+                </a:solidFill>
+                <a:latin typeface="Courier"/>
+              </a:rPr>
+              <a:t>(car) </a:t>
+            </a:r>
+            <a:r>
+              <a:rPr>
+                <a:solidFill>
+                  <a:srgbClr val="5E5E5E"/>
+                </a:solidFill>
+                <a:latin typeface="Courier"/>
+              </a:rPr>
+              <a:t># Levene's test for variance equality</a:t>
+            </a:r>
+          </a:p>
+          <a:p>
+            <a:pPr lvl="0" indent="0">
+              <a:buNone/>
+            </a:pPr>
+            <a:r>
+              <a:rPr>
+                <a:solidFill>
+                  <a:srgbClr val="5E5E5E"/>
+                </a:solidFill>
+                <a:latin typeface="Courier"/>
+              </a:rPr>
+              <a:t># Load the leaf data from the data folder -----------------</a:t>
+            </a:r>
+            <a:br/>
+            <a:r>
+              <a:rPr>
+                <a:solidFill>
+                  <a:srgbClr val="003B4F"/>
+                </a:solidFill>
+                <a:latin typeface="Courier"/>
+              </a:rPr>
+              <a:t>tree_df &lt;- </a:t>
+            </a:r>
+            <a:r>
+              <a:rPr>
+                <a:solidFill>
+                  <a:srgbClr val="4758AB"/>
+                </a:solidFill>
+                <a:latin typeface="Courier"/>
+              </a:rPr>
+              <a:t>read_excel</a:t>
             </a:r>
             <a:r>
               <a:rPr>
@@ -17247,405 +19980,14 @@
               </a:rPr>
               <a:t>(</a:t>
             </a:r>
-            <a:br/>
-            <a:r>
-              <a:rPr>
-                <a:solidFill>
-                  <a:srgbClr val="003B4F"/>
-                </a:solidFill>
-                <a:latin typeface="Courier"/>
-              </a:rPr>
-              <a:t>    </a:t>
-            </a:r>
-            <a:r>
-              <a:rPr>
-                <a:solidFill>
-                  <a:srgbClr val="657422"/>
-                </a:solidFill>
-                <a:latin typeface="Courier"/>
-              </a:rPr>
-              <a:t>n =</a:t>
-            </a:r>
-            <a:r>
-              <a:rPr>
-                <a:solidFill>
-                  <a:srgbClr val="003B4F"/>
-                </a:solidFill>
-                <a:latin typeface="Courier"/>
-              </a:rPr>
-              <a:t> </a:t>
-            </a:r>
-            <a:r>
-              <a:rPr>
-                <a:solidFill>
-                  <a:srgbClr val="4758AB"/>
-                </a:solidFill>
-                <a:latin typeface="Courier"/>
-              </a:rPr>
-              <a:t>sum</a:t>
-            </a:r>
-            <a:r>
-              <a:rPr>
-                <a:solidFill>
-                  <a:srgbClr val="003B4F"/>
-                </a:solidFill>
-                <a:latin typeface="Courier"/>
-              </a:rPr>
-              <a:t>(</a:t>
-            </a:r>
-            <a:r>
-              <a:rPr>
-                <a:solidFill>
-                  <a:srgbClr val="5E5E5E"/>
-                </a:solidFill>
-                <a:latin typeface="Courier"/>
-              </a:rPr>
-              <a:t>!</a:t>
-            </a:r>
-            <a:r>
-              <a:rPr>
-                <a:solidFill>
-                  <a:srgbClr val="4758AB"/>
-                </a:solidFill>
-                <a:latin typeface="Courier"/>
-              </a:rPr>
-              <a:t>is.na</a:t>
-            </a:r>
-            <a:r>
-              <a:rPr>
-                <a:solidFill>
-                  <a:srgbClr val="003B4F"/>
-                </a:solidFill>
-                <a:latin typeface="Courier"/>
-              </a:rPr>
-              <a:t>(weight_g)),</a:t>
-            </a:r>
-            <a:br/>
-            <a:r>
-              <a:rPr>
-                <a:solidFill>
-                  <a:srgbClr val="003B4F"/>
-                </a:solidFill>
-                <a:latin typeface="Courier"/>
-              </a:rPr>
-              <a:t>    </a:t>
-            </a:r>
-            <a:r>
-              <a:rPr>
-                <a:solidFill>
-                  <a:srgbClr val="657422"/>
-                </a:solidFill>
-                <a:latin typeface="Courier"/>
-              </a:rPr>
-              <a:t>mean_wt =</a:t>
-            </a:r>
-            <a:r>
-              <a:rPr>
-                <a:solidFill>
-                  <a:srgbClr val="003B4F"/>
-                </a:solidFill>
-                <a:latin typeface="Courier"/>
-              </a:rPr>
-              <a:t> </a:t>
-            </a:r>
-            <a:r>
-              <a:rPr>
-                <a:solidFill>
-                  <a:srgbClr val="4758AB"/>
-                </a:solidFill>
-                <a:latin typeface="Courier"/>
-              </a:rPr>
-              <a:t>round</a:t>
-            </a:r>
-            <a:r>
-              <a:rPr>
-                <a:solidFill>
-                  <a:srgbClr val="003B4F"/>
-                </a:solidFill>
-                <a:latin typeface="Courier"/>
-              </a:rPr>
-              <a:t>(</a:t>
-            </a:r>
-            <a:r>
-              <a:rPr>
-                <a:solidFill>
-                  <a:srgbClr val="4758AB"/>
-                </a:solidFill>
-                <a:latin typeface="Courier"/>
-              </a:rPr>
-              <a:t>mean</a:t>
-            </a:r>
-            <a:r>
-              <a:rPr>
-                <a:solidFill>
-                  <a:srgbClr val="003B4F"/>
-                </a:solidFill>
-                <a:latin typeface="Courier"/>
-              </a:rPr>
-              <a:t>(weight_g, </a:t>
-            </a:r>
-            <a:r>
-              <a:rPr>
-                <a:solidFill>
-                  <a:srgbClr val="657422"/>
-                </a:solidFill>
-                <a:latin typeface="Courier"/>
-              </a:rPr>
-              <a:t>na.rm =</a:t>
-            </a:r>
-            <a:r>
-              <a:rPr>
-                <a:solidFill>
-                  <a:srgbClr val="003B4F"/>
-                </a:solidFill>
-                <a:latin typeface="Courier"/>
-              </a:rPr>
-              <a:t> </a:t>
-            </a:r>
-            <a:r>
-              <a:rPr>
-                <a:solidFill>
-                  <a:srgbClr val="8F5902"/>
-                </a:solidFill>
-                <a:latin typeface="Courier"/>
-              </a:rPr>
-              <a:t>TRUE</a:t>
-            </a:r>
-            <a:r>
-              <a:rPr>
-                <a:solidFill>
-                  <a:srgbClr val="003B4F"/>
-                </a:solidFill>
-                <a:latin typeface="Courier"/>
-              </a:rPr>
-              <a:t>), </a:t>
-            </a:r>
-            <a:r>
-              <a:rPr>
-                <a:solidFill>
-                  <a:srgbClr val="AD0000"/>
-                </a:solidFill>
-                <a:latin typeface="Courier"/>
-              </a:rPr>
-              <a:t>2</a:t>
-            </a:r>
-            <a:r>
-              <a:rPr>
-                <a:solidFill>
-                  <a:srgbClr val="003B4F"/>
-                </a:solidFill>
-                <a:latin typeface="Courier"/>
-              </a:rPr>
-              <a:t>),</a:t>
-            </a:r>
-            <a:br/>
-            <a:r>
-              <a:rPr>
-                <a:solidFill>
-                  <a:srgbClr val="003B4F"/>
-                </a:solidFill>
-                <a:latin typeface="Courier"/>
-              </a:rPr>
-              <a:t>    </a:t>
-            </a:r>
-            <a:r>
-              <a:rPr>
-                <a:solidFill>
-                  <a:srgbClr val="657422"/>
-                </a:solidFill>
-                <a:latin typeface="Courier"/>
-              </a:rPr>
-              <a:t>sd_wt =</a:t>
-            </a:r>
-            <a:r>
-              <a:rPr>
-                <a:solidFill>
-                  <a:srgbClr val="003B4F"/>
-                </a:solidFill>
-                <a:latin typeface="Courier"/>
-              </a:rPr>
-              <a:t> </a:t>
-            </a:r>
-            <a:r>
-              <a:rPr>
-                <a:solidFill>
-                  <a:srgbClr val="4758AB"/>
-                </a:solidFill>
-                <a:latin typeface="Courier"/>
-              </a:rPr>
-              <a:t>round</a:t>
-            </a:r>
-            <a:r>
-              <a:rPr>
-                <a:solidFill>
-                  <a:srgbClr val="003B4F"/>
-                </a:solidFill>
-                <a:latin typeface="Courier"/>
-              </a:rPr>
-              <a:t>(</a:t>
-            </a:r>
-            <a:r>
-              <a:rPr>
-                <a:solidFill>
-                  <a:srgbClr val="4758AB"/>
-                </a:solidFill>
-                <a:latin typeface="Courier"/>
-              </a:rPr>
-              <a:t>sd</a:t>
-            </a:r>
-            <a:r>
-              <a:rPr>
-                <a:solidFill>
-                  <a:srgbClr val="003B4F"/>
-                </a:solidFill>
-                <a:latin typeface="Courier"/>
-              </a:rPr>
-              <a:t>(weight_g, </a:t>
-            </a:r>
-            <a:r>
-              <a:rPr>
-                <a:solidFill>
-                  <a:srgbClr val="657422"/>
-                </a:solidFill>
-                <a:latin typeface="Courier"/>
-              </a:rPr>
-              <a:t>na.rm =</a:t>
-            </a:r>
-            <a:r>
-              <a:rPr>
-                <a:solidFill>
-                  <a:srgbClr val="003B4F"/>
-                </a:solidFill>
-                <a:latin typeface="Courier"/>
-              </a:rPr>
-              <a:t> </a:t>
-            </a:r>
-            <a:r>
-              <a:rPr>
-                <a:solidFill>
-                  <a:srgbClr val="8F5902"/>
-                </a:solidFill>
-                <a:latin typeface="Courier"/>
-              </a:rPr>
-              <a:t>TRUE</a:t>
-            </a:r>
-            <a:r>
-              <a:rPr>
-                <a:solidFill>
-                  <a:srgbClr val="003B4F"/>
-                </a:solidFill>
-                <a:latin typeface="Courier"/>
-              </a:rPr>
-              <a:t>), </a:t>
-            </a:r>
-            <a:r>
-              <a:rPr>
-                <a:solidFill>
-                  <a:srgbClr val="AD0000"/>
-                </a:solidFill>
-                <a:latin typeface="Courier"/>
-              </a:rPr>
-              <a:t>2</a:t>
-            </a:r>
-            <a:r>
-              <a:rPr>
-                <a:solidFill>
-                  <a:srgbClr val="003B4F"/>
-                </a:solidFill>
-                <a:latin typeface="Courier"/>
-              </a:rPr>
-              <a:t>),</a:t>
-            </a:r>
-            <a:br/>
-            <a:r>
-              <a:rPr>
-                <a:solidFill>
-                  <a:srgbClr val="003B4F"/>
-                </a:solidFill>
-                <a:latin typeface="Courier"/>
-              </a:rPr>
-              <a:t>    </a:t>
-            </a:r>
-            <a:r>
-              <a:rPr>
-                <a:solidFill>
-                  <a:srgbClr val="657422"/>
-                </a:solidFill>
-                <a:latin typeface="Courier"/>
-              </a:rPr>
-              <a:t>se_wt =</a:t>
-            </a:r>
-            <a:r>
-              <a:rPr>
-                <a:solidFill>
-                  <a:srgbClr val="003B4F"/>
-                </a:solidFill>
-                <a:latin typeface="Courier"/>
-              </a:rPr>
-              <a:t> </a:t>
-            </a:r>
-            <a:r>
-              <a:rPr>
-                <a:solidFill>
-                  <a:srgbClr val="4758AB"/>
-                </a:solidFill>
-                <a:latin typeface="Courier"/>
-              </a:rPr>
-              <a:t>round</a:t>
-            </a:r>
-            <a:r>
-              <a:rPr>
-                <a:solidFill>
-                  <a:srgbClr val="003B4F"/>
-                </a:solidFill>
-                <a:latin typeface="Courier"/>
-              </a:rPr>
-              <a:t>(sd_wt </a:t>
-            </a:r>
-            <a:r>
-              <a:rPr>
-                <a:solidFill>
-                  <a:srgbClr val="5E5E5E"/>
-                </a:solidFill>
-                <a:latin typeface="Courier"/>
-              </a:rPr>
-              <a:t>/</a:t>
-            </a:r>
-            <a:r>
-              <a:rPr>
-                <a:solidFill>
-                  <a:srgbClr val="003B4F"/>
-                </a:solidFill>
-                <a:latin typeface="Courier"/>
-              </a:rPr>
-              <a:t> </a:t>
-            </a:r>
-            <a:r>
-              <a:rPr>
-                <a:solidFill>
-                  <a:srgbClr val="4758AB"/>
-                </a:solidFill>
-                <a:latin typeface="Courier"/>
-              </a:rPr>
-              <a:t>sqrt</a:t>
-            </a:r>
-            <a:r>
-              <a:rPr>
-                <a:solidFill>
-                  <a:srgbClr val="003B4F"/>
-                </a:solidFill>
-                <a:latin typeface="Courier"/>
-              </a:rPr>
-              <a:t>(n), </a:t>
-            </a:r>
-            <a:r>
-              <a:rPr>
-                <a:solidFill>
-                  <a:srgbClr val="AD0000"/>
-                </a:solidFill>
-                <a:latin typeface="Courier"/>
-              </a:rPr>
-              <a:t>2</a:t>
+            <a:r>
+              <a:rPr>
+                <a:solidFill>
+                  <a:srgbClr val="20794D"/>
+                </a:solidFill>
+                <a:latin typeface="Courier"/>
+              </a:rPr>
+              <a:t>"data/2026_06_25_tree_experiment_raw_data.xlsx"</a:t>
             </a:r>
             <a:r>
               <a:rPr>
@@ -17656,121 +19998,78 @@
               </a:rPr>
               <a:t>)</a:t>
             </a:r>
-            <a:br/>
-            <a:r>
-              <a:rPr>
-                <a:solidFill>
-                  <a:srgbClr val="003B4F"/>
-                </a:solidFill>
-                <a:latin typeface="Courier"/>
-              </a:rPr>
-              <a:t>  )</a:t>
-            </a:r>
-            <a:br/>
-            <a:r>
-              <a:rPr>
-                <a:solidFill>
-                  <a:srgbClr val="003B4F"/>
-                </a:solidFill>
-                <a:latin typeface="Courier"/>
-              </a:rPr>
-              <a:t>recap_df</a:t>
-            </a:r>
-          </a:p>
-          <a:p>
-            <a:pPr lvl="0" indent="0">
+          </a:p>
+          <a:p>
+            <a:pPr lvl="0" indent="0" marL="1270000">
               <a:buNone/>
             </a:pPr>
             <a:r>
-              <a:rPr>
-                <a:latin typeface="Courier"/>
-              </a:rPr>
-              <a:t># A tibble: 2 × 5
-  side      n mean_wt sd_wt se_wt
-  &lt;chr&gt; &lt;int&gt;   &lt;dbl&gt; &lt;dbl&gt; &lt;dbl&gt;
-1 shady    10     7.8  1.03  0.33
-2 sunny    10     3.8  0.79  0.25</a:t>
-            </a:r>
-          </a:p>
-        </p:txBody>
-      </p:sp>
-      <p:sp>
-        <p:nvSpPr>
-          <p:cNvPr id="4" name="Content Placeholder 3"/>
-          <p:cNvSpPr>
-            <a:spLocks noGrp="1"/>
-          </p:cNvSpPr>
-          <p:nvPr>
-            <p:ph idx="2" sz="half"/>
-          </p:nvPr>
-        </p:nvSpPr>
-        <p:spPr/>
-        <p:txBody>
-          <a:bodyPr/>
-          <a:lstStyle/>
-          <a:p>
-            <a:pPr lvl="0"/>
-            <a:r>
-              <a:rPr/>
-              <a:t>RESULTS:</a:t>
-            </a:r>
-          </a:p>
-          <a:p>
-            <a:pPr lvl="1"/>
-            <a:r>
-              <a:rPr/>
-              <a:t>Shady mean: </a:t>
-            </a:r>
-            <a:r>
-              <a:rPr b="1"/>
-              <a:t>7.80 g</a:t>
-            </a:r>
-          </a:p>
-          <a:p>
-            <a:pPr lvl="1"/>
-            <a:r>
-              <a:rPr/>
-              <a:t>Sunny mean: </a:t>
-            </a:r>
-            <a:r>
-              <a:rPr b="1"/>
-              <a:t>3.80 g</a:t>
-            </a:r>
-          </a:p>
-          <a:p>
-            <a:pPr lvl="1"/>
-            <a:r>
-              <a:rPr/>
-              <a:t>Difference: </a:t>
-            </a:r>
-            <a:r>
-              <a:rPr b="1"/>
-              <a:t>4.0 g</a:t>
-            </a:r>
-            <a:r>
-              <a:rPr/>
-              <a:t> — a big gap!</a:t>
-            </a:r>
-          </a:p>
-          <a:p>
-            <a:pPr lvl="0"/>
-            <a:r>
-              <a:rPr b="1"/>
-              <a:t>But is that gap real, or could it just be sampling noise?</a:t>
-            </a:r>
-          </a:p>
-          <a:p>
-            <a:pPr lvl="0"/>
-            <a:r>
-              <a:rPr/>
-              <a:t>With only n = 10 per group, random chance could produce apparent differences.</a:t>
-            </a:r>
-          </a:p>
-          <a:p>
-            <a:pPr lvl="0"/>
-            <a:r>
-              <a:rPr b="1"/>
-              <a:t>We need a formal test to quantify the probability.</a:t>
+              <a:rPr sz="2000" b="1"/>
+              <a:t>Note</a:t>
+            </a:r>
+          </a:p>
+          <a:p>
+            <a:pPr lvl="0" indent="0" marL="1270000">
+              <a:buNone/>
+            </a:pPr>
+            <a:r>
+              <a:rPr sz="2000">
+                <a:latin typeface="Courier"/>
+              </a:rPr>
+              <a:t>car</a:t>
+            </a:r>
+            <a:r>
+              <a:rPr sz="2000"/>
+              <a:t> is the </a:t>
+            </a:r>
+            <a:r>
+              <a:rPr sz="2000" b="1"/>
+              <a:t>C</a:t>
+            </a:r>
+            <a:r>
+              <a:rPr sz="2000"/>
+              <a:t>ompanion to </a:t>
+            </a:r>
+            <a:r>
+              <a:rPr sz="2000" b="1"/>
+              <a:t>A</a:t>
+            </a:r>
+            <a:r>
+              <a:rPr sz="2000"/>
+              <a:t>pplied </a:t>
+            </a:r>
+            <a:r>
+              <a:rPr sz="2000" b="1"/>
+              <a:t>R</a:t>
+            </a:r>
+            <a:r>
+              <a:rPr sz="2000"/>
+              <a:t>egression package. It contains </a:t>
+            </a:r>
+            <a:r>
+              <a:rPr sz="2000">
+                <a:latin typeface="Courier"/>
+              </a:rPr>
+              <a:t>leveneTest()</a:t>
+            </a:r>
+            <a:r>
+              <a:rPr sz="2000"/>
+              <a:t>, which we use to check whether our two groups have similar variance.</a:t>
+            </a:r>
+          </a:p>
+          <a:p>
+            <a:pPr lvl="0" indent="0" marL="1270000">
+              <a:buNone/>
+            </a:pPr>
+            <a:r>
+              <a:rPr sz="2000"/>
+              <a:t>Install once: </a:t>
+            </a:r>
+            <a:r>
+              <a:rPr sz="2000">
+                <a:latin typeface="Courier"/>
+              </a:rPr>
+              <a:t>install.packages("car")</a:t>
             </a:r>
           </a:p>
         </p:txBody>
@@ -17809,8 +20108,8 @@
         </p:nvSpPr>
         <p:spPr>
           <a:xfrm>
-            <a:off x="139485" y="78119"/>
-            <a:ext cx="8229600" cy="607682"/>
+            <a:off x="0" y="0"/>
+            <a:ext cx="9144000" cy="582780"/>
           </a:xfrm>
         </p:spPr>
         <p:txBody>
@@ -17822,19 +20121,19 @@
             </a:pPr>
             <a:r>
               <a:rPr/>
-              <a:t>Why Comparing Means Is Not Enough</a:t>
+              <a:t>What We Know So Far</a:t>
             </a:r>
           </a:p>
         </p:txBody>
       </p:sp>
       <p:sp>
         <p:nvSpPr>
-          <p:cNvPr id="3" name="Text Placeholder 2"/>
+          <p:cNvPr id="3" name="Content Placeholder 2"/>
           <p:cNvSpPr>
             <a:spLocks noGrp="1"/>
           </p:cNvSpPr>
           <p:nvPr>
-            <p:ph idx="1" type="body"/>
+            <p:ph idx="1"/>
           </p:nvPr>
         </p:nvSpPr>
         <p:spPr/>
@@ -17842,1083 +20141,33 @@
           <a:bodyPr/>
           <a:lstStyle/>
           <a:p>
-            <a:pPr lvl="0" indent="0">
+            <a:pPr lvl="0" indent="0" marL="1270000">
               <a:buNone/>
             </a:pPr>
             <a:r>
-              <a:rPr>
-                <a:solidFill>
-                  <a:srgbClr val="5E5E5E"/>
-                </a:solidFill>
-                <a:latin typeface="Courier"/>
-              </a:rPr>
-              <a:t># Remind ourselves what the data look like ---------------</a:t>
-            </a:r>
-            <a:br/>
-            <a:r>
-              <a:rPr>
-                <a:solidFill>
-                  <a:srgbClr val="003B4F"/>
-                </a:solidFill>
-                <a:latin typeface="Courier"/>
-              </a:rPr>
-              <a:t>recap_plot &lt;- tree_df </a:t>
-            </a:r>
-            <a:r>
-              <a:rPr>
-                <a:solidFill>
-                  <a:srgbClr val="5E5E5E"/>
-                </a:solidFill>
-                <a:latin typeface="Courier"/>
-              </a:rPr>
-              <a:t>%&gt;%</a:t>
-            </a:r>
-            <a:br/>
-            <a:r>
-              <a:rPr>
-                <a:solidFill>
-                  <a:srgbClr val="003B4F"/>
-                </a:solidFill>
-                <a:latin typeface="Courier"/>
-              </a:rPr>
-              <a:t>  </a:t>
-            </a:r>
-            <a:r>
-              <a:rPr>
-                <a:solidFill>
-                  <a:srgbClr val="4758AB"/>
-                </a:solidFill>
-                <a:latin typeface="Courier"/>
-              </a:rPr>
-              <a:t>ggplot</a:t>
-            </a:r>
-            <a:r>
-              <a:rPr>
-                <a:solidFill>
-                  <a:srgbClr val="003B4F"/>
-                </a:solidFill>
-                <a:latin typeface="Courier"/>
-              </a:rPr>
-              <a:t>(</a:t>
-            </a:r>
-            <a:r>
-              <a:rPr>
-                <a:solidFill>
-                  <a:srgbClr val="4758AB"/>
-                </a:solidFill>
-                <a:latin typeface="Courier"/>
-              </a:rPr>
-              <a:t>aes</a:t>
-            </a:r>
-            <a:r>
-              <a:rPr>
-                <a:solidFill>
-                  <a:srgbClr val="003B4F"/>
-                </a:solidFill>
-                <a:latin typeface="Courier"/>
-              </a:rPr>
-              <a:t>(</a:t>
-            </a:r>
-            <a:r>
-              <a:rPr>
-                <a:solidFill>
-                  <a:srgbClr val="657422"/>
-                </a:solidFill>
-                <a:latin typeface="Courier"/>
-              </a:rPr>
-              <a:t>x =</a:t>
-            </a:r>
-            <a:r>
-              <a:rPr>
-                <a:solidFill>
-                  <a:srgbClr val="003B4F"/>
-                </a:solidFill>
-                <a:latin typeface="Courier"/>
-              </a:rPr>
-              <a:t> side, </a:t>
-            </a:r>
-            <a:r>
-              <a:rPr>
-                <a:solidFill>
-                  <a:srgbClr val="657422"/>
-                </a:solidFill>
-                <a:latin typeface="Courier"/>
-              </a:rPr>
-              <a:t>y =</a:t>
-            </a:r>
-            <a:r>
-              <a:rPr>
-                <a:solidFill>
-                  <a:srgbClr val="003B4F"/>
-                </a:solidFill>
-                <a:latin typeface="Courier"/>
-              </a:rPr>
-              <a:t> weight_g, </a:t>
-            </a:r>
-            <a:r>
-              <a:rPr>
-                <a:solidFill>
-                  <a:srgbClr val="657422"/>
-                </a:solidFill>
-                <a:latin typeface="Courier"/>
-              </a:rPr>
-              <a:t>color =</a:t>
-            </a:r>
-            <a:r>
-              <a:rPr>
-                <a:solidFill>
-                  <a:srgbClr val="003B4F"/>
-                </a:solidFill>
-                <a:latin typeface="Courier"/>
-              </a:rPr>
-              <a:t> side)) </a:t>
-            </a:r>
-            <a:r>
-              <a:rPr>
-                <a:solidFill>
-                  <a:srgbClr val="5E5E5E"/>
-                </a:solidFill>
-                <a:latin typeface="Courier"/>
-              </a:rPr>
-              <a:t>+</a:t>
-            </a:r>
-            <a:br/>
-            <a:r>
-              <a:rPr>
-                <a:solidFill>
-                  <a:srgbClr val="003B4F"/>
-                </a:solidFill>
-                <a:latin typeface="Courier"/>
-              </a:rPr>
-              <a:t>  </a:t>
-            </a:r>
-            <a:r>
-              <a:rPr>
-                <a:solidFill>
-                  <a:srgbClr val="4758AB"/>
-                </a:solidFill>
-                <a:latin typeface="Courier"/>
-              </a:rPr>
-              <a:t>geom_point</a:t>
-            </a:r>
-            <a:r>
-              <a:rPr>
-                <a:solidFill>
-                  <a:srgbClr val="003B4F"/>
-                </a:solidFill>
-                <a:latin typeface="Courier"/>
-              </a:rPr>
-              <a:t>(</a:t>
-            </a:r>
-            <a:br/>
-            <a:r>
-              <a:rPr>
-                <a:solidFill>
-                  <a:srgbClr val="003B4F"/>
-                </a:solidFill>
-                <a:latin typeface="Courier"/>
-              </a:rPr>
-              <a:t>    </a:t>
-            </a:r>
-            <a:r>
-              <a:rPr>
-                <a:solidFill>
-                  <a:srgbClr val="657422"/>
-                </a:solidFill>
-                <a:latin typeface="Courier"/>
-              </a:rPr>
-              <a:t>position =</a:t>
-            </a:r>
-            <a:r>
-              <a:rPr>
-                <a:solidFill>
-                  <a:srgbClr val="003B4F"/>
-                </a:solidFill>
-                <a:latin typeface="Courier"/>
-              </a:rPr>
-              <a:t> </a:t>
-            </a:r>
-            <a:r>
-              <a:rPr>
-                <a:solidFill>
-                  <a:srgbClr val="4758AB"/>
-                </a:solidFill>
-                <a:latin typeface="Courier"/>
-              </a:rPr>
-              <a:t>position_jitter</a:t>
-            </a:r>
-            <a:r>
-              <a:rPr>
-                <a:solidFill>
-                  <a:srgbClr val="003B4F"/>
-                </a:solidFill>
-                <a:latin typeface="Courier"/>
-              </a:rPr>
-              <a:t>(</a:t>
-            </a:r>
-            <a:r>
-              <a:rPr>
-                <a:solidFill>
-                  <a:srgbClr val="657422"/>
-                </a:solidFill>
-                <a:latin typeface="Courier"/>
-              </a:rPr>
-              <a:t>width =</a:t>
-            </a:r>
-            <a:r>
-              <a:rPr>
-                <a:solidFill>
-                  <a:srgbClr val="003B4F"/>
-                </a:solidFill>
-                <a:latin typeface="Courier"/>
-              </a:rPr>
-              <a:t> </a:t>
-            </a:r>
-            <a:r>
-              <a:rPr>
-                <a:solidFill>
-                  <a:srgbClr val="AD0000"/>
-                </a:solidFill>
-                <a:latin typeface="Courier"/>
-              </a:rPr>
-              <a:t>0.15</a:t>
-            </a:r>
-            <a:r>
-              <a:rPr>
-                <a:solidFill>
-                  <a:srgbClr val="003B4F"/>
-                </a:solidFill>
-                <a:latin typeface="Courier"/>
-              </a:rPr>
-              <a:t>, </a:t>
-            </a:r>
-            <a:r>
-              <a:rPr>
-                <a:solidFill>
-                  <a:srgbClr val="657422"/>
-                </a:solidFill>
-                <a:latin typeface="Courier"/>
-              </a:rPr>
-              <a:t>seed =</a:t>
-            </a:r>
-            <a:r>
-              <a:rPr>
-                <a:solidFill>
-                  <a:srgbClr val="003B4F"/>
-                </a:solidFill>
-                <a:latin typeface="Courier"/>
-              </a:rPr>
-              <a:t> </a:t>
-            </a:r>
-            <a:r>
-              <a:rPr>
-                <a:solidFill>
-                  <a:srgbClr val="AD0000"/>
-                </a:solidFill>
-                <a:latin typeface="Courier"/>
-              </a:rPr>
-              <a:t>42</a:t>
-            </a:r>
-            <a:r>
-              <a:rPr>
-                <a:solidFill>
-                  <a:srgbClr val="003B4F"/>
-                </a:solidFill>
-                <a:latin typeface="Courier"/>
-              </a:rPr>
-              <a:t>),</a:t>
-            </a:r>
-            <a:br/>
-            <a:r>
-              <a:rPr>
-                <a:solidFill>
-                  <a:srgbClr val="003B4F"/>
-                </a:solidFill>
-                <a:latin typeface="Courier"/>
-              </a:rPr>
-              <a:t>    </a:t>
-            </a:r>
-            <a:r>
-              <a:rPr>
-                <a:solidFill>
-                  <a:srgbClr val="657422"/>
-                </a:solidFill>
-                <a:latin typeface="Courier"/>
-              </a:rPr>
-              <a:t>alpha =</a:t>
-            </a:r>
-            <a:r>
-              <a:rPr>
-                <a:solidFill>
-                  <a:srgbClr val="003B4F"/>
-                </a:solidFill>
-                <a:latin typeface="Courier"/>
-              </a:rPr>
-              <a:t> </a:t>
-            </a:r>
-            <a:r>
-              <a:rPr>
-                <a:solidFill>
-                  <a:srgbClr val="AD0000"/>
-                </a:solidFill>
-                <a:latin typeface="Courier"/>
-              </a:rPr>
-              <a:t>0.5</a:t>
-            </a:r>
-            <a:r>
-              <a:rPr>
-                <a:solidFill>
-                  <a:srgbClr val="003B4F"/>
-                </a:solidFill>
-                <a:latin typeface="Courier"/>
-              </a:rPr>
-              <a:t>,</a:t>
-            </a:r>
-            <a:br/>
-            <a:r>
-              <a:rPr>
-                <a:solidFill>
-                  <a:srgbClr val="003B4F"/>
-                </a:solidFill>
-                <a:latin typeface="Courier"/>
-              </a:rPr>
-              <a:t>    </a:t>
-            </a:r>
-            <a:r>
-              <a:rPr>
-                <a:solidFill>
-                  <a:srgbClr val="657422"/>
-                </a:solidFill>
-                <a:latin typeface="Courier"/>
-              </a:rPr>
-              <a:t>size =</a:t>
-            </a:r>
-            <a:r>
-              <a:rPr>
-                <a:solidFill>
-                  <a:srgbClr val="003B4F"/>
-                </a:solidFill>
-                <a:latin typeface="Courier"/>
-              </a:rPr>
-              <a:t> </a:t>
-            </a:r>
-            <a:r>
-              <a:rPr>
-                <a:solidFill>
-                  <a:srgbClr val="AD0000"/>
-                </a:solidFill>
-                <a:latin typeface="Courier"/>
-              </a:rPr>
-              <a:t>2</a:t>
-            </a:r>
-            <a:br/>
-            <a:r>
-              <a:rPr>
-                <a:solidFill>
-                  <a:srgbClr val="003B4F"/>
-                </a:solidFill>
-                <a:latin typeface="Courier"/>
-              </a:rPr>
-              <a:t>  ) </a:t>
-            </a:r>
-            <a:r>
-              <a:rPr>
-                <a:solidFill>
-                  <a:srgbClr val="5E5E5E"/>
-                </a:solidFill>
-                <a:latin typeface="Courier"/>
-              </a:rPr>
-              <a:t>+</a:t>
-            </a:r>
-            <a:br/>
-            <a:r>
-              <a:rPr>
-                <a:solidFill>
-                  <a:srgbClr val="003B4F"/>
-                </a:solidFill>
-                <a:latin typeface="Courier"/>
-              </a:rPr>
-              <a:t>  </a:t>
-            </a:r>
-            <a:r>
-              <a:rPr>
-                <a:solidFill>
-                  <a:srgbClr val="4758AB"/>
-                </a:solidFill>
-                <a:latin typeface="Courier"/>
-              </a:rPr>
-              <a:t>stat_summary</a:t>
-            </a:r>
-            <a:r>
-              <a:rPr>
-                <a:solidFill>
-                  <a:srgbClr val="003B4F"/>
-                </a:solidFill>
-                <a:latin typeface="Courier"/>
-              </a:rPr>
-              <a:t>(</a:t>
-            </a:r>
-            <a:r>
-              <a:rPr>
-                <a:solidFill>
-                  <a:srgbClr val="657422"/>
-                </a:solidFill>
-                <a:latin typeface="Courier"/>
-              </a:rPr>
-              <a:t>fun =</a:t>
-            </a:r>
-            <a:r>
-              <a:rPr>
-                <a:solidFill>
-                  <a:srgbClr val="003B4F"/>
-                </a:solidFill>
-                <a:latin typeface="Courier"/>
-              </a:rPr>
-              <a:t> mean, </a:t>
-            </a:r>
-            <a:r>
-              <a:rPr>
-                <a:solidFill>
-                  <a:srgbClr val="657422"/>
-                </a:solidFill>
-                <a:latin typeface="Courier"/>
-              </a:rPr>
-              <a:t>geom =</a:t>
-            </a:r>
-            <a:r>
-              <a:rPr>
-                <a:solidFill>
-                  <a:srgbClr val="003B4F"/>
-                </a:solidFill>
-                <a:latin typeface="Courier"/>
-              </a:rPr>
-              <a:t> </a:t>
-            </a:r>
-            <a:r>
-              <a:rPr>
-                <a:solidFill>
-                  <a:srgbClr val="20794D"/>
-                </a:solidFill>
-                <a:latin typeface="Courier"/>
-              </a:rPr>
-              <a:t>"point"</a:t>
-            </a:r>
-            <a:r>
-              <a:rPr>
-                <a:solidFill>
-                  <a:srgbClr val="003B4F"/>
-                </a:solidFill>
-                <a:latin typeface="Courier"/>
-              </a:rPr>
-              <a:t>, </a:t>
-            </a:r>
-            <a:r>
-              <a:rPr>
-                <a:solidFill>
-                  <a:srgbClr val="657422"/>
-                </a:solidFill>
-                <a:latin typeface="Courier"/>
-              </a:rPr>
-              <a:t>size =</a:t>
-            </a:r>
-            <a:r>
-              <a:rPr>
-                <a:solidFill>
-                  <a:srgbClr val="003B4F"/>
-                </a:solidFill>
-                <a:latin typeface="Courier"/>
-              </a:rPr>
-              <a:t> </a:t>
-            </a:r>
-            <a:r>
-              <a:rPr>
-                <a:solidFill>
-                  <a:srgbClr val="AD0000"/>
-                </a:solidFill>
-                <a:latin typeface="Courier"/>
-              </a:rPr>
-              <a:t>4</a:t>
-            </a:r>
-            <a:r>
-              <a:rPr>
-                <a:solidFill>
-                  <a:srgbClr val="003B4F"/>
-                </a:solidFill>
-                <a:latin typeface="Courier"/>
-              </a:rPr>
-              <a:t>) </a:t>
-            </a:r>
-            <a:r>
-              <a:rPr>
-                <a:solidFill>
-                  <a:srgbClr val="5E5E5E"/>
-                </a:solidFill>
-                <a:latin typeface="Courier"/>
-              </a:rPr>
-              <a:t>+</a:t>
-            </a:r>
-            <a:br/>
-            <a:r>
-              <a:rPr>
-                <a:solidFill>
-                  <a:srgbClr val="003B4F"/>
-                </a:solidFill>
-                <a:latin typeface="Courier"/>
-              </a:rPr>
-              <a:t>  </a:t>
-            </a:r>
-            <a:r>
-              <a:rPr>
-                <a:solidFill>
-                  <a:srgbClr val="4758AB"/>
-                </a:solidFill>
-                <a:latin typeface="Courier"/>
-              </a:rPr>
-              <a:t>stat_summary</a:t>
-            </a:r>
-            <a:r>
-              <a:rPr>
-                <a:solidFill>
-                  <a:srgbClr val="003B4F"/>
-                </a:solidFill>
-                <a:latin typeface="Courier"/>
-              </a:rPr>
-              <a:t>(</a:t>
-            </a:r>
-            <a:br/>
-            <a:r>
-              <a:rPr>
-                <a:solidFill>
-                  <a:srgbClr val="003B4F"/>
-                </a:solidFill>
-                <a:latin typeface="Courier"/>
-              </a:rPr>
-              <a:t>    </a:t>
-            </a:r>
-            <a:r>
-              <a:rPr>
-                <a:solidFill>
-                  <a:srgbClr val="657422"/>
-                </a:solidFill>
-                <a:latin typeface="Courier"/>
-              </a:rPr>
-              <a:t>fun.data =</a:t>
-            </a:r>
-            <a:r>
-              <a:rPr>
-                <a:solidFill>
-                  <a:srgbClr val="003B4F"/>
-                </a:solidFill>
-                <a:latin typeface="Courier"/>
-              </a:rPr>
-              <a:t> mean_se,</a:t>
-            </a:r>
-            <a:br/>
-            <a:r>
-              <a:rPr>
-                <a:solidFill>
-                  <a:srgbClr val="003B4F"/>
-                </a:solidFill>
-                <a:latin typeface="Courier"/>
-              </a:rPr>
-              <a:t>    </a:t>
-            </a:r>
-            <a:r>
-              <a:rPr>
-                <a:solidFill>
-                  <a:srgbClr val="657422"/>
-                </a:solidFill>
-                <a:latin typeface="Courier"/>
-              </a:rPr>
-              <a:t>geom =</a:t>
-            </a:r>
-            <a:r>
-              <a:rPr>
-                <a:solidFill>
-                  <a:srgbClr val="003B4F"/>
-                </a:solidFill>
-                <a:latin typeface="Courier"/>
-              </a:rPr>
-              <a:t> </a:t>
-            </a:r>
-            <a:r>
-              <a:rPr>
-                <a:solidFill>
-                  <a:srgbClr val="20794D"/>
-                </a:solidFill>
-                <a:latin typeface="Courier"/>
-              </a:rPr>
-              <a:t>"errorbar"</a:t>
-            </a:r>
-            <a:r>
-              <a:rPr>
-                <a:solidFill>
-                  <a:srgbClr val="003B4F"/>
-                </a:solidFill>
-                <a:latin typeface="Courier"/>
-              </a:rPr>
-              <a:t>,</a:t>
-            </a:r>
-            <a:br/>
-            <a:r>
-              <a:rPr>
-                <a:solidFill>
-                  <a:srgbClr val="003B4F"/>
-                </a:solidFill>
-                <a:latin typeface="Courier"/>
-              </a:rPr>
-              <a:t>    </a:t>
-            </a:r>
-            <a:r>
-              <a:rPr>
-                <a:solidFill>
-                  <a:srgbClr val="657422"/>
-                </a:solidFill>
-                <a:latin typeface="Courier"/>
-              </a:rPr>
-              <a:t>width =</a:t>
-            </a:r>
-            <a:r>
-              <a:rPr>
-                <a:solidFill>
-                  <a:srgbClr val="003B4F"/>
-                </a:solidFill>
-                <a:latin typeface="Courier"/>
-              </a:rPr>
-              <a:t> </a:t>
-            </a:r>
-            <a:r>
-              <a:rPr>
-                <a:solidFill>
-                  <a:srgbClr val="AD0000"/>
-                </a:solidFill>
-                <a:latin typeface="Courier"/>
-              </a:rPr>
-              <a:t>0.15</a:t>
-            </a:r>
-            <a:r>
-              <a:rPr>
-                <a:solidFill>
-                  <a:srgbClr val="003B4F"/>
-                </a:solidFill>
-                <a:latin typeface="Courier"/>
-              </a:rPr>
-              <a:t>,</a:t>
-            </a:r>
-            <a:br/>
-            <a:r>
-              <a:rPr>
-                <a:solidFill>
-                  <a:srgbClr val="003B4F"/>
-                </a:solidFill>
-                <a:latin typeface="Courier"/>
-              </a:rPr>
-              <a:t>    </a:t>
-            </a:r>
-            <a:r>
-              <a:rPr>
-                <a:solidFill>
-                  <a:srgbClr val="657422"/>
-                </a:solidFill>
-                <a:latin typeface="Courier"/>
-              </a:rPr>
-              <a:t>linewidth =</a:t>
-            </a:r>
-            <a:r>
-              <a:rPr>
-                <a:solidFill>
-                  <a:srgbClr val="003B4F"/>
-                </a:solidFill>
-                <a:latin typeface="Courier"/>
-              </a:rPr>
-              <a:t> </a:t>
-            </a:r>
-            <a:r>
-              <a:rPr>
-                <a:solidFill>
-                  <a:srgbClr val="AD0000"/>
-                </a:solidFill>
-                <a:latin typeface="Courier"/>
-              </a:rPr>
-              <a:t>0.9</a:t>
-            </a:r>
-            <a:br/>
-            <a:r>
-              <a:rPr>
-                <a:solidFill>
-                  <a:srgbClr val="003B4F"/>
-                </a:solidFill>
-                <a:latin typeface="Courier"/>
-              </a:rPr>
-              <a:t>  ) </a:t>
-            </a:r>
-            <a:r>
-              <a:rPr>
-                <a:solidFill>
-                  <a:srgbClr val="5E5E5E"/>
-                </a:solidFill>
-                <a:latin typeface="Courier"/>
-              </a:rPr>
-              <a:t>+</a:t>
-            </a:r>
-            <a:br/>
-            <a:r>
-              <a:rPr>
-                <a:solidFill>
-                  <a:srgbClr val="003B4F"/>
-                </a:solidFill>
-                <a:latin typeface="Courier"/>
-              </a:rPr>
-              <a:t>  </a:t>
-            </a:r>
-            <a:r>
-              <a:rPr>
-                <a:solidFill>
-                  <a:srgbClr val="4758AB"/>
-                </a:solidFill>
-                <a:latin typeface="Courier"/>
-              </a:rPr>
-              <a:t>labs</a:t>
-            </a:r>
-            <a:r>
-              <a:rPr>
-                <a:solidFill>
-                  <a:srgbClr val="003B4F"/>
-                </a:solidFill>
-                <a:latin typeface="Courier"/>
-              </a:rPr>
-              <a:t>(</a:t>
-            </a:r>
-            <a:r>
-              <a:rPr>
-                <a:solidFill>
-                  <a:srgbClr val="657422"/>
-                </a:solidFill>
-                <a:latin typeface="Courier"/>
-              </a:rPr>
-              <a:t>x =</a:t>
-            </a:r>
-            <a:r>
-              <a:rPr>
-                <a:solidFill>
-                  <a:srgbClr val="003B4F"/>
-                </a:solidFill>
-                <a:latin typeface="Courier"/>
-              </a:rPr>
-              <a:t> </a:t>
-            </a:r>
-            <a:r>
-              <a:rPr>
-                <a:solidFill>
-                  <a:srgbClr val="20794D"/>
-                </a:solidFill>
-                <a:latin typeface="Courier"/>
-              </a:rPr>
-              <a:t>"Side"</a:t>
-            </a:r>
-            <a:r>
-              <a:rPr>
-                <a:solidFill>
-                  <a:srgbClr val="003B4F"/>
-                </a:solidFill>
-                <a:latin typeface="Courier"/>
-              </a:rPr>
-              <a:t>, </a:t>
-            </a:r>
-            <a:r>
-              <a:rPr>
-                <a:solidFill>
-                  <a:srgbClr val="657422"/>
-                </a:solidFill>
-                <a:latin typeface="Courier"/>
-              </a:rPr>
-              <a:t>y =</a:t>
-            </a:r>
-            <a:r>
-              <a:rPr>
-                <a:solidFill>
-                  <a:srgbClr val="003B4F"/>
-                </a:solidFill>
-                <a:latin typeface="Courier"/>
-              </a:rPr>
-              <a:t> </a:t>
-            </a:r>
-            <a:r>
-              <a:rPr>
-                <a:solidFill>
-                  <a:srgbClr val="20794D"/>
-                </a:solidFill>
-                <a:latin typeface="Courier"/>
-              </a:rPr>
-              <a:t>"Leaf Weight (g)"</a:t>
-            </a:r>
-            <a:r>
-              <a:rPr>
-                <a:solidFill>
-                  <a:srgbClr val="003B4F"/>
-                </a:solidFill>
-                <a:latin typeface="Courier"/>
-              </a:rPr>
-              <a:t>) </a:t>
-            </a:r>
-            <a:r>
-              <a:rPr>
-                <a:solidFill>
-                  <a:srgbClr val="5E5E5E"/>
-                </a:solidFill>
-                <a:latin typeface="Courier"/>
-              </a:rPr>
-              <a:t>+</a:t>
-            </a:r>
-            <a:br/>
-            <a:r>
-              <a:rPr>
-                <a:solidFill>
-                  <a:srgbClr val="003B4F"/>
-                </a:solidFill>
-                <a:latin typeface="Courier"/>
-              </a:rPr>
-              <a:t>  </a:t>
-            </a:r>
-            <a:r>
-              <a:rPr>
-                <a:solidFill>
-                  <a:srgbClr val="4758AB"/>
-                </a:solidFill>
-                <a:latin typeface="Courier"/>
-              </a:rPr>
-              <a:t>theme_minimal</a:t>
-            </a:r>
-            <a:r>
-              <a:rPr>
-                <a:solidFill>
-                  <a:srgbClr val="003B4F"/>
-                </a:solidFill>
-                <a:latin typeface="Courier"/>
-              </a:rPr>
-              <a:t>() </a:t>
-            </a:r>
-            <a:r>
-              <a:rPr>
-                <a:solidFill>
-                  <a:srgbClr val="5E5E5E"/>
-                </a:solidFill>
-                <a:latin typeface="Courier"/>
-              </a:rPr>
-              <a:t>+</a:t>
-            </a:r>
-            <a:br/>
-            <a:r>
-              <a:rPr>
-                <a:solidFill>
-                  <a:srgbClr val="003B4F"/>
-                </a:solidFill>
-                <a:latin typeface="Courier"/>
-              </a:rPr>
-              <a:t>  </a:t>
-            </a:r>
-            <a:r>
-              <a:rPr>
-                <a:solidFill>
-                  <a:srgbClr val="4758AB"/>
-                </a:solidFill>
-                <a:latin typeface="Courier"/>
-              </a:rPr>
-              <a:t>theme</a:t>
-            </a:r>
-            <a:r>
-              <a:rPr>
-                <a:solidFill>
-                  <a:srgbClr val="003B4F"/>
-                </a:solidFill>
-                <a:latin typeface="Courier"/>
-              </a:rPr>
-              <a:t>(</a:t>
-            </a:r>
-            <a:r>
-              <a:rPr>
-                <a:solidFill>
-                  <a:srgbClr val="657422"/>
-                </a:solidFill>
-                <a:latin typeface="Courier"/>
-              </a:rPr>
-              <a:t>legend.position =</a:t>
-            </a:r>
-            <a:r>
-              <a:rPr>
-                <a:solidFill>
-                  <a:srgbClr val="003B4F"/>
-                </a:solidFill>
-                <a:latin typeface="Courier"/>
-              </a:rPr>
-              <a:t> </a:t>
-            </a:r>
-            <a:r>
-              <a:rPr>
-                <a:solidFill>
-                  <a:srgbClr val="20794D"/>
-                </a:solidFill>
-                <a:latin typeface="Courier"/>
-              </a:rPr>
-              <a:t>"none"</a:t>
-            </a:r>
-            <a:r>
-              <a:rPr>
-                <a:solidFill>
-                  <a:srgbClr val="003B4F"/>
-                </a:solidFill>
-                <a:latin typeface="Courier"/>
-              </a:rPr>
-              <a:t>)</a:t>
-            </a:r>
-            <a:br/>
-            <a:r>
-              <a:rPr>
-                <a:solidFill>
-                  <a:srgbClr val="003B4F"/>
-                </a:solidFill>
-                <a:latin typeface="Courier"/>
-              </a:rPr>
-              <a:t>recap_plot</a:t>
-            </a:r>
-          </a:p>
-        </p:txBody>
-      </p:sp>
-      <p:pic>
-        <p:nvPicPr>
-          <p:cNvPr descr="t_tests_and_hypotheses_files/figure-pptx/recap-plot-1.png" id="0" name="Picture 1"/>
-          <p:cNvPicPr>
-            <a:picLocks noGrp="1" noChangeAspect="1"/>
-          </p:cNvPicPr>
-          <p:nvPr/>
-        </p:nvPicPr>
-        <p:blipFill>
-          <a:blip r:embed="rId2"/>
-          <a:stretch>
-            <a:fillRect/>
-          </a:stretch>
-        </p:blipFill>
-        <p:spPr bwMode="auto">
-          <a:xfrm>
-            <a:off x="127000" y="1562100"/>
-            <a:ext cx="4432300" cy="2730500"/>
-          </a:xfrm>
-          <a:prstGeom prst="rect">
-            <a:avLst/>
-          </a:prstGeom>
-          <a:noFill/>
-          <a:ln w="9525">
-            <a:noFill/>
-            <a:headEnd/>
-            <a:tailEnd/>
-          </a:ln>
-        </p:spPr>
-      </p:pic>
-      <p:sp>
-        <p:nvSpPr>
-          <p:cNvPr id="5" name="Text Placeholder 4"/>
-          <p:cNvSpPr>
-            <a:spLocks noGrp="1"/>
-          </p:cNvSpPr>
-          <p:nvPr>
-            <p:ph idx="3" sz="quarter" type="body"/>
-          </p:nvPr>
-        </p:nvSpPr>
-        <p:spPr/>
-        <p:txBody>
-          <a:bodyPr/>
-          <a:lstStyle/>
-          <a:p>
-            <a:pPr lvl="0" indent="0" marL="0">
+              <a:rPr sz="2000" b="1"/>
+              <a:t>Note</a:t>
+            </a:r>
+          </a:p>
+          <a:p>
+            <a:pPr lvl="0" indent="0" marL="1270000">
               <a:buNone/>
             </a:pPr>
             <a:r>
-              <a:rPr/>
-              <a:t>The means look different — but:</a:t>
-            </a:r>
-          </a:p>
-          <a:p>
-            <a:pPr lvl="0"/>
-            <a:r>
-              <a:rPr/>
-              <a:t>We only have </a:t>
-            </a:r>
-            <a:r>
-              <a:rPr b="1"/>
-              <a:t>10 leaves per group</a:t>
-            </a:r>
-          </a:p>
-          <a:p>
-            <a:pPr lvl="0"/>
-            <a:r>
-              <a:rPr/>
-              <a:t>There is </a:t>
-            </a:r>
-            <a:r>
-              <a:rPr b="1"/>
-              <a:t>natural variability</a:t>
-            </a:r>
-            <a:r>
-              <a:rPr/>
-              <a:t> within each group</a:t>
-            </a:r>
-          </a:p>
-          <a:p>
-            <a:pPr lvl="0"/>
-            <a:r>
-              <a:rPr/>
-              <a:t>The groups’ ranges </a:t>
-            </a:r>
-            <a:r>
-              <a:rPr b="1"/>
-              <a:t>overlap</a:t>
-            </a:r>
-            <a:r>
-              <a:rPr/>
-              <a:t> somewhat</a:t>
-            </a:r>
-          </a:p>
-          <a:p>
-            <a:pPr lvl="0" indent="0" marL="0">
-              <a:buNone/>
-            </a:pPr>
-            <a:r>
-              <a:rPr/>
-              <a:t>A </a:t>
-            </a:r>
-            <a:r>
-              <a:rPr i="1"/>
-              <a:t>p</a:t>
-            </a:r>
-            <a:r>
-              <a:rPr/>
-              <a:t>-value tells us:</a:t>
-            </a:r>
-          </a:p>
-          <a:p>
-            <a:pPr lvl="0" indent="0" marL="1270000">
-              <a:buNone/>
-            </a:pPr>
+              <a:rPr sz="2000" b="1"/>
+              <a:t>🔮 Predict first:</a:t>
+            </a:r>
+            <a:r>
+              <a:rPr sz="2000"/>
+              <a:t> The two group means differ by about 4 g. With only 10 leaves per side — commit now to a yes/no: is that gap big enough to be </a:t>
+            </a:r>
             <a:r>
               <a:rPr sz="2000" i="1"/>
-              <a:t>“If H₀ were true, how often would we see a gap this large just by chance?”</a:t>
-            </a:r>
-          </a:p>
-          <a:p>
-            <a:pPr lvl="0" indent="0" marL="0">
-              <a:buNone/>
-            </a:pPr>
-            <a:r>
-              <a:rPr/>
-              <a:t>Small </a:t>
-            </a:r>
-            <a:r>
-              <a:rPr i="1"/>
-              <a:t>p</a:t>
-            </a:r>
-            <a:r>
-              <a:rPr/>
-              <a:t> → the gap is unlikely to be chance.</a:t>
+              <a:t>statistically significant</a:t>
+            </a:r>
+            <a:r>
+              <a:rPr sz="2000"/>
+              <a:t>? You’ll find out in Chunk 3.</a:t>
             </a:r>
           </a:p>
         </p:txBody>
@@ -18928,7 +20177,665 @@
 </p:sld>
 </file>
 
-<file path=ppt/slides/slide8.xml><?xml version="1.0" encoding="UTF-8"?><p:sld xmlns:a="http://schemas.openxmlformats.org/drawingml/2006/main" xmlns:r="http://schemas.openxmlformats.org/officeDocument/2006/relationships" xmlns:p="http://schemas.openxmlformats.org/presentationml/2006/main"><p:cSld><p:spTree><p:nvGrpSpPr><p:cNvPr id="1" name="" /><p:cNvGrpSpPr /><p:nvPr /></p:nvGrpSpPr><p:grpSpPr><a:xfrm><a:off x="0" y="0" /><a:ext cx="0" cy="0" /><a:chOff x="0" y="0" /><a:chExt cx="0" cy="0" /></a:xfrm></p:grpSpPr><p:sp><p:nvSpPr><p:cNvPr id="2" name="Title 1" /><p:cNvSpPr><a:spLocks noGrp="1" /></p:cNvSpPr><p:nvPr><p:ph type="title" /></p:nvPr></p:nvSpPr><p:spPr><a:xfrm><a:off x="0" y="0" /><a:ext cx="9144000" cy="602780" /></a:xfrm><a:solidFill><a:srgbClr val="1A1A2E" /></a:solidFill></p:spPr><p:txBody><a:bodyPr /><a:lstStyle /><a:p><a:pPr lvl="0" indent="0" marL="0"><a:buNone /></a:pPr><a:r><a:rPr /><a:t>What Is a Two-Sample t-Test?</a:t></a:r></a:p></p:txBody></p:sp><mc:AlternateContent xmlns:mc="http://schemas.openxmlformats.org/markup-compatibility/2006"><mc:Choice xmlns:a14="http://schemas.microsoft.com/office/drawing/2010/main" Requires="a14"><p:sp><p:nvSpPr><p:cNvPr id="3" name="Content Placeholder 2" /><p:cNvSpPr><a:spLocks noGrp="1" /></p:cNvSpPr><p:nvPr><p:ph idx="1" sz="half" /></p:nvPr></p:nvSpPr><p:spPr /><p:txBody><a:bodyPr /><a:lstStyle /><a:p><a:pPr lvl="0" indent="0" marL="0"><a:buNone /></a:pPr><a:r><a:rPr /><a:t>A two-sample t-test compares the </a:t></a:r><a:r><a:rPr b="1" /><a:t>means of two independent groups</a:t></a:r><a:r><a:rPr /><a:t>.</a:t></a:r></a:p><a:p><a:pPr lvl="0" indent="0" marL="0"><a:buNone /></a:pPr><a:r><a:rPr /><a:t>It asks: </a:t></a:r><a:r><a:rPr i="1" /><a:t>Could both groups plausibly be drawn from populations with the same mean?</a:t></a:r></a:p><a:p><a:pPr lvl="0" indent="0" marL="0"><a:buNone /></a:pPr><a:r><a:rPr /><a:t>The </a:t></a:r><a:r><a:rPr b="1" /><a:t>t-statistic</a:t></a:r><a:r><a:rPr /><a:t> is:</a:t></a:r></a:p><a:p><a:pPr lvl="0" indent="0" marL="0"><a:buNone /></a:pPr><a14:m><m:oMathPara xmlns:m="http://schemas.openxmlformats.org/officeDocument/2006/math"><m:oMathParaPr><m:jc m:val="center" /></m:oMathParaPr><m:oMath><m:r><m:t>t</m:t></m:r><m:r><m:rPr><m:sty m:val="p" /></m:rPr><m:t>=</m:t></m:r><m:f><m:fPr><m:type m:val="bar" /></m:fPr><m:num><m:sSub><m:e><m:acc><m:accPr><m:chr m:val="‾" /></m:accPr><m:e><m:r><m:t>x</m:t></m:r></m:e></m:acc></m:e><m:sub><m:r><m:t>1</m:t></m:r></m:sub></m:sSub><m:r><m:rPr><m:sty m:val="p" /></m:rPr><m:t>−</m:t></m:r><m:sSub><m:e><m:acc><m:accPr><m:chr m:val="‾" /></m:accPr><m:e><m:r><m:t>x</m:t></m:r></m:e></m:acc></m:e><m:sub><m:r><m:t>2</m:t></m:r></m:sub></m:sSub></m:num><m:den><m:sSub><m:e><m:r><m:rPr><m:nor /><m:sty m:val="p" /></m:rPr><m:t>SE</m:t></m:r></m:e><m:sub><m:r><m:rPr><m:nor /><m:sty m:val="p" /></m:rPr><m:t>diff</m:t></m:r></m:sub></m:sSub></m:den></m:f></m:oMath></m:oMathPara></a14:m></a:p><a:p><a:pPr lvl="0" /><a:r><a:rPr /><a:t>Numerator: the </a:t></a:r><a:r><a:rPr b="1" /><a:t>observed difference</a:t></a:r><a:r><a:rPr /><a:t> in means</a:t></a:r></a:p><a:p><a:pPr lvl="0" /><a:r><a:rPr /><a:t>Denominator: the </a:t></a:r><a:r><a:rPr b="1" /><a:t>uncertainty</a:t></a:r><a:r><a:rPr /><a:t> in that difference (SE of the difference)</a:t></a:r></a:p><a:p><a:pPr lvl="0" indent="0" marL="0"><a:buNone /></a:pPr><a:r><a:rPr b="1" /><a:t>Large |t|</a:t></a:r><a:r><a:rPr /><a:t> → the difference is large relative to the noise → small </a:t></a:r><a:r><a:rPr i="1" /><a:t>p</a:t></a:r><a:r><a:rPr /><a:t>-value</a:t></a:r></a:p></p:txBody></p:sp></mc:Choice></mc:AlternateContent><p:graphicFrame><p:nvGraphicFramePr><p:cNvPr id="6" name="Content Placeholder 5" /><p:cNvGraphicFramePr><a:graphicFrameLocks noGrp="1" /></p:cNvGraphicFramePr><p:nvPr><p:ph idx="1" /></p:nvPr></p:nvGraphicFramePr><p:xfrm><a:off x="4495800" y="660400" /><a:ext cx="4406900" cy="3810000" /></p:xfrm><a:graphic><a:graphicData uri="http://schemas.openxmlformats.org/drawingml/2006/table"><a:tbl><a:tblPr firstRow="1" bandRow="1"><a:tableStyleId>{5C22544A-7EE6-4342-B048-85BDC9FD1C3A}</a:tableStyleId></a:tblPr><a:tblGrid><a:gridCol w="2197100" /><a:gridCol w="2197100" /></a:tblGrid><a:tr h="0"><a:tc><a:txBody><a:bodyPr /><a:lstStyle /><a:p><a:pPr lvl="0" indent="0" marL="0"><a:buNone /></a:pPr><a:r><a:rPr /><a:t>Component</a:t></a:r></a:p></a:txBody><a:tcPr /></a:tc><a:tc><a:txBody><a:bodyPr /><a:lstStyle /><a:p><a:pPr lvl="0" indent="0" marL="0"><a:buNone /></a:pPr><a:r><a:rPr /><a:t>Our context</a:t></a:r></a:p></a:txBody><a:tcPr /></a:tc></a:tr><a:tr h="0"><a:tc><a:txBody><a:bodyPr /><a:lstStyle /><a:p><a:pPr lvl="0" indent="0" marL="0"><a:buNone /></a:pPr><a:r><a:rPr /><a:t>Group 1</a:t></a:r></a:p></a:txBody></a:tc><a:tc><a:txBody><a:bodyPr /><a:lstStyle /><a:p><a:pPr lvl="0" indent="0" marL="0"><a:buNone /></a:pPr><a:r><a:rPr /><a:t>Shady leaves</a:t></a:r></a:p></a:txBody></a:tc></a:tr><a:tr h="0"><a:tc><a:txBody><a:bodyPr /><a:lstStyle /><a:p><a:pPr lvl="0" indent="0" marL="0"><a:buNone /></a:pPr><a:r><a:rPr /><a:t>Group 2</a:t></a:r></a:p></a:txBody></a:tc><a:tc><a:txBody><a:bodyPr /><a:lstStyle /><a:p><a:pPr lvl="0" indent="0" marL="0"><a:buNone /></a:pPr><a:r><a:rPr /><a:t>Sunny leaves</a:t></a:r></a:p></a:txBody></a:tc></a:tr><a:tr h="0"><a:tc><a:txBody><a:bodyPr /><a:lstStyle /><a:p><a:pPr lvl="0" indent="0" marL="0"><a:buNone /></a:pPr><a:r><a:rPr /><a:t>Measurement</a:t></a:r></a:p></a:txBody></a:tc><a:tc><a:txBody><a:bodyPr /><a:lstStyle /><a:p><a:pPr lvl="0" indent="0" marL="0"><a:buNone /></a:pPr><a:r><a:rPr><a:latin typeface="Courier" /></a:rPr><a:t>weight_g</a:t></a:r></a:p></a:txBody></a:tc></a:tr><a:tr h="0"><a:tc><a:txBody><a:bodyPr /><a:lstStyle /><a:p><a:pPr lvl="0" indent="0" marL="0"><a:buNone /></a:pPr><a:r><a:rPr /><a:t>H₀</a:t></a:r></a:p></a:txBody></a:tc><a:tc><a:txBody><a:bodyPr /><a:lstStyle /><a:p><a:pPr lvl="0" indent="0" marL="0"><a:buNone /></a:pPr><a14:m><m:oMath xmlns:m="http://schemas.openxmlformats.org/officeDocument/2006/math"><m:sSub><m:e><m:r><m:t>μ</m:t></m:r></m:e><m:sub><m:r><m:t>s</m:t></m:r><m:r><m:t>h</m:t></m:r><m:r><m:t>a</m:t></m:r><m:r><m:t>d</m:t></m:r><m:r><m:t>y</m:t></m:r></m:sub></m:sSub><m:r><m:rPr><m:sty m:val="p" /></m:rPr><m:t>=</m:t></m:r><m:sSub><m:e><m:r><m:t>μ</m:t></m:r></m:e><m:sub><m:r><m:t>s</m:t></m:r><m:r><m:t>u</m:t></m:r><m:r><m:t>n</m:t></m:r><m:r><m:t>n</m:t></m:r><m:r><m:t>y</m:t></m:r></m:sub></m:sSub></m:oMath></a14:m></a:p></a:txBody></a:tc></a:tr><a:tr h="0"><a:tc><a:txBody><a:bodyPr /><a:lstStyle /><a:p><a:pPr lvl="0" indent="0" marL="0"><a:buNone /></a:pPr><a:r><a:rPr /><a:t>Hₐ</a:t></a:r></a:p></a:txBody></a:tc><a:tc><a:txBody><a:bodyPr /><a:lstStyle /><a:p><a:pPr lvl="0" indent="0" marL="0"><a:buNone /></a:pPr><a14:m><m:oMath xmlns:m="http://schemas.openxmlformats.org/officeDocument/2006/math"><m:sSub><m:e><m:r><m:t>μ</m:t></m:r></m:e><m:sub><m:r><m:t>s</m:t></m:r><m:r><m:t>h</m:t></m:r><m:r><m:t>a</m:t></m:r><m:r><m:t>d</m:t></m:r><m:r><m:t>y</m:t></m:r></m:sub></m:sSub><m:r><m:rPr><m:sty m:val="p" /></m:rPr><m:t>≠</m:t></m:r><m:sSub><m:e><m:r><m:t>μ</m:t></m:r></m:e><m:sub><m:r><m:t>s</m:t></m:r><m:r><m:t>u</m:t></m:r><m:r><m:t>n</m:t></m:r><m:r><m:t>n</m:t></m:r><m:r><m:t>y</m:t></m:r></m:sub></m:sSub></m:oMath></a14:m></a:p></a:txBody></a:tc></a:tr></a:tbl></a:graphicData></a:graphic></p:graphicFrame></p:spTree></p:cSld></p:sld>
+<file path=ppt/slides/slide8.xml><?xml version="1.0" encoding="utf-8"?>
+<p:sld xmlns:a="http://schemas.openxmlformats.org/drawingml/2006/main" xmlns:r="http://schemas.openxmlformats.org/officeDocument/2006/relationships" xmlns:p="http://schemas.openxmlformats.org/presentationml/2006/main">
+  <p:cSld>
+    <p:spTree>
+      <p:nvGrpSpPr>
+        <p:cNvPr id="1" name=""/>
+        <p:cNvGrpSpPr/>
+        <p:nvPr/>
+      </p:nvGrpSpPr>
+      <p:grpSpPr>
+        <a:xfrm>
+          <a:off x="0" y="0"/>
+          <a:ext cx="0" cy="0"/>
+          <a:chOff x="0" y="0"/>
+          <a:chExt cx="0" cy="0"/>
+        </a:xfrm>
+      </p:grpSpPr>
+      <p:sp>
+        <p:nvSpPr>
+          <p:cNvPr id="3" name="Content Placeholder 2"/>
+          <p:cNvSpPr>
+            <a:spLocks noGrp="1"/>
+          </p:cNvSpPr>
+          <p:nvPr>
+            <p:ph idx="1" sz="half"/>
+          </p:nvPr>
+        </p:nvSpPr>
+        <p:spPr/>
+        <p:txBody>
+          <a:bodyPr/>
+          <a:lstStyle/>
+          <a:p>
+            <a:pPr lvl="0" indent="0">
+              <a:buNone/>
+            </a:pPr>
+            <a:r>
+              <a:rPr>
+                <a:solidFill>
+                  <a:srgbClr val="5E5E5E"/>
+                </a:solidFill>
+                <a:latin typeface="Courier"/>
+              </a:rPr>
+              <a:t># Quick recap from Lecture 03 ----------------------------</a:t>
+            </a:r>
+            <a:br/>
+            <a:r>
+              <a:rPr>
+                <a:solidFill>
+                  <a:srgbClr val="003B4F"/>
+                </a:solidFill>
+                <a:latin typeface="Courier"/>
+              </a:rPr>
+              <a:t>recap_df &lt;- tree_df </a:t>
+            </a:r>
+            <a:r>
+              <a:rPr>
+                <a:solidFill>
+                  <a:srgbClr val="5E5E5E"/>
+                </a:solidFill>
+                <a:latin typeface="Courier"/>
+              </a:rPr>
+              <a:t>%&gt;%</a:t>
+            </a:r>
+            <a:br/>
+            <a:r>
+              <a:rPr>
+                <a:solidFill>
+                  <a:srgbClr val="003B4F"/>
+                </a:solidFill>
+                <a:latin typeface="Courier"/>
+              </a:rPr>
+              <a:t>  </a:t>
+            </a:r>
+            <a:r>
+              <a:rPr>
+                <a:solidFill>
+                  <a:srgbClr val="4758AB"/>
+                </a:solidFill>
+                <a:latin typeface="Courier"/>
+              </a:rPr>
+              <a:t>group_by</a:t>
+            </a:r>
+            <a:r>
+              <a:rPr>
+                <a:solidFill>
+                  <a:srgbClr val="003B4F"/>
+                </a:solidFill>
+                <a:latin typeface="Courier"/>
+              </a:rPr>
+              <a:t>(side) </a:t>
+            </a:r>
+            <a:r>
+              <a:rPr>
+                <a:solidFill>
+                  <a:srgbClr val="5E5E5E"/>
+                </a:solidFill>
+                <a:latin typeface="Courier"/>
+              </a:rPr>
+              <a:t>%&gt;%</a:t>
+            </a:r>
+            <a:br/>
+            <a:r>
+              <a:rPr>
+                <a:solidFill>
+                  <a:srgbClr val="003B4F"/>
+                </a:solidFill>
+                <a:latin typeface="Courier"/>
+              </a:rPr>
+              <a:t>  </a:t>
+            </a:r>
+            <a:r>
+              <a:rPr>
+                <a:solidFill>
+                  <a:srgbClr val="4758AB"/>
+                </a:solidFill>
+                <a:latin typeface="Courier"/>
+              </a:rPr>
+              <a:t>summarize</a:t>
+            </a:r>
+            <a:r>
+              <a:rPr>
+                <a:solidFill>
+                  <a:srgbClr val="003B4F"/>
+                </a:solidFill>
+                <a:latin typeface="Courier"/>
+              </a:rPr>
+              <a:t>(</a:t>
+            </a:r>
+            <a:br/>
+            <a:r>
+              <a:rPr>
+                <a:solidFill>
+                  <a:srgbClr val="003B4F"/>
+                </a:solidFill>
+                <a:latin typeface="Courier"/>
+              </a:rPr>
+              <a:t>    </a:t>
+            </a:r>
+            <a:r>
+              <a:rPr>
+                <a:solidFill>
+                  <a:srgbClr val="657422"/>
+                </a:solidFill>
+                <a:latin typeface="Courier"/>
+              </a:rPr>
+              <a:t>n =</a:t>
+            </a:r>
+            <a:r>
+              <a:rPr>
+                <a:solidFill>
+                  <a:srgbClr val="003B4F"/>
+                </a:solidFill>
+                <a:latin typeface="Courier"/>
+              </a:rPr>
+              <a:t> </a:t>
+            </a:r>
+            <a:r>
+              <a:rPr>
+                <a:solidFill>
+                  <a:srgbClr val="4758AB"/>
+                </a:solidFill>
+                <a:latin typeface="Courier"/>
+              </a:rPr>
+              <a:t>sum</a:t>
+            </a:r>
+            <a:r>
+              <a:rPr>
+                <a:solidFill>
+                  <a:srgbClr val="003B4F"/>
+                </a:solidFill>
+                <a:latin typeface="Courier"/>
+              </a:rPr>
+              <a:t>(</a:t>
+            </a:r>
+            <a:r>
+              <a:rPr>
+                <a:solidFill>
+                  <a:srgbClr val="5E5E5E"/>
+                </a:solidFill>
+                <a:latin typeface="Courier"/>
+              </a:rPr>
+              <a:t>!</a:t>
+            </a:r>
+            <a:r>
+              <a:rPr>
+                <a:solidFill>
+                  <a:srgbClr val="4758AB"/>
+                </a:solidFill>
+                <a:latin typeface="Courier"/>
+              </a:rPr>
+              <a:t>is.na</a:t>
+            </a:r>
+            <a:r>
+              <a:rPr>
+                <a:solidFill>
+                  <a:srgbClr val="003B4F"/>
+                </a:solidFill>
+                <a:latin typeface="Courier"/>
+              </a:rPr>
+              <a:t>(weight_g)),</a:t>
+            </a:r>
+            <a:br/>
+            <a:r>
+              <a:rPr>
+                <a:solidFill>
+                  <a:srgbClr val="003B4F"/>
+                </a:solidFill>
+                <a:latin typeface="Courier"/>
+              </a:rPr>
+              <a:t>    </a:t>
+            </a:r>
+            <a:r>
+              <a:rPr>
+                <a:solidFill>
+                  <a:srgbClr val="657422"/>
+                </a:solidFill>
+                <a:latin typeface="Courier"/>
+              </a:rPr>
+              <a:t>mean_wt =</a:t>
+            </a:r>
+            <a:r>
+              <a:rPr>
+                <a:solidFill>
+                  <a:srgbClr val="003B4F"/>
+                </a:solidFill>
+                <a:latin typeface="Courier"/>
+              </a:rPr>
+              <a:t> </a:t>
+            </a:r>
+            <a:r>
+              <a:rPr>
+                <a:solidFill>
+                  <a:srgbClr val="4758AB"/>
+                </a:solidFill>
+                <a:latin typeface="Courier"/>
+              </a:rPr>
+              <a:t>round</a:t>
+            </a:r>
+            <a:r>
+              <a:rPr>
+                <a:solidFill>
+                  <a:srgbClr val="003B4F"/>
+                </a:solidFill>
+                <a:latin typeface="Courier"/>
+              </a:rPr>
+              <a:t>(</a:t>
+            </a:r>
+            <a:r>
+              <a:rPr>
+                <a:solidFill>
+                  <a:srgbClr val="4758AB"/>
+                </a:solidFill>
+                <a:latin typeface="Courier"/>
+              </a:rPr>
+              <a:t>mean</a:t>
+            </a:r>
+            <a:r>
+              <a:rPr>
+                <a:solidFill>
+                  <a:srgbClr val="003B4F"/>
+                </a:solidFill>
+                <a:latin typeface="Courier"/>
+              </a:rPr>
+              <a:t>(weight_g, </a:t>
+            </a:r>
+            <a:r>
+              <a:rPr>
+                <a:solidFill>
+                  <a:srgbClr val="657422"/>
+                </a:solidFill>
+                <a:latin typeface="Courier"/>
+              </a:rPr>
+              <a:t>na.rm =</a:t>
+            </a:r>
+            <a:r>
+              <a:rPr>
+                <a:solidFill>
+                  <a:srgbClr val="003B4F"/>
+                </a:solidFill>
+                <a:latin typeface="Courier"/>
+              </a:rPr>
+              <a:t> </a:t>
+            </a:r>
+            <a:r>
+              <a:rPr>
+                <a:solidFill>
+                  <a:srgbClr val="8F5902"/>
+                </a:solidFill>
+                <a:latin typeface="Courier"/>
+              </a:rPr>
+              <a:t>TRUE</a:t>
+            </a:r>
+            <a:r>
+              <a:rPr>
+                <a:solidFill>
+                  <a:srgbClr val="003B4F"/>
+                </a:solidFill>
+                <a:latin typeface="Courier"/>
+              </a:rPr>
+              <a:t>), </a:t>
+            </a:r>
+            <a:r>
+              <a:rPr>
+                <a:solidFill>
+                  <a:srgbClr val="AD0000"/>
+                </a:solidFill>
+                <a:latin typeface="Courier"/>
+              </a:rPr>
+              <a:t>2</a:t>
+            </a:r>
+            <a:r>
+              <a:rPr>
+                <a:solidFill>
+                  <a:srgbClr val="003B4F"/>
+                </a:solidFill>
+                <a:latin typeface="Courier"/>
+              </a:rPr>
+              <a:t>),</a:t>
+            </a:r>
+            <a:br/>
+            <a:r>
+              <a:rPr>
+                <a:solidFill>
+                  <a:srgbClr val="003B4F"/>
+                </a:solidFill>
+                <a:latin typeface="Courier"/>
+              </a:rPr>
+              <a:t>    </a:t>
+            </a:r>
+            <a:r>
+              <a:rPr>
+                <a:solidFill>
+                  <a:srgbClr val="657422"/>
+                </a:solidFill>
+                <a:latin typeface="Courier"/>
+              </a:rPr>
+              <a:t>sd_wt =</a:t>
+            </a:r>
+            <a:r>
+              <a:rPr>
+                <a:solidFill>
+                  <a:srgbClr val="003B4F"/>
+                </a:solidFill>
+                <a:latin typeface="Courier"/>
+              </a:rPr>
+              <a:t> </a:t>
+            </a:r>
+            <a:r>
+              <a:rPr>
+                <a:solidFill>
+                  <a:srgbClr val="4758AB"/>
+                </a:solidFill>
+                <a:latin typeface="Courier"/>
+              </a:rPr>
+              <a:t>round</a:t>
+            </a:r>
+            <a:r>
+              <a:rPr>
+                <a:solidFill>
+                  <a:srgbClr val="003B4F"/>
+                </a:solidFill>
+                <a:latin typeface="Courier"/>
+              </a:rPr>
+              <a:t>(</a:t>
+            </a:r>
+            <a:r>
+              <a:rPr>
+                <a:solidFill>
+                  <a:srgbClr val="4758AB"/>
+                </a:solidFill>
+                <a:latin typeface="Courier"/>
+              </a:rPr>
+              <a:t>sd</a:t>
+            </a:r>
+            <a:r>
+              <a:rPr>
+                <a:solidFill>
+                  <a:srgbClr val="003B4F"/>
+                </a:solidFill>
+                <a:latin typeface="Courier"/>
+              </a:rPr>
+              <a:t>(weight_g, </a:t>
+            </a:r>
+            <a:r>
+              <a:rPr>
+                <a:solidFill>
+                  <a:srgbClr val="657422"/>
+                </a:solidFill>
+                <a:latin typeface="Courier"/>
+              </a:rPr>
+              <a:t>na.rm =</a:t>
+            </a:r>
+            <a:r>
+              <a:rPr>
+                <a:solidFill>
+                  <a:srgbClr val="003B4F"/>
+                </a:solidFill>
+                <a:latin typeface="Courier"/>
+              </a:rPr>
+              <a:t> </a:t>
+            </a:r>
+            <a:r>
+              <a:rPr>
+                <a:solidFill>
+                  <a:srgbClr val="8F5902"/>
+                </a:solidFill>
+                <a:latin typeface="Courier"/>
+              </a:rPr>
+              <a:t>TRUE</a:t>
+            </a:r>
+            <a:r>
+              <a:rPr>
+                <a:solidFill>
+                  <a:srgbClr val="003B4F"/>
+                </a:solidFill>
+                <a:latin typeface="Courier"/>
+              </a:rPr>
+              <a:t>), </a:t>
+            </a:r>
+            <a:r>
+              <a:rPr>
+                <a:solidFill>
+                  <a:srgbClr val="AD0000"/>
+                </a:solidFill>
+                <a:latin typeface="Courier"/>
+              </a:rPr>
+              <a:t>2</a:t>
+            </a:r>
+            <a:r>
+              <a:rPr>
+                <a:solidFill>
+                  <a:srgbClr val="003B4F"/>
+                </a:solidFill>
+                <a:latin typeface="Courier"/>
+              </a:rPr>
+              <a:t>),</a:t>
+            </a:r>
+            <a:br/>
+            <a:r>
+              <a:rPr>
+                <a:solidFill>
+                  <a:srgbClr val="003B4F"/>
+                </a:solidFill>
+                <a:latin typeface="Courier"/>
+              </a:rPr>
+              <a:t>    </a:t>
+            </a:r>
+            <a:r>
+              <a:rPr>
+                <a:solidFill>
+                  <a:srgbClr val="657422"/>
+                </a:solidFill>
+                <a:latin typeface="Courier"/>
+              </a:rPr>
+              <a:t>se_wt =</a:t>
+            </a:r>
+            <a:r>
+              <a:rPr>
+                <a:solidFill>
+                  <a:srgbClr val="003B4F"/>
+                </a:solidFill>
+                <a:latin typeface="Courier"/>
+              </a:rPr>
+              <a:t> </a:t>
+            </a:r>
+            <a:r>
+              <a:rPr>
+                <a:solidFill>
+                  <a:srgbClr val="4758AB"/>
+                </a:solidFill>
+                <a:latin typeface="Courier"/>
+              </a:rPr>
+              <a:t>round</a:t>
+            </a:r>
+            <a:r>
+              <a:rPr>
+                <a:solidFill>
+                  <a:srgbClr val="003B4F"/>
+                </a:solidFill>
+                <a:latin typeface="Courier"/>
+              </a:rPr>
+              <a:t>(sd_wt </a:t>
+            </a:r>
+            <a:r>
+              <a:rPr>
+                <a:solidFill>
+                  <a:srgbClr val="5E5E5E"/>
+                </a:solidFill>
+                <a:latin typeface="Courier"/>
+              </a:rPr>
+              <a:t>/</a:t>
+            </a:r>
+            <a:r>
+              <a:rPr>
+                <a:solidFill>
+                  <a:srgbClr val="003B4F"/>
+                </a:solidFill>
+                <a:latin typeface="Courier"/>
+              </a:rPr>
+              <a:t> </a:t>
+            </a:r>
+            <a:r>
+              <a:rPr>
+                <a:solidFill>
+                  <a:srgbClr val="4758AB"/>
+                </a:solidFill>
+                <a:latin typeface="Courier"/>
+              </a:rPr>
+              <a:t>sqrt</a:t>
+            </a:r>
+            <a:r>
+              <a:rPr>
+                <a:solidFill>
+                  <a:srgbClr val="003B4F"/>
+                </a:solidFill>
+                <a:latin typeface="Courier"/>
+              </a:rPr>
+              <a:t>(n), </a:t>
+            </a:r>
+            <a:r>
+              <a:rPr>
+                <a:solidFill>
+                  <a:srgbClr val="AD0000"/>
+                </a:solidFill>
+                <a:latin typeface="Courier"/>
+              </a:rPr>
+              <a:t>2</a:t>
+            </a:r>
+            <a:r>
+              <a:rPr>
+                <a:solidFill>
+                  <a:srgbClr val="003B4F"/>
+                </a:solidFill>
+                <a:latin typeface="Courier"/>
+              </a:rPr>
+              <a:t>)</a:t>
+            </a:r>
+            <a:br/>
+            <a:r>
+              <a:rPr>
+                <a:solidFill>
+                  <a:srgbClr val="003B4F"/>
+                </a:solidFill>
+                <a:latin typeface="Courier"/>
+              </a:rPr>
+              <a:t>  )</a:t>
+            </a:r>
+            <a:br/>
+            <a:r>
+              <a:rPr>
+                <a:solidFill>
+                  <a:srgbClr val="003B4F"/>
+                </a:solidFill>
+                <a:latin typeface="Courier"/>
+              </a:rPr>
+              <a:t>recap_df</a:t>
+            </a:r>
+          </a:p>
+          <a:p>
+            <a:pPr lvl="0" indent="0">
+              <a:buNone/>
+            </a:pPr>
+            <a:r>
+              <a:rPr>
+                <a:latin typeface="Courier"/>
+              </a:rPr>
+              <a:t># A tibble: 2 × 5
+  side      n mean_wt sd_wt se_wt
+  &lt;chr&gt; &lt;int&gt;   &lt;dbl&gt; &lt;dbl&gt; &lt;dbl&gt;
+1 shady    10     7.8  1.03  0.33
+2 sunny    10     3.8  0.79  0.25</a:t>
+            </a:r>
+          </a:p>
+        </p:txBody>
+      </p:sp>
+      <p:sp>
+        <p:nvSpPr>
+          <p:cNvPr id="4" name="Content Placeholder 3"/>
+          <p:cNvSpPr>
+            <a:spLocks noGrp="1"/>
+          </p:cNvSpPr>
+          <p:nvPr>
+            <p:ph idx="2" sz="half"/>
+          </p:nvPr>
+        </p:nvSpPr>
+        <p:spPr/>
+        <p:txBody>
+          <a:bodyPr/>
+          <a:lstStyle/>
+          <a:p>
+            <a:pPr lvl="0"/>
+            <a:r>
+              <a:rPr/>
+              <a:t>RESULTS:</a:t>
+            </a:r>
+          </a:p>
+          <a:p>
+            <a:pPr lvl="1"/>
+            <a:r>
+              <a:rPr/>
+              <a:t>Shady mean: </a:t>
+            </a:r>
+            <a:r>
+              <a:rPr b="1"/>
+              <a:t>7.80 g</a:t>
+            </a:r>
+          </a:p>
+          <a:p>
+            <a:pPr lvl="1"/>
+            <a:r>
+              <a:rPr/>
+              <a:t>Sunny mean: </a:t>
+            </a:r>
+            <a:r>
+              <a:rPr b="1"/>
+              <a:t>3.80 g</a:t>
+            </a:r>
+          </a:p>
+          <a:p>
+            <a:pPr lvl="1"/>
+            <a:r>
+              <a:rPr/>
+              <a:t>Difference: </a:t>
+            </a:r>
+            <a:r>
+              <a:rPr b="1"/>
+              <a:t>4.0 g</a:t>
+            </a:r>
+            <a:r>
+              <a:rPr/>
+              <a:t> — a big gap!</a:t>
+            </a:r>
+          </a:p>
+          <a:p>
+            <a:pPr lvl="0"/>
+            <a:r>
+              <a:rPr b="1"/>
+              <a:t>But is that gap real, or could it just be sampling noise?</a:t>
+            </a:r>
+          </a:p>
+          <a:p>
+            <a:pPr lvl="0"/>
+            <a:r>
+              <a:rPr/>
+              <a:t>With only n = 10 per group, random chance could produce apparent differences.</a:t>
+            </a:r>
+          </a:p>
+          <a:p>
+            <a:pPr lvl="0"/>
+            <a:r>
+              <a:rPr b="1"/>
+              <a:t>We need a formal test to quantify the probability.</a:t>
+            </a:r>
+          </a:p>
+        </p:txBody>
+      </p:sp>
+    </p:spTree>
+  </p:cSld>
+</p:sld>
 </file>
 
 <file path=ppt/slides/slide9.xml><?xml version="1.0" encoding="utf-8"?>
@@ -18961,11 +20868,8 @@
         <p:spPr>
           <a:xfrm>
             <a:off x="0" y="0"/>
-            <a:ext cx="9144000" cy="602780"/>
+            <a:ext cx="9144000" cy="582780"/>
           </a:xfrm>
-          <a:solidFill>
-            <a:srgbClr val="1A1A2E"/>
-          </a:solidFill>
         </p:spPr>
         <p:txBody>
           <a:bodyPr/>
@@ -18976,273 +20880,19 @@
             </a:pPr>
             <a:r>
               <a:rPr/>
-              <a:t>Why Welch’s? — Don’t Assume Equal Variance</a:t>
+              <a:t>🧩 Chunk 1 of 4 · Why We Test &amp; the t-Statistic</a:t>
             </a:r>
           </a:p>
         </p:txBody>
       </p:sp>
-      <mc:AlternateContent xmlns:mc="http://schemas.openxmlformats.org/markup-compatibility/2006">
-        <mc:Choice xmlns:a14="http://schemas.microsoft.com/office/drawing/2010/main" Requires="a14">
-          <p:sp>
-            <p:nvSpPr>
-              <p:cNvPr id="3" name="Content Placeholder 2"/>
-              <p:cNvSpPr>
-                <a:spLocks noGrp="1"/>
-              </p:cNvSpPr>
-              <p:nvPr>
-                <p:ph idx="1" sz="half"/>
-              </p:nvPr>
-            </p:nvSpPr>
-            <p:spPr/>
-            <p:txBody>
-              <a:bodyPr/>
-              <a:lstStyle/>
-              <a:p>
-                <a:pPr lvl="0" indent="0" marL="0">
-                  <a:buNone/>
-                </a:pPr>
-                <a:r>
-                  <a:rPr b="1"/>
-                  <a:t>Standard t-test</a:t>
-                </a:r>
-                <a:r>
-                  <a:rPr/>
-                  <a:t> — pools the two variances into one estimate. Requires both groups to have the </a:t>
-                </a:r>
-                <a:r>
-                  <a:rPr b="1"/>
-                  <a:t>same population variance</a:t>
-                </a:r>
-                <a:r>
-                  <a:rPr/>
-                  <a:t>.</a:t>
-                </a:r>
-              </a:p>
-              <a:p>
-                <a:pPr lvl="0" indent="0" marL="0">
-                  <a:buNone/>
-                </a:pPr>
-                <a:r>
-                  <a:rPr b="1"/>
-                  <a:t>Welch’s t-test</a:t>
-                </a:r>
-                <a:r>
-                  <a:rPr/>
-                  <a:t> — uses each group’s variance separately. Does </a:t>
-                </a:r>
-                <a:r>
-                  <a:rPr b="1"/>
-                  <a:t>not</a:t>
-                </a:r>
-                <a:r>
-                  <a:rPr/>
-                  <a:t> require equal variance.</a:t>
-                </a:r>
-              </a:p>
-              <a:p>
-                <a:pPr lvl="0" indent="0" marL="0">
-                  <a:buNone/>
-                </a:pPr>
-                <a14:m>
-                  <m:oMathPara xmlns:m="http://schemas.openxmlformats.org/officeDocument/2006/math">
-                    <m:oMathParaPr>
-                      <m:jc m:val="center"/>
-                    </m:oMathParaPr>
-                    <m:oMath>
-                      <m:sSub>
-                        <m:e>
-                          <m:r>
-                            <m:t>t</m:t>
-                          </m:r>
-                        </m:e>
-                        <m:sub>
-                          <m:r>
-                            <m:t>W</m:t>
-                          </m:r>
-                        </m:sub>
-                      </m:sSub>
-                      <m:r>
-                        <m:rPr>
-                          <m:sty m:val="p"/>
-                        </m:rPr>
-                        <m:t>=</m:t>
-                      </m:r>
-                      <m:f>
-                        <m:fPr>
-                          <m:type m:val="bar"/>
-                        </m:fPr>
-                        <m:num>
-                          <m:sSub>
-                            <m:e>
-                              <m:acc>
-                                <m:accPr>
-                                  <m:chr m:val="‾"/>
-                                </m:accPr>
-                                <m:e>
-                                  <m:r>
-                                    <m:t>x</m:t>
-                                  </m:r>
-                                </m:e>
-                              </m:acc>
-                            </m:e>
-                            <m:sub>
-                              <m:r>
-                                <m:t>1</m:t>
-                              </m:r>
-                            </m:sub>
-                          </m:sSub>
-                          <m:r>
-                            <m:rPr>
-                              <m:sty m:val="p"/>
-                            </m:rPr>
-                            <m:t>−</m:t>
-                          </m:r>
-                          <m:sSub>
-                            <m:e>
-                              <m:acc>
-                                <m:accPr>
-                                  <m:chr m:val="‾"/>
-                                </m:accPr>
-                                <m:e>
-                                  <m:r>
-                                    <m:t>x</m:t>
-                                  </m:r>
-                                </m:e>
-                              </m:acc>
-                            </m:e>
-                            <m:sub>
-                              <m:r>
-                                <m:t>2</m:t>
-                              </m:r>
-                            </m:sub>
-                          </m:sSub>
-                        </m:num>
-                        <m:den>
-                          <m:rad>
-                            <m:radPr>
-                              <m:degHide m:val="on"/>
-                            </m:radPr>
-                            <m:deg/>
-                            <m:e>
-                              <m:f>
-                                <m:fPr>
-                                  <m:type m:val="bar"/>
-                                </m:fPr>
-                                <m:num>
-                                  <m:sSubSup>
-                                    <m:e>
-                                      <m:r>
-                                        <m:t>s</m:t>
-                                      </m:r>
-                                    </m:e>
-                                    <m:sub>
-                                      <m:r>
-                                        <m:t>1</m:t>
-                                      </m:r>
-                                    </m:sub>
-                                    <m:sup>
-                                      <m:r>
-                                        <m:t>2</m:t>
-                                      </m:r>
-                                    </m:sup>
-                                  </m:sSubSup>
-                                </m:num>
-                                <m:den>
-                                  <m:sSub>
-                                    <m:e>
-                                      <m:r>
-                                        <m:t>n</m:t>
-                                      </m:r>
-                                    </m:e>
-                                    <m:sub>
-                                      <m:r>
-                                        <m:t>1</m:t>
-                                      </m:r>
-                                    </m:sub>
-                                  </m:sSub>
-                                </m:den>
-                              </m:f>
-                              <m:r>
-                                <m:rPr>
-                                  <m:sty m:val="p"/>
-                                </m:rPr>
-                                <m:t>+</m:t>
-                              </m:r>
-                              <m:f>
-                                <m:fPr>
-                                  <m:type m:val="bar"/>
-                                </m:fPr>
-                                <m:num>
-                                  <m:sSubSup>
-                                    <m:e>
-                                      <m:r>
-                                        <m:t>s</m:t>
-                                      </m:r>
-                                    </m:e>
-                                    <m:sub>
-                                      <m:r>
-                                        <m:t>2</m:t>
-                                      </m:r>
-                                    </m:sub>
-                                    <m:sup>
-                                      <m:r>
-                                        <m:t>2</m:t>
-                                      </m:r>
-                                    </m:sup>
-                                  </m:sSubSup>
-                                </m:num>
-                                <m:den>
-                                  <m:sSub>
-                                    <m:e>
-                                      <m:r>
-                                        <m:t>n</m:t>
-                                      </m:r>
-                                    </m:e>
-                                    <m:sub>
-                                      <m:r>
-                                        <m:t>2</m:t>
-                                      </m:r>
-                                    </m:sub>
-                                  </m:sSub>
-                                </m:den>
-                              </m:f>
-                            </m:e>
-                          </m:rad>
-                        </m:den>
-                      </m:f>
-                    </m:oMath>
-                  </m:oMathPara>
-                </a14:m>
-              </a:p>
-              <a:p>
-                <a:pPr lvl="0" indent="0" marL="0">
-                  <a:buNone/>
-                </a:pPr>
-                <a:r>
-                  <a:rPr/>
-                  <a:t>The denominator is the </a:t>
-                </a:r>
-                <a:r>
-                  <a:rPr b="1"/>
-                  <a:t>true SE of the difference</a:t>
-                </a:r>
-                <a:r>
-                  <a:rPr/>
-                  <a:t> — no pooling.</a:t>
-                </a:r>
-              </a:p>
-            </p:txBody>
-          </p:sp>
-        </mc:Choice>
-      </mc:AlternateContent>
       <p:sp>
         <p:nvSpPr>
-          <p:cNvPr id="4" name="Content Placeholder 3"/>
+          <p:cNvPr id="3" name="Content Placeholder 2"/>
           <p:cNvSpPr>
             <a:spLocks noGrp="1"/>
           </p:cNvSpPr>
           <p:nvPr>
-            <p:ph idx="2" sz="half"/>
+            <p:ph idx="1"/>
           </p:nvPr>
         </p:nvSpPr>
         <p:spPr/>
@@ -19255,52 +20905,11 @@
             </a:pPr>
             <a:r>
               <a:rPr b="1"/>
-              <a:t>Why always use Welch’s?</a:t>
-            </a:r>
-          </a:p>
-          <a:p>
-            <a:pPr lvl="0"/>
+              <a:t>We will cover:</a:t>
+            </a:r>
             <a:r>
               <a:rPr/>
-              <a:t>When variances </a:t>
-            </a:r>
-            <a:r>
-              <a:rPr b="1"/>
-              <a:t>are</a:t>
-            </a:r>
-            <a:r>
-              <a:rPr/>
-              <a:t> equal: almost identical result — minimal loss of power</a:t>
-            </a:r>
-          </a:p>
-          <a:p>
-            <a:pPr lvl="0"/>
-            <a:r>
-              <a:rPr/>
-              <a:t>When variances </a:t>
-            </a:r>
-            <a:r>
-              <a:rPr b="1"/>
-              <a:t>are not</a:t>
-            </a:r>
-            <a:r>
-              <a:rPr/>
-              <a:t> equal: standard t-test gives </a:t>
-            </a:r>
-            <a:r>
-              <a:rPr b="1"/>
-              <a:t>inflated Type I error</a:t>
-            </a:r>
-            <a:r>
-              <a:rPr/>
-              <a:t> (false positives)</a:t>
-            </a:r>
-          </a:p>
-          <a:p>
-            <a:pPr lvl="0"/>
-            <a:r>
-              <a:rPr b="1"/>
-              <a:t>Welch’s protects you either way</a:t>
+              <a:t> why comparing means isn’t enough, what a two-sample t-test is, why we default to Welch’s, and the formula in action.</a:t>
             </a:r>
           </a:p>
           <a:p>
@@ -19318,34 +20927,11 @@
             </a:pPr>
             <a:r>
               <a:rPr sz="2000" b="1"/>
-              <a:t>Best practice:</a:t>
+              <a:t>🖐 After this chunk: Activity Parts 1–3</a:t>
             </a:r>
             <a:r>
               <a:rPr sz="2000"/>
-              <a:t> use Welch’s as your </a:t>
-            </a:r>
-            <a:r>
-              <a:rPr sz="2000" b="1"/>
-              <a:t>default</a:t>
-            </a:r>
-            <a:r>
-              <a:rPr sz="2000"/>
-              <a:t> for all two-group comparisons.</a:t>
-            </a:r>
-          </a:p>
-          <a:p>
-            <a:pPr lvl="0" indent="0" marL="1270000">
-              <a:buNone/>
-            </a:pPr>
-            <a:r>
-              <a:rPr sz="2000"/>
-              <a:t>In R: </a:t>
-            </a:r>
-            <a:r>
-              <a:rPr sz="2000" b="1">
-                <a:latin typeface="Courier"/>
-              </a:rPr>
-              <a:t>var.equal = FALSE</a:t>
+              <a:t> (load data, state hypotheses, recap the descriptive stats).</a:t>
             </a:r>
           </a:p>
         </p:txBody>
